--- a/apresentacao/pli-hub-apresentacao.pptx
+++ b/apresentacao/pli-hub-apresentacao.pptx
@@ -10601,7 +10601,7 @@
         <p:spPr>
           <a:xfrm>
             <a:off x="658368" y="2148840"/>
-            <a:ext cx="3200400" cy="201168"/>
+            <a:ext cx="2743200" cy="201168"/>
           </a:xfrm>
           <a:prstGeom prst="rect">
             <a:avLst/>
@@ -10640,7 +10640,7 @@
         <p:spPr>
           <a:xfrm>
             <a:off x="658368" y="2377440"/>
-            <a:ext cx="3200400" cy="914400"/>
+            <a:ext cx="2743200" cy="914400"/>
           </a:xfrm>
           <a:prstGeom prst="rect">
             <a:avLst/>
@@ -10730,7 +10730,7 @@
         <p:spPr>
           <a:xfrm>
             <a:off x="877824" y="2560320"/>
-            <a:ext cx="2788920" cy="274320"/>
+            <a:ext cx="2331720" cy="274320"/>
           </a:xfrm>
           <a:prstGeom prst="rect">
             <a:avLst/>
@@ -10769,7 +10769,7 @@
         <p:spPr>
           <a:xfrm>
             <a:off x="877824" y="2880360"/>
-            <a:ext cx="2788920" cy="320040"/>
+            <a:ext cx="2331720" cy="320040"/>
           </a:xfrm>
           <a:prstGeom prst="rect">
             <a:avLst/>
@@ -10808,7 +10808,7 @@
         <p:spPr>
           <a:xfrm>
             <a:off x="658368" y="3520440"/>
-            <a:ext cx="3200400" cy="914400"/>
+            <a:ext cx="2743200" cy="914400"/>
           </a:xfrm>
           <a:prstGeom prst="rect">
             <a:avLst/>
@@ -10898,7 +10898,7 @@
         <p:spPr>
           <a:xfrm>
             <a:off x="877824" y="3703320"/>
-            <a:ext cx="2788920" cy="274320"/>
+            <a:ext cx="2331720" cy="274320"/>
           </a:xfrm>
           <a:prstGeom prst="rect">
             <a:avLst/>
@@ -10937,7 +10937,7 @@
         <p:spPr>
           <a:xfrm>
             <a:off x="877824" y="4023360"/>
-            <a:ext cx="2788920" cy="320040"/>
+            <a:ext cx="2331720" cy="320040"/>
           </a:xfrm>
           <a:prstGeom prst="rect">
             <a:avLst/>
@@ -10976,7 +10976,7 @@
         <p:spPr>
           <a:xfrm>
             <a:off x="4590288" y="2148840"/>
-            <a:ext cx="3200400" cy="201168"/>
+            <a:ext cx="2743200" cy="201168"/>
           </a:xfrm>
           <a:prstGeom prst="rect">
             <a:avLst/>
@@ -11015,7 +11015,7 @@
         <p:spPr>
           <a:xfrm>
             <a:off x="4590288" y="2926080"/>
-            <a:ext cx="3200400" cy="914400"/>
+            <a:ext cx="2743200" cy="914400"/>
           </a:xfrm>
           <a:prstGeom prst="rect">
             <a:avLst/>
@@ -11105,7 +11105,7 @@
         <p:spPr>
           <a:xfrm>
             <a:off x="4809744" y="3108960"/>
-            <a:ext cx="2788920" cy="274320"/>
+            <a:ext cx="2331720" cy="274320"/>
           </a:xfrm>
           <a:prstGeom prst="rect">
             <a:avLst/>
@@ -11144,7 +11144,7 @@
         <p:spPr>
           <a:xfrm>
             <a:off x="4809744" y="3429000"/>
-            <a:ext cx="2788920" cy="320040"/>
+            <a:ext cx="2331720" cy="320040"/>
           </a:xfrm>
           <a:prstGeom prst="rect">
             <a:avLst/>
@@ -11182,8 +11182,8 @@
         </p:nvCxnSpPr>
         <p:spPr>
           <a:xfrm>
-            <a:off x="3858768" y="2834640"/>
-            <a:ext cx="731520" cy="365760"/>
+            <a:off x="3401568" y="2834640"/>
+            <a:ext cx="1188720" cy="365760"/>
           </a:xfrm>
           <a:prstGeom prst="line">
             <a:avLst/>
@@ -11217,8 +11217,8 @@
         </p:nvSpPr>
         <p:spPr>
           <a:xfrm>
-            <a:off x="3218688" y="2724912"/>
-            <a:ext cx="2011680" cy="219456"/>
+            <a:off x="3429000" y="2706624"/>
+            <a:ext cx="1133856" cy="219456"/>
           </a:xfrm>
           <a:prstGeom prst="rect">
             <a:avLst/>
@@ -11237,7 +11237,7 @@
               </a:lnSpc>
             </a:pPr>
             <a:r>
-              <a:rPr sz="800" b="0">
+              <a:rPr sz="750" b="0">
                 <a:solidFill>
                   <a:srgbClr val="5D8296"/>
                 </a:solidFill>
@@ -11256,8 +11256,8 @@
         </p:nvCxnSpPr>
         <p:spPr>
           <a:xfrm flipV="1">
-            <a:off x="3858768" y="3611880"/>
-            <a:ext cx="731520" cy="365759"/>
+            <a:off x="3401568" y="3611880"/>
+            <a:ext cx="1188720" cy="365759"/>
           </a:xfrm>
           <a:prstGeom prst="line">
             <a:avLst/>
@@ -11291,8 +11291,8 @@
         </p:nvSpPr>
         <p:spPr>
           <a:xfrm>
-            <a:off x="3218688" y="3502151"/>
-            <a:ext cx="2011680" cy="219456"/>
+            <a:off x="3429000" y="3483863"/>
+            <a:ext cx="1133856" cy="219456"/>
           </a:xfrm>
           <a:prstGeom prst="rect">
             <a:avLst/>
@@ -11311,7 +11311,7 @@
               </a:lnSpc>
             </a:pPr>
             <a:r>
-              <a:rPr sz="800" b="0">
+              <a:rPr sz="750" b="0">
                 <a:solidFill>
                   <a:srgbClr val="5D8296"/>
                 </a:solidFill>
@@ -11331,7 +11331,7 @@
         <p:spPr>
           <a:xfrm>
             <a:off x="8522208" y="2148840"/>
-            <a:ext cx="3200400" cy="201168"/>
+            <a:ext cx="2743200" cy="201168"/>
           </a:xfrm>
           <a:prstGeom prst="rect">
             <a:avLst/>
@@ -11370,7 +11370,7 @@
         <p:spPr>
           <a:xfrm>
             <a:off x="8522208" y="2377440"/>
-            <a:ext cx="3200400" cy="914400"/>
+            <a:ext cx="2743200" cy="914400"/>
           </a:xfrm>
           <a:prstGeom prst="rect">
             <a:avLst/>
@@ -11460,7 +11460,7 @@
         <p:spPr>
           <a:xfrm>
             <a:off x="8741664" y="2560320"/>
-            <a:ext cx="2788920" cy="274320"/>
+            <a:ext cx="2331720" cy="274320"/>
           </a:xfrm>
           <a:prstGeom prst="rect">
             <a:avLst/>
@@ -11499,7 +11499,7 @@
         <p:spPr>
           <a:xfrm>
             <a:off x="8741664" y="2880360"/>
-            <a:ext cx="2788920" cy="320040"/>
+            <a:ext cx="2331720" cy="320040"/>
           </a:xfrm>
           <a:prstGeom prst="rect">
             <a:avLst/>
@@ -11538,7 +11538,7 @@
         <p:spPr>
           <a:xfrm>
             <a:off x="8522208" y="3520440"/>
-            <a:ext cx="3200400" cy="914400"/>
+            <a:ext cx="2743200" cy="914400"/>
           </a:xfrm>
           <a:prstGeom prst="rect">
             <a:avLst/>
@@ -11628,7 +11628,7 @@
         <p:spPr>
           <a:xfrm>
             <a:off x="8741664" y="3703320"/>
-            <a:ext cx="2788920" cy="274320"/>
+            <a:ext cx="2331720" cy="274320"/>
           </a:xfrm>
           <a:prstGeom prst="rect">
             <a:avLst/>
@@ -11667,7 +11667,7 @@
         <p:spPr>
           <a:xfrm>
             <a:off x="8741664" y="4023360"/>
-            <a:ext cx="2788920" cy="320040"/>
+            <a:ext cx="2331720" cy="320040"/>
           </a:xfrm>
           <a:prstGeom prst="rect">
             <a:avLst/>
@@ -11706,7 +11706,7 @@
         <p:spPr>
           <a:xfrm>
             <a:off x="658368" y="4937760"/>
-            <a:ext cx="3200400" cy="201168"/>
+            <a:ext cx="2743200" cy="201168"/>
           </a:xfrm>
           <a:prstGeom prst="rect">
             <a:avLst/>
@@ -11745,7 +11745,7 @@
         <p:spPr>
           <a:xfrm>
             <a:off x="658368" y="5166360"/>
-            <a:ext cx="3200400" cy="914400"/>
+            <a:ext cx="2743200" cy="914400"/>
           </a:xfrm>
           <a:prstGeom prst="rect">
             <a:avLst/>
@@ -11835,7 +11835,7 @@
         <p:spPr>
           <a:xfrm>
             <a:off x="877824" y="5349240"/>
-            <a:ext cx="2788920" cy="274320"/>
+            <a:ext cx="2331720" cy="274320"/>
           </a:xfrm>
           <a:prstGeom prst="rect">
             <a:avLst/>
@@ -11874,7 +11874,7 @@
         <p:spPr>
           <a:xfrm>
             <a:off x="877824" y="5669280"/>
-            <a:ext cx="2788920" cy="320040"/>
+            <a:ext cx="2331720" cy="320040"/>
           </a:xfrm>
           <a:prstGeom prst="rect">
             <a:avLst/>
@@ -11913,7 +11913,7 @@
         <p:spPr>
           <a:xfrm>
             <a:off x="4590288" y="4937760"/>
-            <a:ext cx="3200400" cy="201168"/>
+            <a:ext cx="2743200" cy="201168"/>
           </a:xfrm>
           <a:prstGeom prst="rect">
             <a:avLst/>
@@ -11952,7 +11952,7 @@
         <p:spPr>
           <a:xfrm>
             <a:off x="4590288" y="5166360"/>
-            <a:ext cx="3200400" cy="914400"/>
+            <a:ext cx="2743200" cy="914400"/>
           </a:xfrm>
           <a:prstGeom prst="rect">
             <a:avLst/>
@@ -12042,7 +12042,7 @@
         <p:spPr>
           <a:xfrm>
             <a:off x="4809744" y="5349240"/>
-            <a:ext cx="2788920" cy="274320"/>
+            <a:ext cx="2331720" cy="274320"/>
           </a:xfrm>
           <a:prstGeom prst="rect">
             <a:avLst/>
@@ -12081,7 +12081,7 @@
         <p:spPr>
           <a:xfrm>
             <a:off x="4809744" y="5669280"/>
-            <a:ext cx="2788920" cy="320040"/>
+            <a:ext cx="2331720" cy="320040"/>
           </a:xfrm>
           <a:prstGeom prst="rect">
             <a:avLst/>
@@ -12120,7 +12120,7 @@
         <p:spPr>
           <a:xfrm>
             <a:off x="8522208" y="4937760"/>
-            <a:ext cx="3200400" cy="201168"/>
+            <a:ext cx="2743200" cy="201168"/>
           </a:xfrm>
           <a:prstGeom prst="rect">
             <a:avLst/>
@@ -12159,7 +12159,7 @@
         <p:spPr>
           <a:xfrm>
             <a:off x="8522208" y="5166360"/>
-            <a:ext cx="3200400" cy="914400"/>
+            <a:ext cx="2743200" cy="914400"/>
           </a:xfrm>
           <a:prstGeom prst="rect">
             <a:avLst/>
@@ -12249,7 +12249,7 @@
         <p:spPr>
           <a:xfrm>
             <a:off x="8741664" y="5349240"/>
-            <a:ext cx="2788920" cy="274320"/>
+            <a:ext cx="2331720" cy="274320"/>
           </a:xfrm>
           <a:prstGeom prst="rect">
             <a:avLst/>
@@ -12288,7 +12288,7 @@
         <p:spPr>
           <a:xfrm>
             <a:off x="8741664" y="5669280"/>
-            <a:ext cx="2788920" cy="320040"/>
+            <a:ext cx="2331720" cy="320040"/>
           </a:xfrm>
           <a:prstGeom prst="rect">
             <a:avLst/>
@@ -12326,8 +12326,8 @@
         </p:nvCxnSpPr>
         <p:spPr>
           <a:xfrm>
-            <a:off x="3858768" y="5623560"/>
-            <a:ext cx="731520" cy="0"/>
+            <a:off x="3401568" y="5623560"/>
+            <a:ext cx="1188720" cy="0"/>
           </a:xfrm>
           <a:prstGeom prst="line">
             <a:avLst/>
@@ -12361,8 +12361,8 @@
         </p:nvSpPr>
         <p:spPr>
           <a:xfrm>
-            <a:off x="3218688" y="5330952"/>
-            <a:ext cx="2011680" cy="219456"/>
+            <a:off x="3429000" y="5312664"/>
+            <a:ext cx="1133856" cy="219456"/>
           </a:xfrm>
           <a:prstGeom prst="rect">
             <a:avLst/>
@@ -12381,13 +12381,13 @@
               </a:lnSpc>
             </a:pPr>
             <a:r>
-              <a:rPr sz="800" b="0">
+              <a:rPr sz="750" b="0">
                 <a:solidFill>
                   <a:srgbClr val="5D8296"/>
                 </a:solidFill>
                 <a:latin typeface="Consolas"/>
               </a:rPr>
-              <a:t>AUTENTICAÇÃO E CADASTROS</a:t>
+              <a:t>LOGIN E CADASTROS</a:t>
             </a:r>
           </a:p>
         </p:txBody>
@@ -12400,8 +12400,8 @@
         </p:nvCxnSpPr>
         <p:spPr>
           <a:xfrm flipH="1">
-            <a:off x="7790688" y="5623560"/>
-            <a:ext cx="731520" cy="0"/>
+            <a:off x="7333488" y="5623560"/>
+            <a:ext cx="1188720" cy="0"/>
           </a:xfrm>
           <a:prstGeom prst="line">
             <a:avLst/>
@@ -12435,8 +12435,8 @@
         </p:nvSpPr>
         <p:spPr>
           <a:xfrm>
-            <a:off x="7150608" y="5330952"/>
-            <a:ext cx="2011680" cy="219456"/>
+            <a:off x="7360920" y="5312664"/>
+            <a:ext cx="1133856" cy="219456"/>
           </a:xfrm>
           <a:prstGeom prst="rect">
             <a:avLst/>
@@ -12455,13 +12455,13 @@
               </a:lnSpc>
             </a:pPr>
             <a:r>
-              <a:rPr sz="800" b="0">
+              <a:rPr sz="750" b="0">
                 <a:solidFill>
                   <a:srgbClr val="5D8296"/>
                 </a:solidFill>
                 <a:latin typeface="Consolas"/>
               </a:rPr>
-              <a:t>MÉTODO MULTICRITÉRIO</a:t>
+              <a:t>MÉTODO AHP</a:t>
             </a:r>
           </a:p>
         </p:txBody>

--- a/apresentacao/pli-hub-apresentacao.pptx
+++ b/apresentacao/pli-hub-apresentacao.pptx
@@ -5,25 +5,25 @@
     <p:sldMasterId id="2147483648" r:id="rId1"/>
   </p:sldMasterIdLst>
   <p:sldIdLst>
-    <p:sldId id="256" r:id="rId7"/>
-    <p:sldId id="257" r:id="rId8"/>
-    <p:sldId id="258" r:id="rId9"/>
-    <p:sldId id="259" r:id="rId10"/>
-    <p:sldId id="260" r:id="rId11"/>
-    <p:sldId id="261" r:id="rId12"/>
-    <p:sldId id="262" r:id="rId13"/>
-    <p:sldId id="263" r:id="rId14"/>
-    <p:sldId id="264" r:id="rId15"/>
-    <p:sldId id="265" r:id="rId16"/>
-    <p:sldId id="266" r:id="rId17"/>
-    <p:sldId id="267" r:id="rId18"/>
-    <p:sldId id="268" r:id="rId19"/>
-    <p:sldId id="269" r:id="rId20"/>
-    <p:sldId id="270" r:id="rId21"/>
-    <p:sldId id="271" r:id="rId22"/>
-    <p:sldId id="272" r:id="rId23"/>
+    <p:sldId id="256" r:id="rId2"/>
+    <p:sldId id="257" r:id="rId3"/>
+    <p:sldId id="258" r:id="rId4"/>
+    <p:sldId id="259" r:id="rId5"/>
+    <p:sldId id="260" r:id="rId6"/>
+    <p:sldId id="261" r:id="rId7"/>
+    <p:sldId id="262" r:id="rId8"/>
+    <p:sldId id="263" r:id="rId9"/>
+    <p:sldId id="264" r:id="rId10"/>
+    <p:sldId id="265" r:id="rId11"/>
+    <p:sldId id="266" r:id="rId12"/>
+    <p:sldId id="267" r:id="rId13"/>
+    <p:sldId id="268" r:id="rId14"/>
+    <p:sldId id="269" r:id="rId15"/>
+    <p:sldId id="270" r:id="rId16"/>
+    <p:sldId id="271" r:id="rId17"/>
+    <p:sldId id="272" r:id="rId18"/>
   </p:sldIdLst>
-  <p:sldSz cx="12191695" cy="6858000" type="screen4x3"/>
+  <p:sldSz cx="12192000" cy="6858000"/>
   <p:notesSz cx="6858000" cy="9144000"/>
   <p:defaultTextStyle>
     <a:defPPr>
@@ -120,6 +120,22 @@
       </a:defRPr>
     </a:lvl9pPr>
   </p:defaultTextStyle>
+  <p:extLst>
+    <p:ext uri="{EFAFB233-063F-42B5-8137-9DF3F51BA10A}">
+      <p15:sldGuideLst xmlns:p15="http://schemas.microsoft.com/office/powerpoint/2012/main">
+        <p15:guide id="1" orient="horz" pos="2160">
+          <p15:clr>
+            <a:srgbClr val="A4A3A4"/>
+          </p15:clr>
+        </p15:guide>
+        <p15:guide id="2" pos="2880">
+          <p15:clr>
+            <a:srgbClr val="A4A3A4"/>
+          </p15:clr>
+        </p15:guide>
+      </p15:sldGuideLst>
+    </p:ext>
+  </p:extLst>
 </p:presentation>
 </file>
 
@@ -161,10 +177,9 @@
           <a:lstStyle/>
           <a:p>
             <a:r>
-              <a:rPr lang="en-US" smtClean="0"/>
+              <a:rPr lang="en-US"/>
               <a:t>Click to edit Master title style</a:t>
             </a:r>
-            <a:endParaRPr lang="en-US"/>
           </a:p>
         </p:txBody>
       </p:sp>
@@ -280,10 +295,9 @@
           </a:lstStyle>
           <a:p>
             <a:r>
-              <a:rPr lang="en-US" smtClean="0"/>
+              <a:rPr lang="en-US"/>
               <a:t>Click to edit Master subtitle style</a:t>
             </a:r>
-            <a:endParaRPr lang="en-US"/>
           </a:p>
         </p:txBody>
       </p:sp>
@@ -304,7 +318,7 @@
           <a:p>
             <a:fld id="{5BCAD085-E8A6-8845-BD4E-CB4CCA059FC4}" type="datetimeFigureOut">
               <a:rPr lang="en-US" smtClean="0"/>
-              <a:t>1/27/13</a:t>
+              <a:t>8/31/2026</a:t>
             </a:fld>
             <a:endParaRPr lang="en-US"/>
           </a:p>
@@ -346,7 +360,7 @@
           <a:p>
             <a:fld id="{C1FF6DA9-008F-8B48-92A6-B652298478BF}" type="slidenum">
               <a:rPr lang="en-US" smtClean="0"/>
-              <a:t>‹#›</a:t>
+              <a:t>‹nº›</a:t>
             </a:fld>
             <a:endParaRPr lang="en-US"/>
           </a:p>
@@ -398,10 +412,9 @@
           <a:lstStyle/>
           <a:p>
             <a:r>
-              <a:rPr lang="en-US" smtClean="0"/>
+              <a:rPr lang="en-US"/>
               <a:t>Click to edit Master title style</a:t>
             </a:r>
-            <a:endParaRPr lang="en-US"/>
           </a:p>
         </p:txBody>
       </p:sp>
@@ -422,38 +435,37 @@
           <a:p>
             <a:pPr lvl="0"/>
             <a:r>
-              <a:rPr lang="en-US" smtClean="0"/>
+              <a:rPr lang="en-US"/>
               <a:t>Click to edit Master text styles</a:t>
             </a:r>
           </a:p>
           <a:p>
             <a:pPr lvl="1"/>
             <a:r>
-              <a:rPr lang="en-US" smtClean="0"/>
+              <a:rPr lang="en-US"/>
               <a:t>Second level</a:t>
             </a:r>
           </a:p>
           <a:p>
             <a:pPr lvl="2"/>
             <a:r>
-              <a:rPr lang="en-US" smtClean="0"/>
+              <a:rPr lang="en-US"/>
               <a:t>Third level</a:t>
             </a:r>
           </a:p>
           <a:p>
             <a:pPr lvl="3"/>
             <a:r>
-              <a:rPr lang="en-US" smtClean="0"/>
+              <a:rPr lang="en-US"/>
               <a:t>Fourth level</a:t>
             </a:r>
           </a:p>
           <a:p>
             <a:pPr lvl="4"/>
             <a:r>
-              <a:rPr lang="en-US" smtClean="0"/>
+              <a:rPr lang="en-US"/>
               <a:t>Fifth level</a:t>
             </a:r>
-            <a:endParaRPr lang="en-US"/>
           </a:p>
         </p:txBody>
       </p:sp>
@@ -474,7 +486,7 @@
           <a:p>
             <a:fld id="{5BCAD085-E8A6-8845-BD4E-CB4CCA059FC4}" type="datetimeFigureOut">
               <a:rPr lang="en-US" smtClean="0"/>
-              <a:t>1/27/13</a:t>
+              <a:t>8/31/2026</a:t>
             </a:fld>
             <a:endParaRPr lang="en-US"/>
           </a:p>
@@ -516,7 +528,7 @@
           <a:p>
             <a:fld id="{C1FF6DA9-008F-8B48-92A6-B652298478BF}" type="slidenum">
               <a:rPr lang="en-US" smtClean="0"/>
-              <a:t>‹#›</a:t>
+              <a:t>‹nº›</a:t>
             </a:fld>
             <a:endParaRPr lang="en-US"/>
           </a:p>
@@ -573,10 +585,9 @@
           <a:lstStyle/>
           <a:p>
             <a:r>
-              <a:rPr lang="en-US" smtClean="0"/>
+              <a:rPr lang="en-US"/>
               <a:t>Click to edit Master title style</a:t>
             </a:r>
-            <a:endParaRPr lang="en-US"/>
           </a:p>
         </p:txBody>
       </p:sp>
@@ -602,38 +613,37 @@
           <a:p>
             <a:pPr lvl="0"/>
             <a:r>
-              <a:rPr lang="en-US" smtClean="0"/>
+              <a:rPr lang="en-US"/>
               <a:t>Click to edit Master text styles</a:t>
             </a:r>
           </a:p>
           <a:p>
             <a:pPr lvl="1"/>
             <a:r>
-              <a:rPr lang="en-US" smtClean="0"/>
+              <a:rPr lang="en-US"/>
               <a:t>Second level</a:t>
             </a:r>
           </a:p>
           <a:p>
             <a:pPr lvl="2"/>
             <a:r>
-              <a:rPr lang="en-US" smtClean="0"/>
+              <a:rPr lang="en-US"/>
               <a:t>Third level</a:t>
             </a:r>
           </a:p>
           <a:p>
             <a:pPr lvl="3"/>
             <a:r>
-              <a:rPr lang="en-US" smtClean="0"/>
+              <a:rPr lang="en-US"/>
               <a:t>Fourth level</a:t>
             </a:r>
           </a:p>
           <a:p>
             <a:pPr lvl="4"/>
             <a:r>
-              <a:rPr lang="en-US" smtClean="0"/>
+              <a:rPr lang="en-US"/>
               <a:t>Fifth level</a:t>
             </a:r>
-            <a:endParaRPr lang="en-US"/>
           </a:p>
         </p:txBody>
       </p:sp>
@@ -654,7 +664,7 @@
           <a:p>
             <a:fld id="{5BCAD085-E8A6-8845-BD4E-CB4CCA059FC4}" type="datetimeFigureOut">
               <a:rPr lang="en-US" smtClean="0"/>
-              <a:t>1/27/13</a:t>
+              <a:t>8/31/2026</a:t>
             </a:fld>
             <a:endParaRPr lang="en-US"/>
           </a:p>
@@ -696,7 +706,7 @@
           <a:p>
             <a:fld id="{C1FF6DA9-008F-8B48-92A6-B652298478BF}" type="slidenum">
               <a:rPr lang="en-US" smtClean="0"/>
-              <a:t>‹#›</a:t>
+              <a:t>‹nº›</a:t>
             </a:fld>
             <a:endParaRPr lang="en-US"/>
           </a:p>
@@ -748,10 +758,9 @@
           <a:lstStyle/>
           <a:p>
             <a:r>
-              <a:rPr lang="en-US" smtClean="0"/>
+              <a:rPr lang="en-US"/>
               <a:t>Click to edit Master title style</a:t>
             </a:r>
-            <a:endParaRPr lang="en-US"/>
           </a:p>
         </p:txBody>
       </p:sp>
@@ -772,38 +781,37 @@
           <a:p>
             <a:pPr lvl="0"/>
             <a:r>
-              <a:rPr lang="en-US" smtClean="0"/>
+              <a:rPr lang="en-US"/>
               <a:t>Click to edit Master text styles</a:t>
             </a:r>
           </a:p>
           <a:p>
             <a:pPr lvl="1"/>
             <a:r>
-              <a:rPr lang="en-US" smtClean="0"/>
+              <a:rPr lang="en-US"/>
               <a:t>Second level</a:t>
             </a:r>
           </a:p>
           <a:p>
             <a:pPr lvl="2"/>
             <a:r>
-              <a:rPr lang="en-US" smtClean="0"/>
+              <a:rPr lang="en-US"/>
               <a:t>Third level</a:t>
             </a:r>
           </a:p>
           <a:p>
             <a:pPr lvl="3"/>
             <a:r>
-              <a:rPr lang="en-US" smtClean="0"/>
+              <a:rPr lang="en-US"/>
               <a:t>Fourth level</a:t>
             </a:r>
           </a:p>
           <a:p>
             <a:pPr lvl="4"/>
             <a:r>
-              <a:rPr lang="en-US" smtClean="0"/>
+              <a:rPr lang="en-US"/>
               <a:t>Fifth level</a:t>
             </a:r>
-            <a:endParaRPr lang="en-US"/>
           </a:p>
         </p:txBody>
       </p:sp>
@@ -824,7 +832,7 @@
           <a:p>
             <a:fld id="{5BCAD085-E8A6-8845-BD4E-CB4CCA059FC4}" type="datetimeFigureOut">
               <a:rPr lang="en-US" smtClean="0"/>
-              <a:t>1/27/13</a:t>
+              <a:t>8/31/2026</a:t>
             </a:fld>
             <a:endParaRPr lang="en-US"/>
           </a:p>
@@ -866,7 +874,7 @@
           <a:p>
             <a:fld id="{C1FF6DA9-008F-8B48-92A6-B652298478BF}" type="slidenum">
               <a:rPr lang="en-US" smtClean="0"/>
-              <a:t>‹#›</a:t>
+              <a:t>‹nº›</a:t>
             </a:fld>
             <a:endParaRPr lang="en-US"/>
           </a:p>
@@ -927,10 +935,9 @@
           </a:lstStyle>
           <a:p>
             <a:r>
-              <a:rPr lang="en-US" smtClean="0"/>
+              <a:rPr lang="en-US"/>
               <a:t>Click to edit Master title style</a:t>
             </a:r>
-            <a:endParaRPr lang="en-US"/>
           </a:p>
         </p:txBody>
       </p:sp>
@@ -1047,7 +1054,7 @@
           <a:p>
             <a:pPr lvl="0"/>
             <a:r>
-              <a:rPr lang="en-US" smtClean="0"/>
+              <a:rPr lang="en-US"/>
               <a:t>Click to edit Master text styles</a:t>
             </a:r>
           </a:p>
@@ -1070,7 +1077,7 @@
           <a:p>
             <a:fld id="{5BCAD085-E8A6-8845-BD4E-CB4CCA059FC4}" type="datetimeFigureOut">
               <a:rPr lang="en-US" smtClean="0"/>
-              <a:t>1/27/13</a:t>
+              <a:t>8/31/2026</a:t>
             </a:fld>
             <a:endParaRPr lang="en-US"/>
           </a:p>
@@ -1112,7 +1119,7 @@
           <a:p>
             <a:fld id="{C1FF6DA9-008F-8B48-92A6-B652298478BF}" type="slidenum">
               <a:rPr lang="en-US" smtClean="0"/>
-              <a:t>‹#›</a:t>
+              <a:t>‹nº›</a:t>
             </a:fld>
             <a:endParaRPr lang="en-US"/>
           </a:p>
@@ -1164,10 +1171,9 @@
           <a:lstStyle/>
           <a:p>
             <a:r>
-              <a:rPr lang="en-US" smtClean="0"/>
+              <a:rPr lang="en-US"/>
               <a:t>Click to edit Master title style</a:t>
             </a:r>
-            <a:endParaRPr lang="en-US"/>
           </a:p>
         </p:txBody>
       </p:sp>
@@ -1221,38 +1227,37 @@
           <a:p>
             <a:pPr lvl="0"/>
             <a:r>
-              <a:rPr lang="en-US" smtClean="0"/>
+              <a:rPr lang="en-US"/>
               <a:t>Click to edit Master text styles</a:t>
             </a:r>
           </a:p>
           <a:p>
             <a:pPr lvl="1"/>
             <a:r>
-              <a:rPr lang="en-US" smtClean="0"/>
+              <a:rPr lang="en-US"/>
               <a:t>Second level</a:t>
             </a:r>
           </a:p>
           <a:p>
             <a:pPr lvl="2"/>
             <a:r>
-              <a:rPr lang="en-US" smtClean="0"/>
+              <a:rPr lang="en-US"/>
               <a:t>Third level</a:t>
             </a:r>
           </a:p>
           <a:p>
             <a:pPr lvl="3"/>
             <a:r>
-              <a:rPr lang="en-US" smtClean="0"/>
+              <a:rPr lang="en-US"/>
               <a:t>Fourth level</a:t>
             </a:r>
           </a:p>
           <a:p>
             <a:pPr lvl="4"/>
             <a:r>
-              <a:rPr lang="en-US" smtClean="0"/>
+              <a:rPr lang="en-US"/>
               <a:t>Fifth level</a:t>
             </a:r>
-            <a:endParaRPr lang="en-US"/>
           </a:p>
         </p:txBody>
       </p:sp>
@@ -1306,38 +1311,37 @@
           <a:p>
             <a:pPr lvl="0"/>
             <a:r>
-              <a:rPr lang="en-US" smtClean="0"/>
+              <a:rPr lang="en-US"/>
               <a:t>Click to edit Master text styles</a:t>
             </a:r>
           </a:p>
           <a:p>
             <a:pPr lvl="1"/>
             <a:r>
-              <a:rPr lang="en-US" smtClean="0"/>
+              <a:rPr lang="en-US"/>
               <a:t>Second level</a:t>
             </a:r>
           </a:p>
           <a:p>
             <a:pPr lvl="2"/>
             <a:r>
-              <a:rPr lang="en-US" smtClean="0"/>
+              <a:rPr lang="en-US"/>
               <a:t>Third level</a:t>
             </a:r>
           </a:p>
           <a:p>
             <a:pPr lvl="3"/>
             <a:r>
-              <a:rPr lang="en-US" smtClean="0"/>
+              <a:rPr lang="en-US"/>
               <a:t>Fourth level</a:t>
             </a:r>
           </a:p>
           <a:p>
             <a:pPr lvl="4"/>
             <a:r>
-              <a:rPr lang="en-US" smtClean="0"/>
+              <a:rPr lang="en-US"/>
               <a:t>Fifth level</a:t>
             </a:r>
-            <a:endParaRPr lang="en-US"/>
           </a:p>
         </p:txBody>
       </p:sp>
@@ -1358,7 +1362,7 @@
           <a:p>
             <a:fld id="{5BCAD085-E8A6-8845-BD4E-CB4CCA059FC4}" type="datetimeFigureOut">
               <a:rPr lang="en-US" smtClean="0"/>
-              <a:t>1/27/13</a:t>
+              <a:t>8/31/2026</a:t>
             </a:fld>
             <a:endParaRPr lang="en-US"/>
           </a:p>
@@ -1400,7 +1404,7 @@
           <a:p>
             <a:fld id="{C1FF6DA9-008F-8B48-92A6-B652298478BF}" type="slidenum">
               <a:rPr lang="en-US" smtClean="0"/>
-              <a:t>‹#›</a:t>
+              <a:t>‹nº›</a:t>
             </a:fld>
             <a:endParaRPr lang="en-US"/>
           </a:p>
@@ -1456,10 +1460,9 @@
           </a:lstStyle>
           <a:p>
             <a:r>
-              <a:rPr lang="en-US" smtClean="0"/>
+              <a:rPr lang="en-US"/>
               <a:t>Click to edit Master title style</a:t>
             </a:r>
-            <a:endParaRPr lang="en-US"/>
           </a:p>
         </p:txBody>
       </p:sp>
@@ -1522,7 +1525,7 @@
           <a:p>
             <a:pPr lvl="0"/>
             <a:r>
-              <a:rPr lang="en-US" smtClean="0"/>
+              <a:rPr lang="en-US"/>
               <a:t>Click to edit Master text styles</a:t>
             </a:r>
           </a:p>
@@ -1578,38 +1581,37 @@
           <a:p>
             <a:pPr lvl="0"/>
             <a:r>
-              <a:rPr lang="en-US" smtClean="0"/>
+              <a:rPr lang="en-US"/>
               <a:t>Click to edit Master text styles</a:t>
             </a:r>
           </a:p>
           <a:p>
             <a:pPr lvl="1"/>
             <a:r>
-              <a:rPr lang="en-US" smtClean="0"/>
+              <a:rPr lang="en-US"/>
               <a:t>Second level</a:t>
             </a:r>
           </a:p>
           <a:p>
             <a:pPr lvl="2"/>
             <a:r>
-              <a:rPr lang="en-US" smtClean="0"/>
+              <a:rPr lang="en-US"/>
               <a:t>Third level</a:t>
             </a:r>
           </a:p>
           <a:p>
             <a:pPr lvl="3"/>
             <a:r>
-              <a:rPr lang="en-US" smtClean="0"/>
+              <a:rPr lang="en-US"/>
               <a:t>Fourth level</a:t>
             </a:r>
           </a:p>
           <a:p>
             <a:pPr lvl="4"/>
             <a:r>
-              <a:rPr lang="en-US" smtClean="0"/>
+              <a:rPr lang="en-US"/>
               <a:t>Fifth level</a:t>
             </a:r>
-            <a:endParaRPr lang="en-US"/>
           </a:p>
         </p:txBody>
       </p:sp>
@@ -1672,7 +1674,7 @@
           <a:p>
             <a:pPr lvl="0"/>
             <a:r>
-              <a:rPr lang="en-US" smtClean="0"/>
+              <a:rPr lang="en-US"/>
               <a:t>Click to edit Master text styles</a:t>
             </a:r>
           </a:p>
@@ -1728,38 +1730,37 @@
           <a:p>
             <a:pPr lvl="0"/>
             <a:r>
-              <a:rPr lang="en-US" smtClean="0"/>
+              <a:rPr lang="en-US"/>
               <a:t>Click to edit Master text styles</a:t>
             </a:r>
           </a:p>
           <a:p>
             <a:pPr lvl="1"/>
             <a:r>
-              <a:rPr lang="en-US" smtClean="0"/>
+              <a:rPr lang="en-US"/>
               <a:t>Second level</a:t>
             </a:r>
           </a:p>
           <a:p>
             <a:pPr lvl="2"/>
             <a:r>
-              <a:rPr lang="en-US" smtClean="0"/>
+              <a:rPr lang="en-US"/>
               <a:t>Third level</a:t>
             </a:r>
           </a:p>
           <a:p>
             <a:pPr lvl="3"/>
             <a:r>
-              <a:rPr lang="en-US" smtClean="0"/>
+              <a:rPr lang="en-US"/>
               <a:t>Fourth level</a:t>
             </a:r>
           </a:p>
           <a:p>
             <a:pPr lvl="4"/>
             <a:r>
-              <a:rPr lang="en-US" smtClean="0"/>
+              <a:rPr lang="en-US"/>
               <a:t>Fifth level</a:t>
             </a:r>
-            <a:endParaRPr lang="en-US"/>
           </a:p>
         </p:txBody>
       </p:sp>
@@ -1780,7 +1781,7 @@
           <a:p>
             <a:fld id="{5BCAD085-E8A6-8845-BD4E-CB4CCA059FC4}" type="datetimeFigureOut">
               <a:rPr lang="en-US" smtClean="0"/>
-              <a:t>1/27/13</a:t>
+              <a:t>8/31/2026</a:t>
             </a:fld>
             <a:endParaRPr lang="en-US"/>
           </a:p>
@@ -1822,7 +1823,7 @@
           <a:p>
             <a:fld id="{C1FF6DA9-008F-8B48-92A6-B652298478BF}" type="slidenum">
               <a:rPr lang="en-US" smtClean="0"/>
-              <a:t>‹#›</a:t>
+              <a:t>‹nº›</a:t>
             </a:fld>
             <a:endParaRPr lang="en-US"/>
           </a:p>
@@ -1874,10 +1875,9 @@
           <a:lstStyle/>
           <a:p>
             <a:r>
-              <a:rPr lang="en-US" smtClean="0"/>
+              <a:rPr lang="en-US"/>
               <a:t>Click to edit Master title style</a:t>
             </a:r>
-            <a:endParaRPr lang="en-US"/>
           </a:p>
         </p:txBody>
       </p:sp>
@@ -1898,7 +1898,7 @@
           <a:p>
             <a:fld id="{5BCAD085-E8A6-8845-BD4E-CB4CCA059FC4}" type="datetimeFigureOut">
               <a:rPr lang="en-US" smtClean="0"/>
-              <a:t>1/27/13</a:t>
+              <a:t>8/31/2026</a:t>
             </a:fld>
             <a:endParaRPr lang="en-US"/>
           </a:p>
@@ -1940,7 +1940,7 @@
           <a:p>
             <a:fld id="{C1FF6DA9-008F-8B48-92A6-B652298478BF}" type="slidenum">
               <a:rPr lang="en-US" smtClean="0"/>
-              <a:t>‹#›</a:t>
+              <a:t>‹nº›</a:t>
             </a:fld>
             <a:endParaRPr lang="en-US"/>
           </a:p>
@@ -1993,7 +1993,7 @@
           <a:p>
             <a:fld id="{5BCAD085-E8A6-8845-BD4E-CB4CCA059FC4}" type="datetimeFigureOut">
               <a:rPr lang="en-US" smtClean="0"/>
-              <a:t>1/27/13</a:t>
+              <a:t>8/31/2026</a:t>
             </a:fld>
             <a:endParaRPr lang="en-US"/>
           </a:p>
@@ -2035,7 +2035,7 @@
           <a:p>
             <a:fld id="{C1FF6DA9-008F-8B48-92A6-B652298478BF}" type="slidenum">
               <a:rPr lang="en-US" smtClean="0"/>
-              <a:t>‹#›</a:t>
+              <a:t>‹nº›</a:t>
             </a:fld>
             <a:endParaRPr lang="en-US"/>
           </a:p>
@@ -2096,10 +2096,9 @@
           </a:lstStyle>
           <a:p>
             <a:r>
-              <a:rPr lang="en-US" smtClean="0"/>
+              <a:rPr lang="en-US"/>
               <a:t>Click to edit Master title style</a:t>
             </a:r>
-            <a:endParaRPr lang="en-US"/>
           </a:p>
         </p:txBody>
       </p:sp>
@@ -2153,38 +2152,37 @@
           <a:p>
             <a:pPr lvl="0"/>
             <a:r>
-              <a:rPr lang="en-US" smtClean="0"/>
+              <a:rPr lang="en-US"/>
               <a:t>Click to edit Master text styles</a:t>
             </a:r>
           </a:p>
           <a:p>
             <a:pPr lvl="1"/>
             <a:r>
-              <a:rPr lang="en-US" smtClean="0"/>
+              <a:rPr lang="en-US"/>
               <a:t>Second level</a:t>
             </a:r>
           </a:p>
           <a:p>
             <a:pPr lvl="2"/>
             <a:r>
-              <a:rPr lang="en-US" smtClean="0"/>
+              <a:rPr lang="en-US"/>
               <a:t>Third level</a:t>
             </a:r>
           </a:p>
           <a:p>
             <a:pPr lvl="3"/>
             <a:r>
-              <a:rPr lang="en-US" smtClean="0"/>
+              <a:rPr lang="en-US"/>
               <a:t>Fourth level</a:t>
             </a:r>
           </a:p>
           <a:p>
             <a:pPr lvl="4"/>
             <a:r>
-              <a:rPr lang="en-US" smtClean="0"/>
+              <a:rPr lang="en-US"/>
               <a:t>Fifth level</a:t>
             </a:r>
-            <a:endParaRPr lang="en-US"/>
           </a:p>
         </p:txBody>
       </p:sp>
@@ -2247,7 +2245,7 @@
           <a:p>
             <a:pPr lvl="0"/>
             <a:r>
-              <a:rPr lang="en-US" smtClean="0"/>
+              <a:rPr lang="en-US"/>
               <a:t>Click to edit Master text styles</a:t>
             </a:r>
           </a:p>
@@ -2270,7 +2268,7 @@
           <a:p>
             <a:fld id="{5BCAD085-E8A6-8845-BD4E-CB4CCA059FC4}" type="datetimeFigureOut">
               <a:rPr lang="en-US" smtClean="0"/>
-              <a:t>1/27/13</a:t>
+              <a:t>8/31/2026</a:t>
             </a:fld>
             <a:endParaRPr lang="en-US"/>
           </a:p>
@@ -2312,7 +2310,7 @@
           <a:p>
             <a:fld id="{C1FF6DA9-008F-8B48-92A6-B652298478BF}" type="slidenum">
               <a:rPr lang="en-US" smtClean="0"/>
-              <a:t>‹#›</a:t>
+              <a:t>‹nº›</a:t>
             </a:fld>
             <a:endParaRPr lang="en-US"/>
           </a:p>
@@ -2373,10 +2371,9 @@
           </a:lstStyle>
           <a:p>
             <a:r>
-              <a:rPr lang="en-US" smtClean="0"/>
+              <a:rPr lang="en-US"/>
               <a:t>Click to edit Master title style</a:t>
             </a:r>
-            <a:endParaRPr lang="en-US"/>
           </a:p>
         </p:txBody>
       </p:sp>
@@ -2500,7 +2497,7 @@
           <a:p>
             <a:pPr lvl="0"/>
             <a:r>
-              <a:rPr lang="en-US" smtClean="0"/>
+              <a:rPr lang="en-US"/>
               <a:t>Click to edit Master text styles</a:t>
             </a:r>
           </a:p>
@@ -2523,7 +2520,7 @@
           <a:p>
             <a:fld id="{5BCAD085-E8A6-8845-BD4E-CB4CCA059FC4}" type="datetimeFigureOut">
               <a:rPr lang="en-US" smtClean="0"/>
-              <a:t>1/27/13</a:t>
+              <a:t>8/31/2026</a:t>
             </a:fld>
             <a:endParaRPr lang="en-US"/>
           </a:p>
@@ -2565,7 +2562,7 @@
           <a:p>
             <a:fld id="{C1FF6DA9-008F-8B48-92A6-B652298478BF}" type="slidenum">
               <a:rPr lang="en-US" smtClean="0"/>
-              <a:t>‹#›</a:t>
+              <a:t>‹nº›</a:t>
             </a:fld>
             <a:endParaRPr lang="en-US"/>
           </a:p>
@@ -2632,10 +2629,9 @@
           <a:lstStyle/>
           <a:p>
             <a:r>
-              <a:rPr lang="en-US" smtClean="0"/>
+              <a:rPr lang="en-US"/>
               <a:t>Click to edit Master title style</a:t>
             </a:r>
-            <a:endParaRPr lang="en-US"/>
           </a:p>
         </p:txBody>
       </p:sp>
@@ -2666,38 +2662,37 @@
           <a:p>
             <a:pPr lvl="0"/>
             <a:r>
-              <a:rPr lang="en-US" smtClean="0"/>
+              <a:rPr lang="en-US"/>
               <a:t>Click to edit Master text styles</a:t>
             </a:r>
           </a:p>
           <a:p>
             <a:pPr lvl="1"/>
             <a:r>
-              <a:rPr lang="en-US" smtClean="0"/>
+              <a:rPr lang="en-US"/>
               <a:t>Second level</a:t>
             </a:r>
           </a:p>
           <a:p>
             <a:pPr lvl="2"/>
             <a:r>
-              <a:rPr lang="en-US" smtClean="0"/>
+              <a:rPr lang="en-US"/>
               <a:t>Third level</a:t>
             </a:r>
           </a:p>
           <a:p>
             <a:pPr lvl="3"/>
             <a:r>
-              <a:rPr lang="en-US" smtClean="0"/>
+              <a:rPr lang="en-US"/>
               <a:t>Fourth level</a:t>
             </a:r>
           </a:p>
           <a:p>
             <a:pPr lvl="4"/>
             <a:r>
-              <a:rPr lang="en-US" smtClean="0"/>
+              <a:rPr lang="en-US"/>
               <a:t>Fifth level</a:t>
             </a:r>
-            <a:endParaRPr lang="en-US"/>
           </a:p>
         </p:txBody>
       </p:sp>
@@ -2736,7 +2731,7 @@
           <a:p>
             <a:fld id="{5BCAD085-E8A6-8845-BD4E-CB4CCA059FC4}" type="datetimeFigureOut">
               <a:rPr lang="en-US" smtClean="0"/>
-              <a:t>1/27/13</a:t>
+              <a:t>8/31/2026</a:t>
             </a:fld>
             <a:endParaRPr lang="en-US"/>
           </a:p>
@@ -2814,7 +2809,7 @@
           <a:p>
             <a:fld id="{C1FF6DA9-008F-8B48-92A6-B652298478BF}" type="slidenum">
               <a:rPr lang="en-US" smtClean="0"/>
-              <a:t>‹#›</a:t>
+              <a:t>‹nº›</a:t>
             </a:fld>
             <a:endParaRPr lang="en-US"/>
           </a:p>
@@ -3095,7 +3090,7 @@
 </file>
 
 <file path=ppt/slides/slide1.xml><?xml version="1.0" encoding="utf-8"?>
-<p:sld xmlns:a="http://schemas.openxmlformats.org/drawingml/2006/main" xmlns:p="http://schemas.openxmlformats.org/presentationml/2006/main" xmlns:r="http://schemas.openxmlformats.org/officeDocument/2006/relationships">
+<p:sld xmlns:a="http://schemas.openxmlformats.org/drawingml/2006/main" xmlns:r="http://schemas.openxmlformats.org/officeDocument/2006/relationships" xmlns:p="http://schemas.openxmlformats.org/presentationml/2006/main">
   <p:cSld>
     <p:bg>
       <p:bgPr>
@@ -3111,7 +3106,14 @@
         <p:cNvGrpSpPr/>
         <p:nvPr/>
       </p:nvGrpSpPr>
-      <p:grpSpPr/>
+      <p:grpSpPr>
+        <a:xfrm>
+          <a:off x="0" y="0"/>
+          <a:ext cx="0" cy="0"/>
+          <a:chOff x="0" y="0"/>
+          <a:chExt cx="0" cy="0"/>
+        </a:xfrm>
+      </p:grpSpPr>
       <p:sp>
         <p:nvSpPr>
           <p:cNvPr id="2" name="Rectangle 1"/>
@@ -3153,6 +3155,7 @@
           <a:lstStyle/>
           <a:p>
             <a:pPr algn="ctr"/>
+            <a:endParaRPr/>
           </a:p>
         </p:txBody>
       </p:sp>
@@ -3197,6 +3200,7 @@
           <a:lstStyle/>
           <a:p>
             <a:pPr algn="ctr"/>
+            <a:endParaRPr/>
           </a:p>
         </p:txBody>
       </p:sp>
@@ -3241,6 +3245,7 @@
           <a:lstStyle/>
           <a:p>
             <a:pPr algn="ctr"/>
+            <a:endParaRPr/>
           </a:p>
         </p:txBody>
       </p:sp>
@@ -3261,7 +3266,7 @@
           <a:noFill/>
         </p:spPr>
         <p:txBody>
-          <a:bodyPr wrap="square" lIns="0" rIns="0" tIns="0" bIns="0" anchor="t">
+          <a:bodyPr wrap="square" lIns="0" tIns="0" rIns="0" bIns="0" anchor="t">
             <a:spAutoFit/>
           </a:bodyPr>
           <a:lstStyle/>
@@ -3300,7 +3305,7 @@
           <a:noFill/>
         </p:spPr>
         <p:txBody>
-          <a:bodyPr wrap="square" lIns="0" rIns="0" tIns="0" bIns="0" anchor="t">
+          <a:bodyPr wrap="square" lIns="0" tIns="0" rIns="0" bIns="0" anchor="t">
             <a:spAutoFit/>
           </a:bodyPr>
           <a:lstStyle/>
@@ -3339,7 +3344,7 @@
           <a:noFill/>
         </p:spPr>
         <p:txBody>
-          <a:bodyPr wrap="square" lIns="0" rIns="0" tIns="0" bIns="0" anchor="t">
+          <a:bodyPr wrap="square" lIns="0" tIns="0" rIns="0" bIns="0" anchor="t">
             <a:spAutoFit/>
           </a:bodyPr>
           <a:lstStyle/>
@@ -3378,7 +3383,7 @@
           <a:noFill/>
         </p:spPr>
         <p:txBody>
-          <a:bodyPr wrap="square" lIns="0" rIns="0" tIns="0" bIns="0" anchor="t">
+          <a:bodyPr wrap="square" lIns="0" tIns="0" rIns="0" bIns="0" anchor="t">
             <a:spAutoFit/>
           </a:bodyPr>
           <a:lstStyle/>
@@ -3417,7 +3422,7 @@
           <a:noFill/>
         </p:spPr>
         <p:txBody>
-          <a:bodyPr wrap="square" lIns="0" rIns="0" tIns="0" bIns="0" anchor="t">
+          <a:bodyPr wrap="square" lIns="0" tIns="0" rIns="0" bIns="0" anchor="t">
             <a:spAutoFit/>
           </a:bodyPr>
           <a:lstStyle/>
@@ -3456,7 +3461,7 @@
           <a:noFill/>
         </p:spPr>
         <p:txBody>
-          <a:bodyPr wrap="square" lIns="0" rIns="0" tIns="0" bIns="0" anchor="t">
+          <a:bodyPr wrap="square" lIns="0" tIns="0" rIns="0" bIns="0" anchor="t">
             <a:spAutoFit/>
           </a:bodyPr>
           <a:lstStyle/>
@@ -3495,7 +3500,7 @@
           <a:noFill/>
         </p:spPr>
         <p:txBody>
-          <a:bodyPr wrap="square" lIns="0" rIns="0" tIns="0" bIns="0" anchor="t">
+          <a:bodyPr wrap="square" lIns="0" tIns="0" rIns="0" bIns="0" anchor="t">
             <a:spAutoFit/>
           </a:bodyPr>
           <a:lstStyle/>
@@ -3534,7 +3539,7 @@
           <a:noFill/>
         </p:spPr>
         <p:txBody>
-          <a:bodyPr wrap="square" lIns="0" rIns="0" tIns="0" bIns="0" anchor="t">
+          <a:bodyPr wrap="square" lIns="0" tIns="0" rIns="0" bIns="0" anchor="t">
             <a:spAutoFit/>
           </a:bodyPr>
           <a:lstStyle/>
@@ -3573,7 +3578,7 @@
           <a:noFill/>
         </p:spPr>
         <p:txBody>
-          <a:bodyPr wrap="square" lIns="0" rIns="0" tIns="0" bIns="0" anchor="t">
+          <a:bodyPr wrap="square" lIns="0" tIns="0" rIns="0" bIns="0" anchor="t">
             <a:spAutoFit/>
           </a:bodyPr>
           <a:lstStyle/>
@@ -3612,7 +3617,7 @@
           <a:noFill/>
         </p:spPr>
         <p:txBody>
-          <a:bodyPr wrap="square" lIns="0" rIns="0" tIns="0" bIns="0" anchor="t">
+          <a:bodyPr wrap="square" lIns="0" tIns="0" rIns="0" bIns="0" anchor="t">
             <a:spAutoFit/>
           </a:bodyPr>
           <a:lstStyle/>
@@ -3675,6 +3680,7 @@
           <a:lstStyle/>
           <a:p>
             <a:pPr algn="ctr"/>
+            <a:endParaRPr/>
           </a:p>
         </p:txBody>
       </p:sp>
@@ -3695,7 +3701,7 @@
           <a:noFill/>
         </p:spPr>
         <p:txBody>
-          <a:bodyPr wrap="square" lIns="0" rIns="0" tIns="0" bIns="0" anchor="t">
+          <a:bodyPr wrap="square" lIns="0" tIns="0" rIns="0" bIns="0" anchor="t">
             <a:spAutoFit/>
           </a:bodyPr>
           <a:lstStyle/>
@@ -3734,7 +3740,7 @@
           <a:noFill/>
         </p:spPr>
         <p:txBody>
-          <a:bodyPr wrap="square" lIns="0" rIns="0" tIns="0" bIns="0" anchor="t">
+          <a:bodyPr wrap="square" lIns="0" tIns="0" rIns="0" bIns="0" anchor="t">
             <a:spAutoFit/>
           </a:bodyPr>
           <a:lstStyle/>
@@ -3773,7 +3779,7 @@
           <a:noFill/>
         </p:spPr>
         <p:txBody>
-          <a:bodyPr wrap="square" lIns="0" rIns="0" tIns="0" bIns="0" anchor="t">
+          <a:bodyPr wrap="square" lIns="0" tIns="0" rIns="0" bIns="0" anchor="t">
             <a:spAutoFit/>
           </a:bodyPr>
           <a:lstStyle/>
@@ -3812,7 +3818,7 @@
           <a:noFill/>
         </p:spPr>
         <p:txBody>
-          <a:bodyPr wrap="square" lIns="0" rIns="0" tIns="0" bIns="0" anchor="t">
+          <a:bodyPr wrap="square" lIns="0" tIns="0" rIns="0" bIns="0" anchor="t">
             <a:spAutoFit/>
           </a:bodyPr>
           <a:lstStyle/>
@@ -3851,7 +3857,7 @@
           <a:noFill/>
         </p:spPr>
         <p:txBody>
-          <a:bodyPr wrap="square" lIns="0" rIns="0" tIns="0" bIns="0" anchor="t">
+          <a:bodyPr wrap="square" lIns="0" tIns="0" rIns="0" bIns="0" anchor="t">
             <a:spAutoFit/>
           </a:bodyPr>
           <a:lstStyle/>
@@ -3890,7 +3896,7 @@
           <a:noFill/>
         </p:spPr>
         <p:txBody>
-          <a:bodyPr wrap="square" lIns="0" rIns="0" tIns="0" bIns="0" anchor="t">
+          <a:bodyPr wrap="square" lIns="0" tIns="0" rIns="0" bIns="0" anchor="t">
             <a:spAutoFit/>
           </a:bodyPr>
           <a:lstStyle/>
@@ -3929,7 +3935,7 @@
           <a:noFill/>
         </p:spPr>
         <p:txBody>
-          <a:bodyPr wrap="square" lIns="0" rIns="0" tIns="0" bIns="0" anchor="t">
+          <a:bodyPr wrap="square" lIns="0" tIns="0" rIns="0" bIns="0" anchor="t">
             <a:spAutoFit/>
           </a:bodyPr>
           <a:lstStyle/>
@@ -3992,6 +3998,7 @@
           <a:lstStyle/>
           <a:p>
             <a:pPr algn="ctr"/>
+            <a:endParaRPr/>
           </a:p>
         </p:txBody>
       </p:sp>
@@ -4012,7 +4019,7 @@
           <a:noFill/>
         </p:spPr>
         <p:txBody>
-          <a:bodyPr wrap="square" lIns="0" rIns="0" tIns="0" bIns="0" anchor="t">
+          <a:bodyPr wrap="square" lIns="0" tIns="0" rIns="0" bIns="0" anchor="t">
             <a:spAutoFit/>
           </a:bodyPr>
           <a:lstStyle/>
@@ -4051,7 +4058,7 @@
           <a:noFill/>
         </p:spPr>
         <p:txBody>
-          <a:bodyPr wrap="square" lIns="0" rIns="0" tIns="0" bIns="0" anchor="t">
+          <a:bodyPr wrap="square" lIns="0" tIns="0" rIns="0" bIns="0" anchor="t">
             <a:spAutoFit/>
           </a:bodyPr>
           <a:lstStyle/>
@@ -4090,7 +4097,7 @@
           <a:noFill/>
         </p:spPr>
         <p:txBody>
-          <a:bodyPr wrap="square" lIns="0" rIns="0" tIns="0" bIns="0" anchor="t">
+          <a:bodyPr wrap="square" lIns="0" tIns="0" rIns="0" bIns="0" anchor="t">
             <a:spAutoFit/>
           </a:bodyPr>
           <a:lstStyle/>
@@ -4129,7 +4136,7 @@
           <a:noFill/>
         </p:spPr>
         <p:txBody>
-          <a:bodyPr wrap="square" lIns="0" rIns="0" tIns="0" bIns="0" anchor="t">
+          <a:bodyPr wrap="square" lIns="0" tIns="0" rIns="0" bIns="0" anchor="t">
             <a:spAutoFit/>
           </a:bodyPr>
           <a:lstStyle/>
@@ -4192,6 +4199,7 @@
           <a:lstStyle/>
           <a:p>
             <a:pPr algn="ctr"/>
+            <a:endParaRPr/>
           </a:p>
         </p:txBody>
       </p:sp>
@@ -4212,7 +4220,7 @@
           <a:noFill/>
         </p:spPr>
         <p:txBody>
-          <a:bodyPr wrap="square" lIns="0" rIns="0" tIns="0" bIns="0" anchor="t">
+          <a:bodyPr wrap="square" lIns="0" tIns="0" rIns="0" bIns="0" anchor="t">
             <a:spAutoFit/>
           </a:bodyPr>
           <a:lstStyle/>
@@ -4251,7 +4259,7 @@
           <a:noFill/>
         </p:spPr>
         <p:txBody>
-          <a:bodyPr wrap="square" lIns="0" rIns="0" tIns="0" bIns="0" anchor="t">
+          <a:bodyPr wrap="square" lIns="0" tIns="0" rIns="0" bIns="0" anchor="t">
             <a:spAutoFit/>
           </a:bodyPr>
           <a:lstStyle/>
@@ -4290,7 +4298,7 @@
           <a:noFill/>
         </p:spPr>
         <p:txBody>
-          <a:bodyPr wrap="square" lIns="0" rIns="0" tIns="0" bIns="0" anchor="t">
+          <a:bodyPr wrap="square" lIns="0" tIns="0" rIns="0" bIns="0" anchor="t">
             <a:spAutoFit/>
           </a:bodyPr>
           <a:lstStyle/>
@@ -4329,7 +4337,7 @@
           <a:noFill/>
         </p:spPr>
         <p:txBody>
-          <a:bodyPr wrap="square" lIns="0" rIns="0" tIns="0" bIns="0" anchor="t">
+          <a:bodyPr wrap="square" lIns="0" tIns="0" rIns="0" bIns="0" anchor="t">
             <a:spAutoFit/>
           </a:bodyPr>
           <a:lstStyle/>
@@ -4360,7 +4368,7 @@
 </file>
 
 <file path=ppt/slides/slide10.xml><?xml version="1.0" encoding="utf-8"?>
-<p:sld xmlns:a="http://schemas.openxmlformats.org/drawingml/2006/main" xmlns:p="http://schemas.openxmlformats.org/presentationml/2006/main" xmlns:r="http://schemas.openxmlformats.org/officeDocument/2006/relationships">
+<p:sld xmlns:a="http://schemas.openxmlformats.org/drawingml/2006/main" xmlns:r="http://schemas.openxmlformats.org/officeDocument/2006/relationships" xmlns:p="http://schemas.openxmlformats.org/presentationml/2006/main">
   <p:cSld>
     <p:bg>
       <p:bgPr>
@@ -4376,7 +4384,14 @@
         <p:cNvGrpSpPr/>
         <p:nvPr/>
       </p:nvGrpSpPr>
-      <p:grpSpPr/>
+      <p:grpSpPr>
+        <a:xfrm>
+          <a:off x="0" y="0"/>
+          <a:ext cx="0" cy="0"/>
+          <a:chOff x="0" y="0"/>
+          <a:chExt cx="0" cy="0"/>
+        </a:xfrm>
+      </p:grpSpPr>
       <p:sp>
         <p:nvSpPr>
           <p:cNvPr id="2" name="Rectangle 1"/>
@@ -4418,6 +4433,7 @@
           <a:lstStyle/>
           <a:p>
             <a:pPr algn="ctr"/>
+            <a:endParaRPr/>
           </a:p>
         </p:txBody>
       </p:sp>
@@ -4438,7 +4454,7 @@
           <a:noFill/>
         </p:spPr>
         <p:txBody>
-          <a:bodyPr wrap="square" lIns="0" rIns="0" tIns="0" bIns="0" anchor="t">
+          <a:bodyPr wrap="square" lIns="0" tIns="0" rIns="0" bIns="0" anchor="t">
             <a:spAutoFit/>
           </a:bodyPr>
           <a:lstStyle/>
@@ -4477,7 +4493,7 @@
           <a:noFill/>
         </p:spPr>
         <p:txBody>
-          <a:bodyPr wrap="square" lIns="0" rIns="0" tIns="0" bIns="0" anchor="t">
+          <a:bodyPr wrap="square" lIns="0" tIns="0" rIns="0" bIns="0" anchor="t">
             <a:spAutoFit/>
           </a:bodyPr>
           <a:lstStyle/>
@@ -4538,7 +4554,7 @@
           </a:fontRef>
         </p:style>
         <p:txBody>
-          <a:bodyPr rtlCol="0" anchor="ctr" lIns="0" rIns="0" tIns="0" bIns="0"/>
+          <a:bodyPr lIns="0" tIns="0" rIns="0" bIns="0" rtlCol="0" anchor="ctr"/>
           <a:lstStyle/>
           <a:p>
             <a:pPr algn="ctr"/>
@@ -4571,7 +4587,7 @@
           <a:noFill/>
         </p:spPr>
         <p:txBody>
-          <a:bodyPr wrap="square" lIns="0" rIns="0" tIns="0" bIns="0" anchor="t">
+          <a:bodyPr wrap="square" lIns="0" tIns="0" rIns="0" bIns="0" anchor="t">
             <a:spAutoFit/>
           </a:bodyPr>
           <a:lstStyle/>
@@ -4610,7 +4626,7 @@
           <a:noFill/>
         </p:spPr>
         <p:txBody>
-          <a:bodyPr wrap="square" lIns="0" rIns="0" tIns="0" bIns="0" anchor="t">
+          <a:bodyPr wrap="square" lIns="0" tIns="0" rIns="0" bIns="0" anchor="t">
             <a:spAutoFit/>
           </a:bodyPr>
           <a:lstStyle/>
@@ -4649,7 +4665,7 @@
           <a:noFill/>
         </p:spPr>
         <p:txBody>
-          <a:bodyPr wrap="square" lIns="0" rIns="0" tIns="0" bIns="0" anchor="t">
+          <a:bodyPr wrap="square" lIns="0" tIns="0" rIns="0" bIns="0" anchor="t">
             <a:spAutoFit/>
           </a:bodyPr>
           <a:lstStyle/>
@@ -4712,6 +4728,7 @@
           <a:lstStyle/>
           <a:p>
             <a:pPr algn="ctr"/>
+            <a:endParaRPr/>
           </a:p>
         </p:txBody>
       </p:sp>
@@ -4732,7 +4749,7 @@
           <a:noFill/>
         </p:spPr>
         <p:txBody>
-          <a:bodyPr wrap="square" lIns="0" rIns="0" tIns="0" bIns="0" anchor="t">
+          <a:bodyPr wrap="square" lIns="0" tIns="0" rIns="0" bIns="0" anchor="t">
             <a:spAutoFit/>
           </a:bodyPr>
           <a:lstStyle/>
@@ -4795,6 +4812,7 @@
           <a:lstStyle/>
           <a:p>
             <a:pPr algn="ctr"/>
+            <a:endParaRPr/>
           </a:p>
         </p:txBody>
       </p:sp>
@@ -4835,7 +4853,7 @@
           </a:fontRef>
         </p:style>
         <p:txBody>
-          <a:bodyPr rtlCol="0" anchor="ctr" lIns="0" rIns="0" tIns="0" bIns="0"/>
+          <a:bodyPr lIns="0" tIns="0" rIns="0" bIns="0" rtlCol="0" anchor="ctr"/>
           <a:lstStyle/>
           <a:p>
             <a:pPr algn="ctr"/>
@@ -4888,7 +4906,7 @@
           </a:fontRef>
         </p:style>
         <p:txBody>
-          <a:bodyPr rtlCol="0" anchor="ctr" lIns="0" rIns="0" tIns="0" bIns="0"/>
+          <a:bodyPr lIns="0" tIns="0" rIns="0" bIns="0" rtlCol="0" anchor="ctr"/>
           <a:lstStyle/>
           <a:p>
             <a:pPr algn="ctr"/>
@@ -4943,7 +4961,7 @@
           </a:fontRef>
         </p:style>
         <p:txBody>
-          <a:bodyPr rtlCol="0" anchor="ctr" rIns="0" tIns="0" bIns="0"/>
+          <a:bodyPr tIns="0" rIns="0" bIns="0" rtlCol="0" anchor="ctr"/>
           <a:lstStyle/>
           <a:p>
             <a:pPr algn="ctr"/>
@@ -5000,6 +5018,7 @@
           <a:lstStyle/>
           <a:p>
             <a:pPr algn="ctr"/>
+            <a:endParaRPr/>
           </a:p>
         </p:txBody>
       </p:sp>
@@ -5044,6 +5063,7 @@
           <a:lstStyle/>
           <a:p>
             <a:pPr algn="ctr"/>
+            <a:endParaRPr/>
           </a:p>
         </p:txBody>
       </p:sp>
@@ -5088,6 +5108,7 @@
           <a:lstStyle/>
           <a:p>
             <a:pPr algn="ctr"/>
+            <a:endParaRPr/>
           </a:p>
         </p:txBody>
       </p:sp>
@@ -5156,6 +5177,7 @@
           <a:lstStyle/>
           <a:p>
             <a:pPr algn="ctr"/>
+            <a:endParaRPr/>
           </a:p>
         </p:txBody>
       </p:sp>
@@ -5176,7 +5198,7 @@
           <a:noFill/>
         </p:spPr>
         <p:txBody>
-          <a:bodyPr wrap="square" lIns="0" rIns="0" tIns="0" bIns="0" anchor="t">
+          <a:bodyPr wrap="square" lIns="0" tIns="0" rIns="0" bIns="0" anchor="t">
             <a:spAutoFit/>
           </a:bodyPr>
           <a:lstStyle/>
@@ -5215,7 +5237,7 @@
           <a:noFill/>
         </p:spPr>
         <p:txBody>
-          <a:bodyPr wrap="square" lIns="0" rIns="0" tIns="0" bIns="0" anchor="t">
+          <a:bodyPr wrap="square" lIns="0" tIns="0" rIns="0" bIns="0" anchor="t">
             <a:spAutoFit/>
           </a:bodyPr>
           <a:lstStyle/>
@@ -5278,6 +5300,7 @@
           <a:lstStyle/>
           <a:p>
             <a:pPr algn="ctr"/>
+            <a:endParaRPr/>
           </a:p>
         </p:txBody>
       </p:sp>
@@ -5298,7 +5321,7 @@
           <a:noFill/>
         </p:spPr>
         <p:txBody>
-          <a:bodyPr wrap="square" lIns="0" rIns="0" tIns="0" bIns="0" anchor="t">
+          <a:bodyPr wrap="square" lIns="0" tIns="0" rIns="0" bIns="0" anchor="t">
             <a:spAutoFit/>
           </a:bodyPr>
           <a:lstStyle/>
@@ -5361,6 +5384,7 @@
           <a:lstStyle/>
           <a:p>
             <a:pPr algn="ctr"/>
+            <a:endParaRPr/>
           </a:p>
         </p:txBody>
       </p:sp>
@@ -5381,7 +5405,7 @@
           <a:noFill/>
         </p:spPr>
         <p:txBody>
-          <a:bodyPr wrap="square" lIns="0" rIns="0" tIns="0" bIns="0" anchor="t">
+          <a:bodyPr wrap="square" lIns="0" tIns="0" rIns="0" bIns="0" anchor="t">
             <a:spAutoFit/>
           </a:bodyPr>
           <a:lstStyle/>
@@ -5444,6 +5468,7 @@
           <a:lstStyle/>
           <a:p>
             <a:pPr algn="ctr"/>
+            <a:endParaRPr/>
           </a:p>
         </p:txBody>
       </p:sp>
@@ -5464,7 +5489,7 @@
           <a:noFill/>
         </p:spPr>
         <p:txBody>
-          <a:bodyPr wrap="square" lIns="0" rIns="0" tIns="0" bIns="0" anchor="t">
+          <a:bodyPr wrap="square" lIns="0" tIns="0" rIns="0" bIns="0" anchor="t">
             <a:spAutoFit/>
           </a:bodyPr>
           <a:lstStyle/>
@@ -5527,6 +5552,7 @@
           <a:lstStyle/>
           <a:p>
             <a:pPr algn="ctr"/>
+            <a:endParaRPr/>
           </a:p>
         </p:txBody>
       </p:sp>
@@ -5547,7 +5573,7 @@
           <a:noFill/>
         </p:spPr>
         <p:txBody>
-          <a:bodyPr wrap="square" lIns="0" rIns="0" tIns="0" bIns="0" anchor="t">
+          <a:bodyPr wrap="square" lIns="0" tIns="0" rIns="0" bIns="0" anchor="t">
             <a:spAutoFit/>
           </a:bodyPr>
           <a:lstStyle/>
@@ -5586,7 +5612,7 @@
           <a:noFill/>
         </p:spPr>
         <p:txBody>
-          <a:bodyPr wrap="square" lIns="0" rIns="0" tIns="0" bIns="0" anchor="t">
+          <a:bodyPr wrap="square" lIns="0" tIns="0" rIns="0" bIns="0" anchor="t">
             <a:spAutoFit/>
           </a:bodyPr>
           <a:lstStyle/>
@@ -5617,7 +5643,7 @@
 </file>
 
 <file path=ppt/slides/slide11.xml><?xml version="1.0" encoding="utf-8"?>
-<p:sld xmlns:a="http://schemas.openxmlformats.org/drawingml/2006/main" xmlns:p="http://schemas.openxmlformats.org/presentationml/2006/main" xmlns:r="http://schemas.openxmlformats.org/officeDocument/2006/relationships">
+<p:sld xmlns:a="http://schemas.openxmlformats.org/drawingml/2006/main" xmlns:r="http://schemas.openxmlformats.org/officeDocument/2006/relationships" xmlns:p="http://schemas.openxmlformats.org/presentationml/2006/main">
   <p:cSld>
     <p:bg>
       <p:bgPr>
@@ -5633,7 +5659,14 @@
         <p:cNvGrpSpPr/>
         <p:nvPr/>
       </p:nvGrpSpPr>
-      <p:grpSpPr/>
+      <p:grpSpPr>
+        <a:xfrm>
+          <a:off x="0" y="0"/>
+          <a:ext cx="0" cy="0"/>
+          <a:chOff x="0" y="0"/>
+          <a:chExt cx="0" cy="0"/>
+        </a:xfrm>
+      </p:grpSpPr>
       <p:sp>
         <p:nvSpPr>
           <p:cNvPr id="2" name="Rectangle 1"/>
@@ -5675,6 +5708,7 @@
           <a:lstStyle/>
           <a:p>
             <a:pPr algn="ctr"/>
+            <a:endParaRPr/>
           </a:p>
         </p:txBody>
       </p:sp>
@@ -5695,7 +5729,7 @@
           <a:noFill/>
         </p:spPr>
         <p:txBody>
-          <a:bodyPr wrap="square" lIns="0" rIns="0" tIns="0" bIns="0" anchor="t">
+          <a:bodyPr wrap="square" lIns="0" tIns="0" rIns="0" bIns="0" anchor="t">
             <a:spAutoFit/>
           </a:bodyPr>
           <a:lstStyle/>
@@ -5734,7 +5768,7 @@
           <a:noFill/>
         </p:spPr>
         <p:txBody>
-          <a:bodyPr wrap="square" lIns="0" rIns="0" tIns="0" bIns="0" anchor="t">
+          <a:bodyPr wrap="square" lIns="0" tIns="0" rIns="0" bIns="0" anchor="t">
             <a:spAutoFit/>
           </a:bodyPr>
           <a:lstStyle/>
@@ -5795,7 +5829,7 @@
           </a:fontRef>
         </p:style>
         <p:txBody>
-          <a:bodyPr rtlCol="0" anchor="ctr" lIns="0" rIns="0" tIns="0" bIns="0"/>
+          <a:bodyPr lIns="0" tIns="0" rIns="0" bIns="0" rtlCol="0" anchor="ctr"/>
           <a:lstStyle/>
           <a:p>
             <a:pPr algn="ctr"/>
@@ -5828,7 +5862,7 @@
           <a:noFill/>
         </p:spPr>
         <p:txBody>
-          <a:bodyPr wrap="square" lIns="0" rIns="0" tIns="0" bIns="0" anchor="t">
+          <a:bodyPr wrap="square" lIns="0" tIns="0" rIns="0" bIns="0" anchor="t">
             <a:spAutoFit/>
           </a:bodyPr>
           <a:lstStyle/>
@@ -5867,7 +5901,7 @@
           <a:noFill/>
         </p:spPr>
         <p:txBody>
-          <a:bodyPr wrap="square" lIns="0" rIns="0" tIns="0" bIns="0" anchor="t">
+          <a:bodyPr wrap="square" lIns="0" tIns="0" rIns="0" bIns="0" anchor="t">
             <a:spAutoFit/>
           </a:bodyPr>
           <a:lstStyle/>
@@ -5906,7 +5940,7 @@
           <a:noFill/>
         </p:spPr>
         <p:txBody>
-          <a:bodyPr wrap="square" lIns="0" rIns="0" tIns="0" bIns="0" anchor="t">
+          <a:bodyPr wrap="square" lIns="0" tIns="0" rIns="0" bIns="0" anchor="t">
             <a:spAutoFit/>
           </a:bodyPr>
           <a:lstStyle/>
@@ -5969,6 +6003,7 @@
           <a:lstStyle/>
           <a:p>
             <a:pPr algn="ctr"/>
+            <a:endParaRPr/>
           </a:p>
         </p:txBody>
       </p:sp>
@@ -5989,7 +6024,7 @@
           <a:noFill/>
         </p:spPr>
         <p:txBody>
-          <a:bodyPr wrap="square" lIns="0" rIns="0" tIns="0" bIns="0" anchor="t">
+          <a:bodyPr wrap="square" lIns="0" tIns="0" rIns="0" bIns="0" anchor="t">
             <a:spAutoFit/>
           </a:bodyPr>
           <a:lstStyle/>
@@ -6052,6 +6087,7 @@
           <a:lstStyle/>
           <a:p>
             <a:pPr algn="ctr"/>
+            <a:endParaRPr/>
           </a:p>
         </p:txBody>
       </p:sp>
@@ -6092,7 +6128,7 @@
           </a:fontRef>
         </p:style>
         <p:txBody>
-          <a:bodyPr rtlCol="0" anchor="ctr" lIns="0" rIns="0" tIns="0" bIns="0"/>
+          <a:bodyPr lIns="0" tIns="0" rIns="0" bIns="0" rtlCol="0" anchor="ctr"/>
           <a:lstStyle/>
           <a:p>
             <a:pPr algn="ctr"/>
@@ -6145,7 +6181,7 @@
           </a:fontRef>
         </p:style>
         <p:txBody>
-          <a:bodyPr rtlCol="0" anchor="ctr" lIns="0" rIns="0" tIns="0" bIns="0"/>
+          <a:bodyPr lIns="0" tIns="0" rIns="0" bIns="0" rtlCol="0" anchor="ctr"/>
           <a:lstStyle/>
           <a:p>
             <a:pPr algn="ctr"/>
@@ -6200,7 +6236,7 @@
           </a:fontRef>
         </p:style>
         <p:txBody>
-          <a:bodyPr rtlCol="0" anchor="ctr" rIns="0" tIns="0" bIns="0"/>
+          <a:bodyPr tIns="0" rIns="0" bIns="0" rtlCol="0" anchor="ctr"/>
           <a:lstStyle/>
           <a:p>
             <a:pPr algn="ctr"/>
@@ -6257,6 +6293,7 @@
           <a:lstStyle/>
           <a:p>
             <a:pPr algn="ctr"/>
+            <a:endParaRPr/>
           </a:p>
         </p:txBody>
       </p:sp>
@@ -6301,6 +6338,7 @@
           <a:lstStyle/>
           <a:p>
             <a:pPr algn="ctr"/>
+            <a:endParaRPr/>
           </a:p>
         </p:txBody>
       </p:sp>
@@ -6345,6 +6383,7 @@
           <a:lstStyle/>
           <a:p>
             <a:pPr algn="ctr"/>
+            <a:endParaRPr/>
           </a:p>
         </p:txBody>
       </p:sp>
@@ -6413,6 +6452,7 @@
           <a:lstStyle/>
           <a:p>
             <a:pPr algn="ctr"/>
+            <a:endParaRPr/>
           </a:p>
         </p:txBody>
       </p:sp>
@@ -6433,7 +6473,7 @@
           <a:noFill/>
         </p:spPr>
         <p:txBody>
-          <a:bodyPr wrap="square" lIns="0" rIns="0" tIns="0" bIns="0" anchor="t">
+          <a:bodyPr wrap="square" lIns="0" tIns="0" rIns="0" bIns="0" anchor="t">
             <a:spAutoFit/>
           </a:bodyPr>
           <a:lstStyle/>
@@ -6472,7 +6512,7 @@
           <a:noFill/>
         </p:spPr>
         <p:txBody>
-          <a:bodyPr wrap="square" lIns="0" rIns="0" tIns="0" bIns="0" anchor="t">
+          <a:bodyPr wrap="square" lIns="0" tIns="0" rIns="0" bIns="0" anchor="t">
             <a:spAutoFit/>
           </a:bodyPr>
           <a:lstStyle/>
@@ -6535,6 +6575,7 @@
           <a:lstStyle/>
           <a:p>
             <a:pPr algn="ctr"/>
+            <a:endParaRPr/>
           </a:p>
         </p:txBody>
       </p:sp>
@@ -6555,7 +6596,7 @@
           <a:noFill/>
         </p:spPr>
         <p:txBody>
-          <a:bodyPr wrap="square" lIns="0" rIns="0" tIns="0" bIns="0" anchor="t">
+          <a:bodyPr wrap="square" lIns="0" tIns="0" rIns="0" bIns="0" anchor="t">
             <a:spAutoFit/>
           </a:bodyPr>
           <a:lstStyle/>
@@ -6618,6 +6659,7 @@
           <a:lstStyle/>
           <a:p>
             <a:pPr algn="ctr"/>
+            <a:endParaRPr/>
           </a:p>
         </p:txBody>
       </p:sp>
@@ -6638,7 +6680,7 @@
           <a:noFill/>
         </p:spPr>
         <p:txBody>
-          <a:bodyPr wrap="square" lIns="0" rIns="0" tIns="0" bIns="0" anchor="t">
+          <a:bodyPr wrap="square" lIns="0" tIns="0" rIns="0" bIns="0" anchor="t">
             <a:spAutoFit/>
           </a:bodyPr>
           <a:lstStyle/>
@@ -6701,6 +6743,7 @@
           <a:lstStyle/>
           <a:p>
             <a:pPr algn="ctr"/>
+            <a:endParaRPr/>
           </a:p>
         </p:txBody>
       </p:sp>
@@ -6721,7 +6764,7 @@
           <a:noFill/>
         </p:spPr>
         <p:txBody>
-          <a:bodyPr wrap="square" lIns="0" rIns="0" tIns="0" bIns="0" anchor="t">
+          <a:bodyPr wrap="square" lIns="0" tIns="0" rIns="0" bIns="0" anchor="t">
             <a:spAutoFit/>
           </a:bodyPr>
           <a:lstStyle/>
@@ -6784,6 +6827,7 @@
           <a:lstStyle/>
           <a:p>
             <a:pPr algn="ctr"/>
+            <a:endParaRPr/>
           </a:p>
         </p:txBody>
       </p:sp>
@@ -6804,7 +6848,7 @@
           <a:noFill/>
         </p:spPr>
         <p:txBody>
-          <a:bodyPr wrap="square" lIns="0" rIns="0" tIns="0" bIns="0" anchor="t">
+          <a:bodyPr wrap="square" lIns="0" tIns="0" rIns="0" bIns="0" anchor="t">
             <a:spAutoFit/>
           </a:bodyPr>
           <a:lstStyle/>
@@ -6843,7 +6887,7 @@
           <a:noFill/>
         </p:spPr>
         <p:txBody>
-          <a:bodyPr wrap="square" lIns="0" rIns="0" tIns="0" bIns="0" anchor="t">
+          <a:bodyPr wrap="square" lIns="0" tIns="0" rIns="0" bIns="0" anchor="t">
             <a:spAutoFit/>
           </a:bodyPr>
           <a:lstStyle/>
@@ -6874,7 +6918,7 @@
 </file>
 
 <file path=ppt/slides/slide12.xml><?xml version="1.0" encoding="utf-8"?>
-<p:sld xmlns:a="http://schemas.openxmlformats.org/drawingml/2006/main" xmlns:p="http://schemas.openxmlformats.org/presentationml/2006/main" xmlns:r="http://schemas.openxmlformats.org/officeDocument/2006/relationships">
+<p:sld xmlns:a="http://schemas.openxmlformats.org/drawingml/2006/main" xmlns:r="http://schemas.openxmlformats.org/officeDocument/2006/relationships" xmlns:p="http://schemas.openxmlformats.org/presentationml/2006/main">
   <p:cSld>
     <p:bg>
       <p:bgPr>
@@ -6890,7 +6934,14 @@
         <p:cNvGrpSpPr/>
         <p:nvPr/>
       </p:nvGrpSpPr>
-      <p:grpSpPr/>
+      <p:grpSpPr>
+        <a:xfrm>
+          <a:off x="0" y="0"/>
+          <a:ext cx="0" cy="0"/>
+          <a:chOff x="0" y="0"/>
+          <a:chExt cx="0" cy="0"/>
+        </a:xfrm>
+      </p:grpSpPr>
       <p:sp>
         <p:nvSpPr>
           <p:cNvPr id="2" name="Rectangle 1"/>
@@ -6932,6 +6983,7 @@
           <a:lstStyle/>
           <a:p>
             <a:pPr algn="ctr"/>
+            <a:endParaRPr/>
           </a:p>
         </p:txBody>
       </p:sp>
@@ -6952,7 +7004,7 @@
           <a:noFill/>
         </p:spPr>
         <p:txBody>
-          <a:bodyPr wrap="square" lIns="0" rIns="0" tIns="0" bIns="0" anchor="t">
+          <a:bodyPr wrap="square" lIns="0" tIns="0" rIns="0" bIns="0" anchor="t">
             <a:spAutoFit/>
           </a:bodyPr>
           <a:lstStyle/>
@@ -6991,7 +7043,7 @@
           <a:noFill/>
         </p:spPr>
         <p:txBody>
-          <a:bodyPr wrap="square" lIns="0" rIns="0" tIns="0" bIns="0" anchor="t">
+          <a:bodyPr wrap="square" lIns="0" tIns="0" rIns="0" bIns="0" anchor="t">
             <a:spAutoFit/>
           </a:bodyPr>
           <a:lstStyle/>
@@ -7052,7 +7104,7 @@
           </a:fontRef>
         </p:style>
         <p:txBody>
-          <a:bodyPr rtlCol="0" anchor="ctr" lIns="0" rIns="0" tIns="0" bIns="0"/>
+          <a:bodyPr lIns="0" tIns="0" rIns="0" bIns="0" rtlCol="0" anchor="ctr"/>
           <a:lstStyle/>
           <a:p>
             <a:pPr algn="ctr"/>
@@ -7085,7 +7137,7 @@
           <a:noFill/>
         </p:spPr>
         <p:txBody>
-          <a:bodyPr wrap="square" lIns="0" rIns="0" tIns="0" bIns="0" anchor="t">
+          <a:bodyPr wrap="square" lIns="0" tIns="0" rIns="0" bIns="0" anchor="t">
             <a:spAutoFit/>
           </a:bodyPr>
           <a:lstStyle/>
@@ -7124,7 +7176,7 @@
           <a:noFill/>
         </p:spPr>
         <p:txBody>
-          <a:bodyPr wrap="square" lIns="0" rIns="0" tIns="0" bIns="0" anchor="t">
+          <a:bodyPr wrap="square" lIns="0" tIns="0" rIns="0" bIns="0" anchor="t">
             <a:spAutoFit/>
           </a:bodyPr>
           <a:lstStyle/>
@@ -7163,7 +7215,7 @@
           <a:noFill/>
         </p:spPr>
         <p:txBody>
-          <a:bodyPr wrap="square" lIns="0" rIns="0" tIns="0" bIns="0" anchor="t">
+          <a:bodyPr wrap="square" lIns="0" tIns="0" rIns="0" bIns="0" anchor="t">
             <a:spAutoFit/>
           </a:bodyPr>
           <a:lstStyle/>
@@ -7226,6 +7278,7 @@
           <a:lstStyle/>
           <a:p>
             <a:pPr algn="ctr"/>
+            <a:endParaRPr/>
           </a:p>
         </p:txBody>
       </p:sp>
@@ -7246,7 +7299,7 @@
           <a:noFill/>
         </p:spPr>
         <p:txBody>
-          <a:bodyPr wrap="square" lIns="0" rIns="0" tIns="0" bIns="0" anchor="t">
+          <a:bodyPr wrap="square" lIns="0" tIns="0" rIns="0" bIns="0" anchor="t">
             <a:spAutoFit/>
           </a:bodyPr>
           <a:lstStyle/>
@@ -7309,6 +7362,7 @@
           <a:lstStyle/>
           <a:p>
             <a:pPr algn="ctr"/>
+            <a:endParaRPr/>
           </a:p>
         </p:txBody>
       </p:sp>
@@ -7349,7 +7403,7 @@
           </a:fontRef>
         </p:style>
         <p:txBody>
-          <a:bodyPr rtlCol="0" anchor="ctr" lIns="0" rIns="0" tIns="0" bIns="0"/>
+          <a:bodyPr lIns="0" tIns="0" rIns="0" bIns="0" rtlCol="0" anchor="ctr"/>
           <a:lstStyle/>
           <a:p>
             <a:pPr algn="ctr"/>
@@ -7402,7 +7456,7 @@
           </a:fontRef>
         </p:style>
         <p:txBody>
-          <a:bodyPr rtlCol="0" anchor="ctr" lIns="0" rIns="0" tIns="0" bIns="0"/>
+          <a:bodyPr lIns="0" tIns="0" rIns="0" bIns="0" rtlCol="0" anchor="ctr"/>
           <a:lstStyle/>
           <a:p>
             <a:pPr algn="ctr"/>
@@ -7457,7 +7511,7 @@
           </a:fontRef>
         </p:style>
         <p:txBody>
-          <a:bodyPr rtlCol="0" anchor="ctr" rIns="0" tIns="0" bIns="0"/>
+          <a:bodyPr tIns="0" rIns="0" bIns="0" rtlCol="0" anchor="ctr"/>
           <a:lstStyle/>
           <a:p>
             <a:pPr algn="ctr"/>
@@ -7514,6 +7568,7 @@
           <a:lstStyle/>
           <a:p>
             <a:pPr algn="ctr"/>
+            <a:endParaRPr/>
           </a:p>
         </p:txBody>
       </p:sp>
@@ -7558,6 +7613,7 @@
           <a:lstStyle/>
           <a:p>
             <a:pPr algn="ctr"/>
+            <a:endParaRPr/>
           </a:p>
         </p:txBody>
       </p:sp>
@@ -7602,6 +7658,7 @@
           <a:lstStyle/>
           <a:p>
             <a:pPr algn="ctr"/>
+            <a:endParaRPr/>
           </a:p>
         </p:txBody>
       </p:sp>
@@ -7670,6 +7727,7 @@
           <a:lstStyle/>
           <a:p>
             <a:pPr algn="ctr"/>
+            <a:endParaRPr/>
           </a:p>
         </p:txBody>
       </p:sp>
@@ -7690,7 +7748,7 @@
           <a:noFill/>
         </p:spPr>
         <p:txBody>
-          <a:bodyPr wrap="square" lIns="0" rIns="0" tIns="0" bIns="0" anchor="t">
+          <a:bodyPr wrap="square" lIns="0" tIns="0" rIns="0" bIns="0" anchor="t">
             <a:spAutoFit/>
           </a:bodyPr>
           <a:lstStyle/>
@@ -7729,7 +7787,7 @@
           <a:noFill/>
         </p:spPr>
         <p:txBody>
-          <a:bodyPr wrap="square" lIns="0" rIns="0" tIns="0" bIns="0" anchor="t">
+          <a:bodyPr wrap="square" lIns="0" tIns="0" rIns="0" bIns="0" anchor="t">
             <a:spAutoFit/>
           </a:bodyPr>
           <a:lstStyle/>
@@ -7792,6 +7850,7 @@
           <a:lstStyle/>
           <a:p>
             <a:pPr algn="ctr"/>
+            <a:endParaRPr/>
           </a:p>
         </p:txBody>
       </p:sp>
@@ -7812,7 +7871,7 @@
           <a:noFill/>
         </p:spPr>
         <p:txBody>
-          <a:bodyPr wrap="square" lIns="0" rIns="0" tIns="0" bIns="0" anchor="t">
+          <a:bodyPr wrap="square" lIns="0" tIns="0" rIns="0" bIns="0" anchor="t">
             <a:spAutoFit/>
           </a:bodyPr>
           <a:lstStyle/>
@@ -7875,6 +7934,7 @@
           <a:lstStyle/>
           <a:p>
             <a:pPr algn="ctr"/>
+            <a:endParaRPr/>
           </a:p>
         </p:txBody>
       </p:sp>
@@ -7895,7 +7955,7 @@
           <a:noFill/>
         </p:spPr>
         <p:txBody>
-          <a:bodyPr wrap="square" lIns="0" rIns="0" tIns="0" bIns="0" anchor="t">
+          <a:bodyPr wrap="square" lIns="0" tIns="0" rIns="0" bIns="0" anchor="t">
             <a:spAutoFit/>
           </a:bodyPr>
           <a:lstStyle/>
@@ -7958,6 +8018,7 @@
           <a:lstStyle/>
           <a:p>
             <a:pPr algn="ctr"/>
+            <a:endParaRPr/>
           </a:p>
         </p:txBody>
       </p:sp>
@@ -7978,7 +8039,7 @@
           <a:noFill/>
         </p:spPr>
         <p:txBody>
-          <a:bodyPr wrap="square" lIns="0" rIns="0" tIns="0" bIns="0" anchor="t">
+          <a:bodyPr wrap="square" lIns="0" tIns="0" rIns="0" bIns="0" anchor="t">
             <a:spAutoFit/>
           </a:bodyPr>
           <a:lstStyle/>
@@ -8041,6 +8102,7 @@
           <a:lstStyle/>
           <a:p>
             <a:pPr algn="ctr"/>
+            <a:endParaRPr/>
           </a:p>
         </p:txBody>
       </p:sp>
@@ -8061,7 +8123,7 @@
           <a:noFill/>
         </p:spPr>
         <p:txBody>
-          <a:bodyPr wrap="square" lIns="0" rIns="0" tIns="0" bIns="0" anchor="t">
+          <a:bodyPr wrap="square" lIns="0" tIns="0" rIns="0" bIns="0" anchor="t">
             <a:spAutoFit/>
           </a:bodyPr>
           <a:lstStyle/>
@@ -8100,7 +8162,7 @@
           <a:noFill/>
         </p:spPr>
         <p:txBody>
-          <a:bodyPr wrap="square" lIns="0" rIns="0" tIns="0" bIns="0" anchor="t">
+          <a:bodyPr wrap="square" lIns="0" tIns="0" rIns="0" bIns="0" anchor="t">
             <a:spAutoFit/>
           </a:bodyPr>
           <a:lstStyle/>
@@ -8131,7 +8193,7 @@
 </file>
 
 <file path=ppt/slides/slide13.xml><?xml version="1.0" encoding="utf-8"?>
-<p:sld xmlns:a="http://schemas.openxmlformats.org/drawingml/2006/main" xmlns:p="http://schemas.openxmlformats.org/presentationml/2006/main" xmlns:r="http://schemas.openxmlformats.org/officeDocument/2006/relationships">
+<p:sld xmlns:a="http://schemas.openxmlformats.org/drawingml/2006/main" xmlns:r="http://schemas.openxmlformats.org/officeDocument/2006/relationships" xmlns:p="http://schemas.openxmlformats.org/presentationml/2006/main">
   <p:cSld>
     <p:bg>
       <p:bgPr>
@@ -8147,7 +8209,14 @@
         <p:cNvGrpSpPr/>
         <p:nvPr/>
       </p:nvGrpSpPr>
-      <p:grpSpPr/>
+      <p:grpSpPr>
+        <a:xfrm>
+          <a:off x="0" y="0"/>
+          <a:ext cx="0" cy="0"/>
+          <a:chOff x="0" y="0"/>
+          <a:chExt cx="0" cy="0"/>
+        </a:xfrm>
+      </p:grpSpPr>
       <p:sp>
         <p:nvSpPr>
           <p:cNvPr id="2" name="Rectangle 1"/>
@@ -8189,6 +8258,7 @@
           <a:lstStyle/>
           <a:p>
             <a:pPr algn="ctr"/>
+            <a:endParaRPr/>
           </a:p>
         </p:txBody>
       </p:sp>
@@ -8209,7 +8279,7 @@
           <a:noFill/>
         </p:spPr>
         <p:txBody>
-          <a:bodyPr wrap="square" lIns="0" rIns="0" tIns="0" bIns="0" anchor="t">
+          <a:bodyPr wrap="square" lIns="0" tIns="0" rIns="0" bIns="0" anchor="t">
             <a:spAutoFit/>
           </a:bodyPr>
           <a:lstStyle/>
@@ -8248,7 +8318,7 @@
           <a:noFill/>
         </p:spPr>
         <p:txBody>
-          <a:bodyPr wrap="square" lIns="0" rIns="0" tIns="0" bIns="0" anchor="t">
+          <a:bodyPr wrap="square" lIns="0" tIns="0" rIns="0" bIns="0" anchor="t">
             <a:spAutoFit/>
           </a:bodyPr>
           <a:lstStyle/>
@@ -8309,7 +8379,7 @@
           </a:fontRef>
         </p:style>
         <p:txBody>
-          <a:bodyPr rtlCol="0" anchor="ctr" lIns="0" rIns="0" tIns="0" bIns="0"/>
+          <a:bodyPr lIns="0" tIns="0" rIns="0" bIns="0" rtlCol="0" anchor="ctr"/>
           <a:lstStyle/>
           <a:p>
             <a:pPr algn="ctr"/>
@@ -8334,15 +8404,15 @@
         <p:spPr>
           <a:xfrm>
             <a:off x="658368" y="1115568"/>
-            <a:ext cx="4480560" cy="731520"/>
-          </a:xfrm>
-          <a:prstGeom prst="rect">
-            <a:avLst/>
-          </a:prstGeom>
-          <a:noFill/>
-        </p:spPr>
-        <p:txBody>
-          <a:bodyPr wrap="square" lIns="0" rIns="0" tIns="0" bIns="0" anchor="t">
+            <a:ext cx="4480560" cy="482440"/>
+          </a:xfrm>
+          <a:prstGeom prst="rect">
+            <a:avLst/>
+          </a:prstGeom>
+          <a:noFill/>
+        </p:spPr>
+        <p:txBody>
+          <a:bodyPr wrap="square" lIns="0" tIns="0" rIns="0" bIns="0" anchor="t">
             <a:spAutoFit/>
           </a:bodyPr>
           <a:lstStyle/>
@@ -8353,14 +8423,56 @@
               </a:lnSpc>
             </a:pPr>
             <a:r>
-              <a:rPr sz="3300" b="1">
+              <a:rPr sz="2800" b="1" dirty="0" err="1">
                 <a:solidFill>
                   <a:srgbClr val="E8F1F6"/>
                 </a:solidFill>
                 <a:latin typeface="Segoe UI Semibold"/>
               </a:rPr>
-              <a:t>Calculadora Aderência 2.0</a:t>
-            </a:r>
+              <a:t>Calculadora</a:t>
+            </a:r>
+            <a:r>
+              <a:rPr sz="3300" b="1" dirty="0">
+                <a:solidFill>
+                  <a:srgbClr val="E8F1F6"/>
+                </a:solidFill>
+                <a:latin typeface="Segoe UI Semibold"/>
+              </a:rPr>
+              <a:t> </a:t>
+            </a:r>
+            <a:r>
+              <a:rPr sz="2800" b="1" dirty="0" err="1">
+                <a:solidFill>
+                  <a:srgbClr val="E8F1F6"/>
+                </a:solidFill>
+                <a:latin typeface="Segoe UI Semibold"/>
+              </a:rPr>
+              <a:t>Aderência</a:t>
+            </a:r>
+            <a:r>
+              <a:rPr sz="3300" b="1" dirty="0">
+                <a:solidFill>
+                  <a:srgbClr val="E8F1F6"/>
+                </a:solidFill>
+                <a:latin typeface="Segoe UI Semibold"/>
+              </a:rPr>
+              <a:t> </a:t>
+            </a:r>
+            <a:r>
+              <a:rPr sz="2800" b="1" dirty="0">
+                <a:solidFill>
+                  <a:srgbClr val="E8F1F6"/>
+                </a:solidFill>
+                <a:latin typeface="Segoe UI Semibold"/>
+              </a:rPr>
+              <a:t>2.0</a:t>
+            </a:r>
+            <a:endParaRPr sz="3300" b="1" dirty="0">
+              <a:solidFill>
+                <a:srgbClr val="E8F1F6"/>
+              </a:solidFill>
+              <a:latin typeface="Segoe UI Semibold"/>
+            </a:endParaRPr>
           </a:p>
         </p:txBody>
       </p:sp>
@@ -8381,7 +8493,7 @@
           <a:noFill/>
         </p:spPr>
         <p:txBody>
-          <a:bodyPr wrap="square" lIns="0" rIns="0" tIns="0" bIns="0" anchor="t">
+          <a:bodyPr wrap="square" lIns="0" tIns="0" rIns="0" bIns="0" anchor="t">
             <a:spAutoFit/>
           </a:bodyPr>
           <a:lstStyle/>
@@ -8392,14 +8504,74 @@
               </a:lnSpc>
             </a:pPr>
             <a:r>
-              <a:rPr sz="1150" b="0">
+              <a:rPr sz="1150" b="0" dirty="0" err="1">
                 <a:solidFill>
                   <a:srgbClr val="8FB0C2"/>
                 </a:solidFill>
                 <a:latin typeface="Segoe UI"/>
               </a:rPr>
-              <a:t>Aderência de indicadores a metas e resultados</a:t>
-            </a:r>
+              <a:t>Aderência</a:t>
+            </a:r>
+            <a:r>
+              <a:rPr sz="1150" b="0" dirty="0">
+                <a:solidFill>
+                  <a:srgbClr val="8FB0C2"/>
+                </a:solidFill>
+                <a:latin typeface="Segoe UI"/>
+              </a:rPr>
+              <a:t> de </a:t>
+            </a:r>
+            <a:r>
+              <a:rPr sz="1150" b="0" dirty="0" err="1">
+                <a:solidFill>
+                  <a:srgbClr val="8FB0C2"/>
+                </a:solidFill>
+                <a:latin typeface="Segoe UI"/>
+              </a:rPr>
+              <a:t>indicadores</a:t>
+            </a:r>
+            <a:r>
+              <a:rPr sz="1150" b="0" dirty="0">
+                <a:solidFill>
+                  <a:srgbClr val="8FB0C2"/>
+                </a:solidFill>
+                <a:latin typeface="Segoe UI"/>
+              </a:rPr>
+              <a:t> a </a:t>
+            </a:r>
+            <a:r>
+              <a:rPr sz="1150" b="0" dirty="0" err="1">
+                <a:solidFill>
+                  <a:srgbClr val="8FB0C2"/>
+                </a:solidFill>
+                <a:latin typeface="Segoe UI"/>
+              </a:rPr>
+              <a:t>metas</a:t>
+            </a:r>
+            <a:r>
+              <a:rPr sz="1150" b="0" dirty="0">
+                <a:solidFill>
+                  <a:srgbClr val="8FB0C2"/>
+                </a:solidFill>
+                <a:latin typeface="Segoe UI"/>
+              </a:rPr>
+              <a:t> e </a:t>
+            </a:r>
+            <a:r>
+              <a:rPr sz="1150" b="0" dirty="0" err="1">
+                <a:solidFill>
+                  <a:srgbClr val="8FB0C2"/>
+                </a:solidFill>
+                <a:latin typeface="Segoe UI"/>
+              </a:rPr>
+              <a:t>resultados</a:t>
+            </a:r>
+            <a:endParaRPr sz="1150" b="0" dirty="0">
+              <a:solidFill>
+                <a:srgbClr val="8FB0C2"/>
+              </a:solidFill>
+              <a:latin typeface="Segoe UI"/>
+            </a:endParaRPr>
           </a:p>
         </p:txBody>
       </p:sp>
@@ -8420,7 +8592,7 @@
           <a:noFill/>
         </p:spPr>
         <p:txBody>
-          <a:bodyPr wrap="square" lIns="0" rIns="0" tIns="0" bIns="0" anchor="t">
+          <a:bodyPr wrap="square" lIns="0" tIns="0" rIns="0" bIns="0" anchor="t">
             <a:spAutoFit/>
           </a:bodyPr>
           <a:lstStyle/>
@@ -8483,6 +8655,7 @@
           <a:lstStyle/>
           <a:p>
             <a:pPr algn="ctr"/>
+            <a:endParaRPr/>
           </a:p>
         </p:txBody>
       </p:sp>
@@ -8503,7 +8676,7 @@
           <a:noFill/>
         </p:spPr>
         <p:txBody>
-          <a:bodyPr wrap="square" lIns="0" rIns="0" tIns="0" bIns="0" anchor="t">
+          <a:bodyPr wrap="square" lIns="0" tIns="0" rIns="0" bIns="0" anchor="t">
             <a:spAutoFit/>
           </a:bodyPr>
           <a:lstStyle/>
@@ -8566,6 +8739,7 @@
           <a:lstStyle/>
           <a:p>
             <a:pPr algn="ctr"/>
+            <a:endParaRPr/>
           </a:p>
         </p:txBody>
       </p:sp>
@@ -8606,7 +8780,7 @@
           </a:fontRef>
         </p:style>
         <p:txBody>
-          <a:bodyPr rtlCol="0" anchor="ctr" lIns="0" rIns="0" tIns="0" bIns="0"/>
+          <a:bodyPr lIns="0" tIns="0" rIns="0" bIns="0" rtlCol="0" anchor="ctr"/>
           <a:lstStyle/>
           <a:p>
             <a:pPr algn="ctr"/>
@@ -8659,7 +8833,7 @@
           </a:fontRef>
         </p:style>
         <p:txBody>
-          <a:bodyPr rtlCol="0" anchor="ctr" lIns="0" rIns="0" tIns="0" bIns="0"/>
+          <a:bodyPr lIns="0" tIns="0" rIns="0" bIns="0" rtlCol="0" anchor="ctr"/>
           <a:lstStyle/>
           <a:p>
             <a:pPr algn="ctr"/>
@@ -8717,6 +8891,7 @@
           <a:lstStyle/>
           <a:p>
             <a:pPr algn="ctr"/>
+            <a:endParaRPr/>
           </a:p>
         </p:txBody>
       </p:sp>
@@ -8737,7 +8912,7 @@
           <a:noFill/>
         </p:spPr>
         <p:txBody>
-          <a:bodyPr wrap="square" lIns="0" rIns="0" tIns="0" bIns="0" anchor="t">
+          <a:bodyPr wrap="square" lIns="0" tIns="0" rIns="0" bIns="0" anchor="t">
             <a:spAutoFit/>
           </a:bodyPr>
           <a:lstStyle/>
@@ -8776,7 +8951,7 @@
           <a:noFill/>
         </p:spPr>
         <p:txBody>
-          <a:bodyPr wrap="square" lIns="0" rIns="0" tIns="0" bIns="0" anchor="t">
+          <a:bodyPr wrap="square" lIns="0" tIns="0" rIns="0" bIns="0" anchor="t">
             <a:spAutoFit/>
           </a:bodyPr>
           <a:lstStyle/>
@@ -8815,7 +8990,7 @@
           <a:noFill/>
         </p:spPr>
         <p:txBody>
-          <a:bodyPr wrap="square" lIns="0" rIns="0" tIns="0" bIns="0" anchor="t">
+          <a:bodyPr wrap="square" lIns="0" tIns="0" rIns="0" bIns="0" anchor="t">
             <a:spAutoFit/>
           </a:bodyPr>
           <a:lstStyle/>
@@ -8878,6 +9053,7 @@
           <a:lstStyle/>
           <a:p>
             <a:pPr algn="ctr"/>
+            <a:endParaRPr/>
           </a:p>
         </p:txBody>
       </p:sp>
@@ -8898,7 +9074,7 @@
           <a:noFill/>
         </p:spPr>
         <p:txBody>
-          <a:bodyPr wrap="square" lIns="0" rIns="0" tIns="0" bIns="0" anchor="t">
+          <a:bodyPr wrap="square" lIns="0" tIns="0" rIns="0" bIns="0" anchor="t">
             <a:spAutoFit/>
           </a:bodyPr>
           <a:lstStyle/>
@@ -8961,6 +9137,7 @@
           <a:lstStyle/>
           <a:p>
             <a:pPr algn="ctr"/>
+            <a:endParaRPr/>
           </a:p>
         </p:txBody>
       </p:sp>
@@ -8981,7 +9158,7 @@
           <a:noFill/>
         </p:spPr>
         <p:txBody>
-          <a:bodyPr wrap="square" lIns="0" rIns="0" tIns="0" bIns="0" anchor="t">
+          <a:bodyPr wrap="square" lIns="0" tIns="0" rIns="0" bIns="0" anchor="t">
             <a:spAutoFit/>
           </a:bodyPr>
           <a:lstStyle/>
@@ -9044,6 +9221,7 @@
           <a:lstStyle/>
           <a:p>
             <a:pPr algn="ctr"/>
+            <a:endParaRPr/>
           </a:p>
         </p:txBody>
       </p:sp>
@@ -9064,7 +9242,7 @@
           <a:noFill/>
         </p:spPr>
         <p:txBody>
-          <a:bodyPr wrap="square" lIns="0" rIns="0" tIns="0" bIns="0" anchor="t">
+          <a:bodyPr wrap="square" lIns="0" tIns="0" rIns="0" bIns="0" anchor="t">
             <a:spAutoFit/>
           </a:bodyPr>
           <a:lstStyle/>
@@ -9127,6 +9305,7 @@
           <a:lstStyle/>
           <a:p>
             <a:pPr algn="ctr"/>
+            <a:endParaRPr/>
           </a:p>
         </p:txBody>
       </p:sp>
@@ -9147,7 +9326,7 @@
           <a:noFill/>
         </p:spPr>
         <p:txBody>
-          <a:bodyPr wrap="square" lIns="0" rIns="0" tIns="0" bIns="0" anchor="t">
+          <a:bodyPr wrap="square" lIns="0" tIns="0" rIns="0" bIns="0" anchor="t">
             <a:spAutoFit/>
           </a:bodyPr>
           <a:lstStyle/>
@@ -9186,7 +9365,7 @@
           <a:noFill/>
         </p:spPr>
         <p:txBody>
-          <a:bodyPr wrap="square" lIns="0" rIns="0" tIns="0" bIns="0" anchor="t">
+          <a:bodyPr wrap="square" lIns="0" tIns="0" rIns="0" bIns="0" anchor="t">
             <a:spAutoFit/>
           </a:bodyPr>
           <a:lstStyle/>
@@ -9217,7 +9396,7 @@
 </file>
 
 <file path=ppt/slides/slide14.xml><?xml version="1.0" encoding="utf-8"?>
-<p:sld xmlns:a="http://schemas.openxmlformats.org/drawingml/2006/main" xmlns:p="http://schemas.openxmlformats.org/presentationml/2006/main" xmlns:r="http://schemas.openxmlformats.org/officeDocument/2006/relationships">
+<p:sld xmlns:a="http://schemas.openxmlformats.org/drawingml/2006/main" xmlns:r="http://schemas.openxmlformats.org/officeDocument/2006/relationships" xmlns:p="http://schemas.openxmlformats.org/presentationml/2006/main">
   <p:cSld>
     <p:bg>
       <p:bgPr>
@@ -9233,7 +9412,14 @@
         <p:cNvGrpSpPr/>
         <p:nvPr/>
       </p:nvGrpSpPr>
-      <p:grpSpPr/>
+      <p:grpSpPr>
+        <a:xfrm>
+          <a:off x="0" y="0"/>
+          <a:ext cx="0" cy="0"/>
+          <a:chOff x="0" y="0"/>
+          <a:chExt cx="0" cy="0"/>
+        </a:xfrm>
+      </p:grpSpPr>
       <p:sp>
         <p:nvSpPr>
           <p:cNvPr id="2" name="Rectangle 1"/>
@@ -9275,6 +9461,7 @@
           <a:lstStyle/>
           <a:p>
             <a:pPr algn="ctr"/>
+            <a:endParaRPr/>
           </a:p>
         </p:txBody>
       </p:sp>
@@ -9295,7 +9482,7 @@
           <a:noFill/>
         </p:spPr>
         <p:txBody>
-          <a:bodyPr wrap="square" lIns="0" rIns="0" tIns="0" bIns="0" anchor="t">
+          <a:bodyPr wrap="square" lIns="0" tIns="0" rIns="0" bIns="0" anchor="t">
             <a:spAutoFit/>
           </a:bodyPr>
           <a:lstStyle/>
@@ -9334,7 +9521,7 @@
           <a:noFill/>
         </p:spPr>
         <p:txBody>
-          <a:bodyPr wrap="square" lIns="0" rIns="0" tIns="0" bIns="0" anchor="t">
+          <a:bodyPr wrap="square" lIns="0" tIns="0" rIns="0" bIns="0" anchor="t">
             <a:spAutoFit/>
           </a:bodyPr>
           <a:lstStyle/>
@@ -9395,7 +9582,7 @@
           </a:fontRef>
         </p:style>
         <p:txBody>
-          <a:bodyPr rtlCol="0" anchor="ctr" lIns="0" rIns="0" tIns="0" bIns="0"/>
+          <a:bodyPr lIns="0" tIns="0" rIns="0" bIns="0" rtlCol="0" anchor="ctr"/>
           <a:lstStyle/>
           <a:p>
             <a:pPr algn="ctr"/>
@@ -9428,7 +9615,7 @@
           <a:noFill/>
         </p:spPr>
         <p:txBody>
-          <a:bodyPr wrap="square" lIns="0" rIns="0" tIns="0" bIns="0" anchor="t">
+          <a:bodyPr wrap="square" lIns="0" tIns="0" rIns="0" bIns="0" anchor="t">
             <a:spAutoFit/>
           </a:bodyPr>
           <a:lstStyle/>
@@ -9467,7 +9654,7 @@
           <a:noFill/>
         </p:spPr>
         <p:txBody>
-          <a:bodyPr wrap="square" lIns="0" rIns="0" tIns="0" bIns="0" anchor="t">
+          <a:bodyPr wrap="square" lIns="0" tIns="0" rIns="0" bIns="0" anchor="t">
             <a:spAutoFit/>
           </a:bodyPr>
           <a:lstStyle/>
@@ -9506,7 +9693,7 @@
           <a:noFill/>
         </p:spPr>
         <p:txBody>
-          <a:bodyPr wrap="square" lIns="0" rIns="0" tIns="0" bIns="0" anchor="t">
+          <a:bodyPr wrap="square" lIns="0" tIns="0" rIns="0" bIns="0" anchor="t">
             <a:spAutoFit/>
           </a:bodyPr>
           <a:lstStyle/>
@@ -9569,6 +9756,7 @@
           <a:lstStyle/>
           <a:p>
             <a:pPr algn="ctr"/>
+            <a:endParaRPr/>
           </a:p>
         </p:txBody>
       </p:sp>
@@ -9589,7 +9777,7 @@
           <a:noFill/>
         </p:spPr>
         <p:txBody>
-          <a:bodyPr wrap="square" lIns="0" rIns="0" tIns="0" bIns="0" anchor="t">
+          <a:bodyPr wrap="square" lIns="0" tIns="0" rIns="0" bIns="0" anchor="t">
             <a:spAutoFit/>
           </a:bodyPr>
           <a:lstStyle/>
@@ -9652,6 +9840,7 @@
           <a:lstStyle/>
           <a:p>
             <a:pPr algn="ctr"/>
+            <a:endParaRPr/>
           </a:p>
         </p:txBody>
       </p:sp>
@@ -9692,7 +9881,7 @@
           </a:fontRef>
         </p:style>
         <p:txBody>
-          <a:bodyPr rtlCol="0" anchor="ctr" lIns="0" rIns="0" tIns="0" bIns="0"/>
+          <a:bodyPr lIns="0" tIns="0" rIns="0" bIns="0" rtlCol="0" anchor="ctr"/>
           <a:lstStyle/>
           <a:p>
             <a:pPr algn="ctr"/>
@@ -9745,7 +9934,7 @@
           </a:fontRef>
         </p:style>
         <p:txBody>
-          <a:bodyPr rtlCol="0" anchor="ctr" lIns="0" rIns="0" tIns="0" bIns="0"/>
+          <a:bodyPr lIns="0" tIns="0" rIns="0" bIns="0" rtlCol="0" anchor="ctr"/>
           <a:lstStyle/>
           <a:p>
             <a:pPr algn="ctr"/>
@@ -9803,6 +9992,7 @@
           <a:lstStyle/>
           <a:p>
             <a:pPr algn="ctr"/>
+            <a:endParaRPr/>
           </a:p>
         </p:txBody>
       </p:sp>
@@ -9823,7 +10013,7 @@
           <a:noFill/>
         </p:spPr>
         <p:txBody>
-          <a:bodyPr wrap="square" lIns="0" rIns="0" tIns="0" bIns="0" anchor="t">
+          <a:bodyPr wrap="square" lIns="0" tIns="0" rIns="0" bIns="0" anchor="t">
             <a:spAutoFit/>
           </a:bodyPr>
           <a:lstStyle/>
@@ -9862,7 +10052,7 @@
           <a:noFill/>
         </p:spPr>
         <p:txBody>
-          <a:bodyPr wrap="square" lIns="0" rIns="0" tIns="0" bIns="0" anchor="t">
+          <a:bodyPr wrap="square" lIns="0" tIns="0" rIns="0" bIns="0" anchor="t">
             <a:spAutoFit/>
           </a:bodyPr>
           <a:lstStyle/>
@@ -9901,7 +10091,7 @@
           <a:noFill/>
         </p:spPr>
         <p:txBody>
-          <a:bodyPr wrap="square" lIns="0" rIns="0" tIns="0" bIns="0" anchor="t">
+          <a:bodyPr wrap="square" lIns="0" tIns="0" rIns="0" bIns="0" anchor="t">
             <a:spAutoFit/>
           </a:bodyPr>
           <a:lstStyle/>
@@ -9964,6 +10154,7 @@
           <a:lstStyle/>
           <a:p>
             <a:pPr algn="ctr"/>
+            <a:endParaRPr/>
           </a:p>
         </p:txBody>
       </p:sp>
@@ -9984,7 +10175,7 @@
           <a:noFill/>
         </p:spPr>
         <p:txBody>
-          <a:bodyPr wrap="square" lIns="0" rIns="0" tIns="0" bIns="0" anchor="t">
+          <a:bodyPr wrap="square" lIns="0" tIns="0" rIns="0" bIns="0" anchor="t">
             <a:spAutoFit/>
           </a:bodyPr>
           <a:lstStyle/>
@@ -10047,6 +10238,7 @@
           <a:lstStyle/>
           <a:p>
             <a:pPr algn="ctr"/>
+            <a:endParaRPr/>
           </a:p>
         </p:txBody>
       </p:sp>
@@ -10067,7 +10259,7 @@
           <a:noFill/>
         </p:spPr>
         <p:txBody>
-          <a:bodyPr wrap="square" lIns="0" rIns="0" tIns="0" bIns="0" anchor="t">
+          <a:bodyPr wrap="square" lIns="0" tIns="0" rIns="0" bIns="0" anchor="t">
             <a:spAutoFit/>
           </a:bodyPr>
           <a:lstStyle/>
@@ -10130,6 +10322,7 @@
           <a:lstStyle/>
           <a:p>
             <a:pPr algn="ctr"/>
+            <a:endParaRPr/>
           </a:p>
         </p:txBody>
       </p:sp>
@@ -10150,7 +10343,7 @@
           <a:noFill/>
         </p:spPr>
         <p:txBody>
-          <a:bodyPr wrap="square" lIns="0" rIns="0" tIns="0" bIns="0" anchor="t">
+          <a:bodyPr wrap="square" lIns="0" tIns="0" rIns="0" bIns="0" anchor="t">
             <a:spAutoFit/>
           </a:bodyPr>
           <a:lstStyle/>
@@ -10213,6 +10406,7 @@
           <a:lstStyle/>
           <a:p>
             <a:pPr algn="ctr"/>
+            <a:endParaRPr/>
           </a:p>
         </p:txBody>
       </p:sp>
@@ -10233,7 +10427,7 @@
           <a:noFill/>
         </p:spPr>
         <p:txBody>
-          <a:bodyPr wrap="square" lIns="0" rIns="0" tIns="0" bIns="0" anchor="t">
+          <a:bodyPr wrap="square" lIns="0" tIns="0" rIns="0" bIns="0" anchor="t">
             <a:spAutoFit/>
           </a:bodyPr>
           <a:lstStyle/>
@@ -10272,7 +10466,7 @@
           <a:noFill/>
         </p:spPr>
         <p:txBody>
-          <a:bodyPr wrap="square" lIns="0" rIns="0" tIns="0" bIns="0" anchor="t">
+          <a:bodyPr wrap="square" lIns="0" tIns="0" rIns="0" bIns="0" anchor="t">
             <a:spAutoFit/>
           </a:bodyPr>
           <a:lstStyle/>
@@ -10303,7 +10497,7 @@
 </file>
 
 <file path=ppt/slides/slide15.xml><?xml version="1.0" encoding="utf-8"?>
-<p:sld xmlns:a="http://schemas.openxmlformats.org/drawingml/2006/main" xmlns:p="http://schemas.openxmlformats.org/presentationml/2006/main" xmlns:r="http://schemas.openxmlformats.org/officeDocument/2006/relationships">
+<p:sld xmlns:a="http://schemas.openxmlformats.org/drawingml/2006/main" xmlns:r="http://schemas.openxmlformats.org/officeDocument/2006/relationships" xmlns:p="http://schemas.openxmlformats.org/presentationml/2006/main">
   <p:cSld>
     <p:bg>
       <p:bgPr>
@@ -10319,7 +10513,14 @@
         <p:cNvGrpSpPr/>
         <p:nvPr/>
       </p:nvGrpSpPr>
-      <p:grpSpPr/>
+      <p:grpSpPr>
+        <a:xfrm>
+          <a:off x="0" y="0"/>
+          <a:ext cx="0" cy="0"/>
+          <a:chOff x="0" y="0"/>
+          <a:chExt cx="0" cy="0"/>
+        </a:xfrm>
+      </p:grpSpPr>
       <p:sp>
         <p:nvSpPr>
           <p:cNvPr id="2" name="Rectangle 1"/>
@@ -10361,6 +10562,7 @@
           <a:lstStyle/>
           <a:p>
             <a:pPr algn="ctr"/>
+            <a:endParaRPr/>
           </a:p>
         </p:txBody>
       </p:sp>
@@ -10381,7 +10583,7 @@
           <a:noFill/>
         </p:spPr>
         <p:txBody>
-          <a:bodyPr wrap="square" lIns="0" rIns="0" tIns="0" bIns="0" anchor="t">
+          <a:bodyPr wrap="square" lIns="0" tIns="0" rIns="0" bIns="0" anchor="t">
             <a:spAutoFit/>
           </a:bodyPr>
           <a:lstStyle/>
@@ -10420,7 +10622,7 @@
           <a:noFill/>
         </p:spPr>
         <p:txBody>
-          <a:bodyPr wrap="square" lIns="0" rIns="0" tIns="0" bIns="0" anchor="t">
+          <a:bodyPr wrap="square" lIns="0" tIns="0" rIns="0" bIns="0" anchor="t">
             <a:spAutoFit/>
           </a:bodyPr>
           <a:lstStyle/>
@@ -10481,7 +10683,7 @@
           </a:fontRef>
         </p:style>
         <p:txBody>
-          <a:bodyPr rtlCol="0" anchor="ctr" lIns="0" rIns="0" tIns="0" bIns="0"/>
+          <a:bodyPr lIns="0" tIns="0" rIns="0" bIns="0" rtlCol="0" anchor="ctr"/>
           <a:lstStyle/>
           <a:p>
             <a:pPr algn="ctr"/>
@@ -10506,15 +10708,15 @@
         <p:spPr>
           <a:xfrm>
             <a:off x="658368" y="1115568"/>
-            <a:ext cx="4480560" cy="731520"/>
-          </a:xfrm>
-          <a:prstGeom prst="rect">
-            <a:avLst/>
-          </a:prstGeom>
-          <a:noFill/>
-        </p:spPr>
-        <p:txBody>
-          <a:bodyPr wrap="square" lIns="0" rIns="0" tIns="0" bIns="0" anchor="t">
+            <a:ext cx="4480560" cy="482440"/>
+          </a:xfrm>
+          <a:prstGeom prst="rect">
+            <a:avLst/>
+          </a:prstGeom>
+          <a:noFill/>
+        </p:spPr>
+        <p:txBody>
+          <a:bodyPr wrap="square" lIns="0" tIns="0" rIns="0" bIns="0" anchor="t">
             <a:spAutoFit/>
           </a:bodyPr>
           <a:lstStyle/>
@@ -10525,14 +10727,38 @@
               </a:lnSpc>
             </a:pPr>
             <a:r>
-              <a:rPr sz="3300" b="1">
+              <a:rPr sz="2800" b="1" dirty="0" err="1">
                 <a:solidFill>
                   <a:srgbClr val="E8F1F6"/>
                 </a:solidFill>
                 <a:latin typeface="Segoe UI Semibold"/>
               </a:rPr>
-              <a:t>Formulário Embarcadores</a:t>
-            </a:r>
+              <a:t>Formulário</a:t>
+            </a:r>
+            <a:r>
+              <a:rPr sz="3300" b="1" dirty="0">
+                <a:solidFill>
+                  <a:srgbClr val="E8F1F6"/>
+                </a:solidFill>
+                <a:latin typeface="Segoe UI Semibold"/>
+              </a:rPr>
+              <a:t> </a:t>
+            </a:r>
+            <a:r>
+              <a:rPr sz="2800" b="1" dirty="0" err="1">
+                <a:solidFill>
+                  <a:srgbClr val="E8F1F6"/>
+                </a:solidFill>
+                <a:latin typeface="Segoe UI Semibold"/>
+              </a:rPr>
+              <a:t>Embarcadores</a:t>
+            </a:r>
+            <a:endParaRPr sz="3300" b="1" dirty="0">
+              <a:solidFill>
+                <a:srgbClr val="E8F1F6"/>
+              </a:solidFill>
+              <a:latin typeface="Segoe UI Semibold"/>
+            </a:endParaRPr>
           </a:p>
         </p:txBody>
       </p:sp>
@@ -10545,15 +10771,15 @@
         <p:spPr>
           <a:xfrm>
             <a:off x="658368" y="1783080"/>
-            <a:ext cx="4480560" cy="457200"/>
-          </a:xfrm>
-          <a:prstGeom prst="rect">
-            <a:avLst/>
-          </a:prstGeom>
-          <a:noFill/>
-        </p:spPr>
-        <p:txBody>
-          <a:bodyPr wrap="square" lIns="0" rIns="0" tIns="0" bIns="0" anchor="t">
+            <a:ext cx="4480560" cy="186077"/>
+          </a:xfrm>
+          <a:prstGeom prst="rect">
+            <a:avLst/>
+          </a:prstGeom>
+          <a:noFill/>
+        </p:spPr>
+        <p:txBody>
+          <a:bodyPr wrap="square" lIns="0" tIns="0" rIns="0" bIns="0" anchor="t">
             <a:spAutoFit/>
           </a:bodyPr>
           <a:lstStyle/>
@@ -10564,14 +10790,38 @@
               </a:lnSpc>
             </a:pPr>
             <a:r>
-              <a:rPr sz="1150" b="0">
+              <a:rPr sz="1150" b="0" dirty="0" err="1">
                 <a:solidFill>
                   <a:srgbClr val="8FB0C2"/>
                 </a:solidFill>
                 <a:latin typeface="Segoe UI"/>
               </a:rPr>
-              <a:t>Entrevista com embarcadores</a:t>
-            </a:r>
+              <a:t>Entrevista</a:t>
+            </a:r>
+            <a:r>
+              <a:rPr sz="1150" b="0" dirty="0">
+                <a:solidFill>
+                  <a:srgbClr val="8FB0C2"/>
+                </a:solidFill>
+                <a:latin typeface="Segoe UI"/>
+              </a:rPr>
+              <a:t> com </a:t>
+            </a:r>
+            <a:r>
+              <a:rPr sz="1050" b="0" dirty="0" err="1">
+                <a:solidFill>
+                  <a:srgbClr val="8FB0C2"/>
+                </a:solidFill>
+                <a:latin typeface="Segoe UI"/>
+              </a:rPr>
+              <a:t>embarcadores</a:t>
+            </a:r>
+            <a:endParaRPr sz="1150" b="0" dirty="0">
+              <a:solidFill>
+                <a:srgbClr val="8FB0C2"/>
+              </a:solidFill>
+              <a:latin typeface="Segoe UI"/>
+            </a:endParaRPr>
           </a:p>
         </p:txBody>
       </p:sp>
@@ -10592,7 +10842,7 @@
           <a:noFill/>
         </p:spPr>
         <p:txBody>
-          <a:bodyPr wrap="square" lIns="0" rIns="0" tIns="0" bIns="0" anchor="t">
+          <a:bodyPr wrap="square" lIns="0" tIns="0" rIns="0" bIns="0" anchor="t">
             <a:spAutoFit/>
           </a:bodyPr>
           <a:lstStyle/>
@@ -10655,6 +10905,7 @@
           <a:lstStyle/>
           <a:p>
             <a:pPr algn="ctr"/>
+            <a:endParaRPr/>
           </a:p>
         </p:txBody>
       </p:sp>
@@ -10675,7 +10926,7 @@
           <a:noFill/>
         </p:spPr>
         <p:txBody>
-          <a:bodyPr wrap="square" lIns="0" rIns="0" tIns="0" bIns="0" anchor="t">
+          <a:bodyPr wrap="square" lIns="0" tIns="0" rIns="0" bIns="0" anchor="t">
             <a:spAutoFit/>
           </a:bodyPr>
           <a:lstStyle/>
@@ -10738,6 +10989,7 @@
           <a:lstStyle/>
           <a:p>
             <a:pPr algn="ctr"/>
+            <a:endParaRPr/>
           </a:p>
         </p:txBody>
       </p:sp>
@@ -10778,7 +11030,7 @@
           </a:fontRef>
         </p:style>
         <p:txBody>
-          <a:bodyPr rtlCol="0" anchor="ctr" lIns="0" rIns="0" tIns="0" bIns="0"/>
+          <a:bodyPr lIns="0" tIns="0" rIns="0" bIns="0" rtlCol="0" anchor="ctr"/>
           <a:lstStyle/>
           <a:p>
             <a:pPr algn="ctr"/>
@@ -10831,7 +11083,7 @@
           </a:fontRef>
         </p:style>
         <p:txBody>
-          <a:bodyPr rtlCol="0" anchor="ctr" lIns="0" rIns="0" tIns="0" bIns="0"/>
+          <a:bodyPr lIns="0" tIns="0" rIns="0" bIns="0" rtlCol="0" anchor="ctr"/>
           <a:lstStyle/>
           <a:p>
             <a:pPr algn="ctr"/>
@@ -10889,6 +11141,7 @@
           <a:lstStyle/>
           <a:p>
             <a:pPr algn="ctr"/>
+            <a:endParaRPr/>
           </a:p>
         </p:txBody>
       </p:sp>
@@ -10909,7 +11162,7 @@
           <a:noFill/>
         </p:spPr>
         <p:txBody>
-          <a:bodyPr wrap="square" lIns="0" rIns="0" tIns="0" bIns="0" anchor="t">
+          <a:bodyPr wrap="square" lIns="0" tIns="0" rIns="0" bIns="0" anchor="t">
             <a:spAutoFit/>
           </a:bodyPr>
           <a:lstStyle/>
@@ -10948,7 +11201,7 @@
           <a:noFill/>
         </p:spPr>
         <p:txBody>
-          <a:bodyPr wrap="square" lIns="0" rIns="0" tIns="0" bIns="0" anchor="t">
+          <a:bodyPr wrap="square" lIns="0" tIns="0" rIns="0" bIns="0" anchor="t">
             <a:spAutoFit/>
           </a:bodyPr>
           <a:lstStyle/>
@@ -10987,7 +11240,7 @@
           <a:noFill/>
         </p:spPr>
         <p:txBody>
-          <a:bodyPr wrap="square" lIns="0" rIns="0" tIns="0" bIns="0" anchor="t">
+          <a:bodyPr wrap="square" lIns="0" tIns="0" rIns="0" bIns="0" anchor="t">
             <a:spAutoFit/>
           </a:bodyPr>
           <a:lstStyle/>
@@ -11050,6 +11303,7 @@
           <a:lstStyle/>
           <a:p>
             <a:pPr algn="ctr"/>
+            <a:endParaRPr/>
           </a:p>
         </p:txBody>
       </p:sp>
@@ -11070,7 +11324,7 @@
           <a:noFill/>
         </p:spPr>
         <p:txBody>
-          <a:bodyPr wrap="square" lIns="0" rIns="0" tIns="0" bIns="0" anchor="t">
+          <a:bodyPr wrap="square" lIns="0" tIns="0" rIns="0" bIns="0" anchor="t">
             <a:spAutoFit/>
           </a:bodyPr>
           <a:lstStyle/>
@@ -11133,6 +11387,7 @@
           <a:lstStyle/>
           <a:p>
             <a:pPr algn="ctr"/>
+            <a:endParaRPr/>
           </a:p>
         </p:txBody>
       </p:sp>
@@ -11153,7 +11408,7 @@
           <a:noFill/>
         </p:spPr>
         <p:txBody>
-          <a:bodyPr wrap="square" lIns="0" rIns="0" tIns="0" bIns="0" anchor="t">
+          <a:bodyPr wrap="square" lIns="0" tIns="0" rIns="0" bIns="0" anchor="t">
             <a:spAutoFit/>
           </a:bodyPr>
           <a:lstStyle/>
@@ -11216,6 +11471,7 @@
           <a:lstStyle/>
           <a:p>
             <a:pPr algn="ctr"/>
+            <a:endParaRPr/>
           </a:p>
         </p:txBody>
       </p:sp>
@@ -11236,7 +11492,7 @@
           <a:noFill/>
         </p:spPr>
         <p:txBody>
-          <a:bodyPr wrap="square" lIns="0" rIns="0" tIns="0" bIns="0" anchor="t">
+          <a:bodyPr wrap="square" lIns="0" tIns="0" rIns="0" bIns="0" anchor="t">
             <a:spAutoFit/>
           </a:bodyPr>
           <a:lstStyle/>
@@ -11299,6 +11555,7 @@
           <a:lstStyle/>
           <a:p>
             <a:pPr algn="ctr"/>
+            <a:endParaRPr/>
           </a:p>
         </p:txBody>
       </p:sp>
@@ -11319,7 +11576,7 @@
           <a:noFill/>
         </p:spPr>
         <p:txBody>
-          <a:bodyPr wrap="square" lIns="0" rIns="0" tIns="0" bIns="0" anchor="t">
+          <a:bodyPr wrap="square" lIns="0" tIns="0" rIns="0" bIns="0" anchor="t">
             <a:spAutoFit/>
           </a:bodyPr>
           <a:lstStyle/>
@@ -11358,7 +11615,7 @@
           <a:noFill/>
         </p:spPr>
         <p:txBody>
-          <a:bodyPr wrap="square" lIns="0" rIns="0" tIns="0" bIns="0" anchor="t">
+          <a:bodyPr wrap="square" lIns="0" tIns="0" rIns="0" bIns="0" anchor="t">
             <a:spAutoFit/>
           </a:bodyPr>
           <a:lstStyle/>
@@ -11389,7 +11646,7 @@
 </file>
 
 <file path=ppt/slides/slide16.xml><?xml version="1.0" encoding="utf-8"?>
-<p:sld xmlns:a="http://schemas.openxmlformats.org/drawingml/2006/main" xmlns:p="http://schemas.openxmlformats.org/presentationml/2006/main" xmlns:r="http://schemas.openxmlformats.org/officeDocument/2006/relationships">
+<p:sld xmlns:a="http://schemas.openxmlformats.org/drawingml/2006/main" xmlns:r="http://schemas.openxmlformats.org/officeDocument/2006/relationships" xmlns:p="http://schemas.openxmlformats.org/presentationml/2006/main">
   <p:cSld>
     <p:bg>
       <p:bgPr>
@@ -11405,7 +11662,14 @@
         <p:cNvGrpSpPr/>
         <p:nvPr/>
       </p:nvGrpSpPr>
-      <p:grpSpPr/>
+      <p:grpSpPr>
+        <a:xfrm>
+          <a:off x="0" y="0"/>
+          <a:ext cx="0" cy="0"/>
+          <a:chOff x="0" y="0"/>
+          <a:chExt cx="0" cy="0"/>
+        </a:xfrm>
+      </p:grpSpPr>
       <p:sp>
         <p:nvSpPr>
           <p:cNvPr id="2" name="Rectangle 1"/>
@@ -11447,6 +11711,7 @@
           <a:lstStyle/>
           <a:p>
             <a:pPr algn="ctr"/>
+            <a:endParaRPr/>
           </a:p>
         </p:txBody>
       </p:sp>
@@ -11467,7 +11732,7 @@
           <a:noFill/>
         </p:spPr>
         <p:txBody>
-          <a:bodyPr wrap="square" lIns="0" rIns="0" tIns="0" bIns="0" anchor="t">
+          <a:bodyPr wrap="square" lIns="0" tIns="0" rIns="0" bIns="0" anchor="t">
             <a:spAutoFit/>
           </a:bodyPr>
           <a:lstStyle/>
@@ -11506,7 +11771,7 @@
           <a:noFill/>
         </p:spPr>
         <p:txBody>
-          <a:bodyPr wrap="square" lIns="0" rIns="0" tIns="0" bIns="0" anchor="t">
+          <a:bodyPr wrap="square" lIns="0" tIns="0" rIns="0" bIns="0" anchor="t">
             <a:spAutoFit/>
           </a:bodyPr>
           <a:lstStyle/>
@@ -11545,7 +11810,7 @@
           <a:noFill/>
         </p:spPr>
         <p:txBody>
-          <a:bodyPr wrap="square" lIns="0" rIns="0" tIns="0" bIns="0" anchor="t">
+          <a:bodyPr wrap="square" lIns="0" tIns="0" rIns="0" bIns="0" anchor="t">
             <a:spAutoFit/>
           </a:bodyPr>
           <a:lstStyle/>
@@ -11584,7 +11849,7 @@
           <a:noFill/>
         </p:spPr>
         <p:txBody>
-          <a:bodyPr wrap="square" lIns="0" rIns="0" tIns="0" bIns="0" anchor="t">
+          <a:bodyPr wrap="square" lIns="0" tIns="0" rIns="0" bIns="0" anchor="t">
             <a:spAutoFit/>
           </a:bodyPr>
           <a:lstStyle/>
@@ -11649,6 +11914,7 @@
           <a:lstStyle/>
           <a:p>
             <a:pPr algn="ctr"/>
+            <a:endParaRPr/>
           </a:p>
         </p:txBody>
       </p:sp>
@@ -11693,6 +11959,7 @@
           <a:lstStyle/>
           <a:p>
             <a:pPr algn="ctr"/>
+            <a:endParaRPr/>
           </a:p>
         </p:txBody>
       </p:sp>
@@ -11713,7 +11980,7 @@
           <a:noFill/>
         </p:spPr>
         <p:txBody>
-          <a:bodyPr wrap="square" lIns="0" rIns="0" tIns="0" bIns="0" anchor="t">
+          <a:bodyPr wrap="square" lIns="0" tIns="0" rIns="0" bIns="0" anchor="t">
             <a:spAutoFit/>
           </a:bodyPr>
           <a:lstStyle/>
@@ -11752,7 +12019,7 @@
           <a:noFill/>
         </p:spPr>
         <p:txBody>
-          <a:bodyPr wrap="square" lIns="0" rIns="0" tIns="0" bIns="0" anchor="t">
+          <a:bodyPr wrap="square" lIns="0" tIns="0" rIns="0" bIns="0" anchor="t">
             <a:spAutoFit/>
           </a:bodyPr>
           <a:lstStyle/>
@@ -11817,6 +12084,7 @@
           <a:lstStyle/>
           <a:p>
             <a:pPr algn="ctr"/>
+            <a:endParaRPr/>
           </a:p>
         </p:txBody>
       </p:sp>
@@ -11861,6 +12129,7 @@
           <a:lstStyle/>
           <a:p>
             <a:pPr algn="ctr"/>
+            <a:endParaRPr/>
           </a:p>
         </p:txBody>
       </p:sp>
@@ -11881,7 +12150,7 @@
           <a:noFill/>
         </p:spPr>
         <p:txBody>
-          <a:bodyPr wrap="square" lIns="0" rIns="0" tIns="0" bIns="0" anchor="t">
+          <a:bodyPr wrap="square" lIns="0" tIns="0" rIns="0" bIns="0" anchor="t">
             <a:spAutoFit/>
           </a:bodyPr>
           <a:lstStyle/>
@@ -11920,7 +12189,7 @@
           <a:noFill/>
         </p:spPr>
         <p:txBody>
-          <a:bodyPr wrap="square" lIns="0" rIns="0" tIns="0" bIns="0" anchor="t">
+          <a:bodyPr wrap="square" lIns="0" tIns="0" rIns="0" bIns="0" anchor="t">
             <a:spAutoFit/>
           </a:bodyPr>
           <a:lstStyle/>
@@ -11951,26 +12220,26 @@
         <p:spPr>
           <a:xfrm>
             <a:off x="4590288" y="2148840"/>
-            <a:ext cx="2743200" cy="201168"/>
-          </a:xfrm>
-          <a:prstGeom prst="rect">
-            <a:avLst/>
-          </a:prstGeom>
-          <a:noFill/>
-        </p:spPr>
-        <p:txBody>
-          <a:bodyPr wrap="square" lIns="0" rIns="0" tIns="0" bIns="0" anchor="t">
-            <a:spAutoFit/>
-          </a:bodyPr>
-          <a:lstStyle/>
-          <a:p>
-            <a:pPr algn="l">
+            <a:ext cx="2743200" cy="123111"/>
+          </a:xfrm>
+          <a:prstGeom prst="rect">
+            <a:avLst/>
+          </a:prstGeom>
+          <a:noFill/>
+        </p:spPr>
+        <p:txBody>
+          <a:bodyPr wrap="square" lIns="0" tIns="0" rIns="0" bIns="0" anchor="t">
+            <a:spAutoFit/>
+          </a:bodyPr>
+          <a:lstStyle/>
+          <a:p>
+            <a:pPr algn="ctr">
               <a:lnSpc>
                 <a:spcPct val="100000"/>
               </a:lnSpc>
             </a:pPr>
             <a:r>
-              <a:rPr sz="800" b="0">
+              <a:rPr sz="800" b="0" dirty="0">
                 <a:solidFill>
                   <a:srgbClr val="5D8296"/>
                 </a:solidFill>
@@ -12024,6 +12293,7 @@
           <a:lstStyle/>
           <a:p>
             <a:pPr algn="ctr"/>
+            <a:endParaRPr/>
           </a:p>
         </p:txBody>
       </p:sp>
@@ -12068,6 +12338,7 @@
           <a:lstStyle/>
           <a:p>
             <a:pPr algn="ctr"/>
+            <a:endParaRPr/>
           </a:p>
         </p:txBody>
       </p:sp>
@@ -12088,7 +12359,7 @@
           <a:noFill/>
         </p:spPr>
         <p:txBody>
-          <a:bodyPr wrap="square" lIns="0" rIns="0" tIns="0" bIns="0" anchor="t">
+          <a:bodyPr wrap="square" lIns="0" tIns="0" rIns="0" bIns="0" anchor="t">
             <a:spAutoFit/>
           </a:bodyPr>
           <a:lstStyle/>
@@ -12127,7 +12398,7 @@
           <a:noFill/>
         </p:spPr>
         <p:txBody>
-          <a:bodyPr wrap="square" lIns="0" rIns="0" tIns="0" bIns="0" anchor="t">
+          <a:bodyPr wrap="square" lIns="0" tIns="0" rIns="0" bIns="0" anchor="t">
             <a:spAutoFit/>
           </a:bodyPr>
           <a:lstStyle/>
@@ -12201,7 +12472,7 @@
           <a:noFill/>
         </p:spPr>
         <p:txBody>
-          <a:bodyPr wrap="square" lIns="0" rIns="0" tIns="0" bIns="0" anchor="t">
+          <a:bodyPr wrap="square" lIns="0" tIns="0" rIns="0" bIns="0" anchor="t">
             <a:spAutoFit/>
           </a:bodyPr>
           <a:lstStyle/>
@@ -12275,7 +12546,7 @@
           <a:noFill/>
         </p:spPr>
         <p:txBody>
-          <a:bodyPr wrap="square" lIns="0" rIns="0" tIns="0" bIns="0" anchor="t">
+          <a:bodyPr wrap="square" lIns="0" tIns="0" rIns="0" bIns="0" anchor="t">
             <a:spAutoFit/>
           </a:bodyPr>
           <a:lstStyle/>
@@ -12314,7 +12585,7 @@
           <a:noFill/>
         </p:spPr>
         <p:txBody>
-          <a:bodyPr wrap="square" lIns="0" rIns="0" tIns="0" bIns="0" anchor="t">
+          <a:bodyPr wrap="square" lIns="0" tIns="0" rIns="0" bIns="0" anchor="t">
             <a:spAutoFit/>
           </a:bodyPr>
           <a:lstStyle/>
@@ -12379,6 +12650,7 @@
           <a:lstStyle/>
           <a:p>
             <a:pPr algn="ctr"/>
+            <a:endParaRPr/>
           </a:p>
         </p:txBody>
       </p:sp>
@@ -12423,6 +12695,7 @@
           <a:lstStyle/>
           <a:p>
             <a:pPr algn="ctr"/>
+            <a:endParaRPr/>
           </a:p>
         </p:txBody>
       </p:sp>
@@ -12443,7 +12716,7 @@
           <a:noFill/>
         </p:spPr>
         <p:txBody>
-          <a:bodyPr wrap="square" lIns="0" rIns="0" tIns="0" bIns="0" anchor="t">
+          <a:bodyPr wrap="square" lIns="0" tIns="0" rIns="0" bIns="0" anchor="t">
             <a:spAutoFit/>
           </a:bodyPr>
           <a:lstStyle/>
@@ -12482,7 +12755,7 @@
           <a:noFill/>
         </p:spPr>
         <p:txBody>
-          <a:bodyPr wrap="square" lIns="0" rIns="0" tIns="0" bIns="0" anchor="t">
+          <a:bodyPr wrap="square" lIns="0" tIns="0" rIns="0" bIns="0" anchor="t">
             <a:spAutoFit/>
           </a:bodyPr>
           <a:lstStyle/>
@@ -12547,6 +12820,7 @@
           <a:lstStyle/>
           <a:p>
             <a:pPr algn="ctr"/>
+            <a:endParaRPr/>
           </a:p>
         </p:txBody>
       </p:sp>
@@ -12591,6 +12865,7 @@
           <a:lstStyle/>
           <a:p>
             <a:pPr algn="ctr"/>
+            <a:endParaRPr/>
           </a:p>
         </p:txBody>
       </p:sp>
@@ -12611,7 +12886,7 @@
           <a:noFill/>
         </p:spPr>
         <p:txBody>
-          <a:bodyPr wrap="square" lIns="0" rIns="0" tIns="0" bIns="0" anchor="t">
+          <a:bodyPr wrap="square" lIns="0" tIns="0" rIns="0" bIns="0" anchor="t">
             <a:spAutoFit/>
           </a:bodyPr>
           <a:lstStyle/>
@@ -12650,7 +12925,7 @@
           <a:noFill/>
         </p:spPr>
         <p:txBody>
-          <a:bodyPr wrap="square" lIns="0" rIns="0" tIns="0" bIns="0" anchor="t">
+          <a:bodyPr wrap="square" lIns="0" tIns="0" rIns="0" bIns="0" anchor="t">
             <a:spAutoFit/>
           </a:bodyPr>
           <a:lstStyle/>
@@ -12689,7 +12964,7 @@
           <a:noFill/>
         </p:spPr>
         <p:txBody>
-          <a:bodyPr wrap="square" lIns="0" rIns="0" tIns="0" bIns="0" anchor="t">
+          <a:bodyPr wrap="square" lIns="0" tIns="0" rIns="0" bIns="0" anchor="t">
             <a:spAutoFit/>
           </a:bodyPr>
           <a:lstStyle/>
@@ -12754,6 +13029,7 @@
           <a:lstStyle/>
           <a:p>
             <a:pPr algn="ctr"/>
+            <a:endParaRPr/>
           </a:p>
         </p:txBody>
       </p:sp>
@@ -12798,6 +13074,7 @@
           <a:lstStyle/>
           <a:p>
             <a:pPr algn="ctr"/>
+            <a:endParaRPr/>
           </a:p>
         </p:txBody>
       </p:sp>
@@ -12818,7 +13095,7 @@
           <a:noFill/>
         </p:spPr>
         <p:txBody>
-          <a:bodyPr wrap="square" lIns="0" rIns="0" tIns="0" bIns="0" anchor="t">
+          <a:bodyPr wrap="square" lIns="0" tIns="0" rIns="0" bIns="0" anchor="t">
             <a:spAutoFit/>
           </a:bodyPr>
           <a:lstStyle/>
@@ -12857,7 +13134,7 @@
           <a:noFill/>
         </p:spPr>
         <p:txBody>
-          <a:bodyPr wrap="square" lIns="0" rIns="0" tIns="0" bIns="0" anchor="t">
+          <a:bodyPr wrap="square" lIns="0" tIns="0" rIns="0" bIns="0" anchor="t">
             <a:spAutoFit/>
           </a:bodyPr>
           <a:lstStyle/>
@@ -12896,7 +13173,7 @@
           <a:noFill/>
         </p:spPr>
         <p:txBody>
-          <a:bodyPr wrap="square" lIns="0" rIns="0" tIns="0" bIns="0" anchor="t">
+          <a:bodyPr wrap="square" lIns="0" tIns="0" rIns="0" bIns="0" anchor="t">
             <a:spAutoFit/>
           </a:bodyPr>
           <a:lstStyle/>
@@ -12961,6 +13238,7 @@
           <a:lstStyle/>
           <a:p>
             <a:pPr algn="ctr"/>
+            <a:endParaRPr/>
           </a:p>
         </p:txBody>
       </p:sp>
@@ -13005,6 +13283,7 @@
           <a:lstStyle/>
           <a:p>
             <a:pPr algn="ctr"/>
+            <a:endParaRPr/>
           </a:p>
         </p:txBody>
       </p:sp>
@@ -13025,7 +13304,7 @@
           <a:noFill/>
         </p:spPr>
         <p:txBody>
-          <a:bodyPr wrap="square" lIns="0" rIns="0" tIns="0" bIns="0" anchor="t">
+          <a:bodyPr wrap="square" lIns="0" tIns="0" rIns="0" bIns="0" anchor="t">
             <a:spAutoFit/>
           </a:bodyPr>
           <a:lstStyle/>
@@ -13064,7 +13343,7 @@
           <a:noFill/>
         </p:spPr>
         <p:txBody>
-          <a:bodyPr wrap="square" lIns="0" rIns="0" tIns="0" bIns="0" anchor="t">
+          <a:bodyPr wrap="square" lIns="0" tIns="0" rIns="0" bIns="0" anchor="t">
             <a:spAutoFit/>
           </a:bodyPr>
           <a:lstStyle/>
@@ -13103,7 +13382,7 @@
           <a:noFill/>
         </p:spPr>
         <p:txBody>
-          <a:bodyPr wrap="square" lIns="0" rIns="0" tIns="0" bIns="0" anchor="t">
+          <a:bodyPr wrap="square" lIns="0" tIns="0" rIns="0" bIns="0" anchor="t">
             <a:spAutoFit/>
           </a:bodyPr>
           <a:lstStyle/>
@@ -13168,6 +13447,7 @@
           <a:lstStyle/>
           <a:p>
             <a:pPr algn="ctr"/>
+            <a:endParaRPr/>
           </a:p>
         </p:txBody>
       </p:sp>
@@ -13212,6 +13492,7 @@
           <a:lstStyle/>
           <a:p>
             <a:pPr algn="ctr"/>
+            <a:endParaRPr/>
           </a:p>
         </p:txBody>
       </p:sp>
@@ -13232,7 +13513,7 @@
           <a:noFill/>
         </p:spPr>
         <p:txBody>
-          <a:bodyPr wrap="square" lIns="0" rIns="0" tIns="0" bIns="0" anchor="t">
+          <a:bodyPr wrap="square" lIns="0" tIns="0" rIns="0" bIns="0" anchor="t">
             <a:spAutoFit/>
           </a:bodyPr>
           <a:lstStyle/>
@@ -13271,7 +13552,7 @@
           <a:noFill/>
         </p:spPr>
         <p:txBody>
-          <a:bodyPr wrap="square" lIns="0" rIns="0" tIns="0" bIns="0" anchor="t">
+          <a:bodyPr wrap="square" lIns="0" tIns="0" rIns="0" bIns="0" anchor="t">
             <a:spAutoFit/>
           </a:bodyPr>
           <a:lstStyle/>
@@ -13345,7 +13626,7 @@
           <a:noFill/>
         </p:spPr>
         <p:txBody>
-          <a:bodyPr wrap="square" lIns="0" rIns="0" tIns="0" bIns="0" anchor="t">
+          <a:bodyPr wrap="square" lIns="0" tIns="0" rIns="0" bIns="0" anchor="t">
             <a:spAutoFit/>
           </a:bodyPr>
           <a:lstStyle/>
@@ -13419,7 +13700,7 @@
           <a:noFill/>
         </p:spPr>
         <p:txBody>
-          <a:bodyPr wrap="square" lIns="0" rIns="0" tIns="0" bIns="0" anchor="t">
+          <a:bodyPr wrap="square" lIns="0" tIns="0" rIns="0" bIns="0" anchor="t">
             <a:spAutoFit/>
           </a:bodyPr>
           <a:lstStyle/>
@@ -13482,6 +13763,7 @@
           <a:lstStyle/>
           <a:p>
             <a:pPr algn="ctr"/>
+            <a:endParaRPr/>
           </a:p>
         </p:txBody>
       </p:sp>
@@ -13502,7 +13784,7 @@
           <a:noFill/>
         </p:spPr>
         <p:txBody>
-          <a:bodyPr wrap="square" lIns="0" rIns="0" tIns="0" bIns="0" anchor="t">
+          <a:bodyPr wrap="square" lIns="0" tIns="0" rIns="0" bIns="0" anchor="t">
             <a:spAutoFit/>
           </a:bodyPr>
           <a:lstStyle/>
@@ -13541,7 +13823,7 @@
           <a:noFill/>
         </p:spPr>
         <p:txBody>
-          <a:bodyPr wrap="square" lIns="0" rIns="0" tIns="0" bIns="0" anchor="t">
+          <a:bodyPr wrap="square" lIns="0" tIns="0" rIns="0" bIns="0" anchor="t">
             <a:spAutoFit/>
           </a:bodyPr>
           <a:lstStyle/>
@@ -13572,7 +13854,7 @@
 </file>
 
 <file path=ppt/slides/slide17.xml><?xml version="1.0" encoding="utf-8"?>
-<p:sld xmlns:a="http://schemas.openxmlformats.org/drawingml/2006/main" xmlns:p="http://schemas.openxmlformats.org/presentationml/2006/main" xmlns:r="http://schemas.openxmlformats.org/officeDocument/2006/relationships">
+<p:sld xmlns:a="http://schemas.openxmlformats.org/drawingml/2006/main" xmlns:r="http://schemas.openxmlformats.org/officeDocument/2006/relationships" xmlns:p="http://schemas.openxmlformats.org/presentationml/2006/main">
   <p:cSld>
     <p:bg>
       <p:bgPr>
@@ -13588,7 +13870,14 @@
         <p:cNvGrpSpPr/>
         <p:nvPr/>
       </p:nvGrpSpPr>
-      <p:grpSpPr/>
+      <p:grpSpPr>
+        <a:xfrm>
+          <a:off x="0" y="0"/>
+          <a:ext cx="0" cy="0"/>
+          <a:chOff x="0" y="0"/>
+          <a:chExt cx="0" cy="0"/>
+        </a:xfrm>
+      </p:grpSpPr>
       <p:sp>
         <p:nvSpPr>
           <p:cNvPr id="2" name="Rectangle 1"/>
@@ -13630,6 +13919,7 @@
           <a:lstStyle/>
           <a:p>
             <a:pPr algn="ctr"/>
+            <a:endParaRPr/>
           </a:p>
         </p:txBody>
       </p:sp>
@@ -13650,7 +13940,7 @@
           <a:noFill/>
         </p:spPr>
         <p:txBody>
-          <a:bodyPr wrap="square" lIns="0" rIns="0" tIns="0" bIns="0" anchor="t">
+          <a:bodyPr wrap="square" lIns="0" tIns="0" rIns="0" bIns="0" anchor="t">
             <a:spAutoFit/>
           </a:bodyPr>
           <a:lstStyle/>
@@ -13689,7 +13979,7 @@
           <a:noFill/>
         </p:spPr>
         <p:txBody>
-          <a:bodyPr wrap="square" lIns="0" rIns="0" tIns="0" bIns="0" anchor="t">
+          <a:bodyPr wrap="square" lIns="0" tIns="0" rIns="0" bIns="0" anchor="t">
             <a:spAutoFit/>
           </a:bodyPr>
           <a:lstStyle/>
@@ -13728,7 +14018,7 @@
           <a:noFill/>
         </p:spPr>
         <p:txBody>
-          <a:bodyPr wrap="square" lIns="0" rIns="0" tIns="0" bIns="0" anchor="t">
+          <a:bodyPr wrap="square" lIns="0" tIns="0" rIns="0" bIns="0" anchor="t">
             <a:spAutoFit/>
           </a:bodyPr>
           <a:lstStyle/>
@@ -13767,7 +14057,7 @@
           <a:noFill/>
         </p:spPr>
         <p:txBody>
-          <a:bodyPr wrap="square" lIns="0" rIns="0" tIns="0" bIns="0" anchor="t">
+          <a:bodyPr wrap="square" lIns="0" tIns="0" rIns="0" bIns="0" anchor="t">
             <a:spAutoFit/>
           </a:bodyPr>
           <a:lstStyle/>
@@ -13806,7 +14096,7 @@
           <a:noFill/>
         </p:spPr>
         <p:txBody>
-          <a:bodyPr wrap="square" lIns="0" rIns="0" tIns="0" bIns="0" anchor="t">
+          <a:bodyPr wrap="square" lIns="0" tIns="0" rIns="0" bIns="0" anchor="t">
             <a:spAutoFit/>
           </a:bodyPr>
           <a:lstStyle/>
@@ -13845,7 +14135,7 @@
           <a:noFill/>
         </p:spPr>
         <p:txBody>
-          <a:bodyPr wrap="square" lIns="0" rIns="0" tIns="0" bIns="0" anchor="t">
+          <a:bodyPr wrap="square" lIns="0" tIns="0" rIns="0" bIns="0" anchor="t">
             <a:spAutoFit/>
           </a:bodyPr>
           <a:lstStyle/>
@@ -13884,7 +14174,7 @@
           <a:noFill/>
         </p:spPr>
         <p:txBody>
-          <a:bodyPr wrap="square" lIns="0" rIns="0" tIns="0" bIns="0" anchor="t">
+          <a:bodyPr wrap="square" lIns="0" tIns="0" rIns="0" bIns="0" anchor="t">
             <a:spAutoFit/>
           </a:bodyPr>
           <a:lstStyle/>
@@ -13923,7 +14213,7 @@
           <a:noFill/>
         </p:spPr>
         <p:txBody>
-          <a:bodyPr wrap="square" lIns="0" rIns="0" tIns="0" bIns="0" anchor="t">
+          <a:bodyPr wrap="square" lIns="0" tIns="0" rIns="0" bIns="0" anchor="t">
             <a:spAutoFit/>
           </a:bodyPr>
           <a:lstStyle/>
@@ -13986,6 +14276,7 @@
           <a:lstStyle/>
           <a:p>
             <a:pPr algn="ctr"/>
+            <a:endParaRPr/>
           </a:p>
         </p:txBody>
       </p:sp>
@@ -14006,7 +14297,7 @@
           <a:noFill/>
         </p:spPr>
         <p:txBody>
-          <a:bodyPr wrap="square" lIns="0" rIns="0" tIns="0" bIns="0" anchor="t">
+          <a:bodyPr wrap="square" lIns="0" tIns="0" rIns="0" bIns="0" anchor="t">
             <a:spAutoFit/>
           </a:bodyPr>
           <a:lstStyle/>
@@ -14045,7 +14336,7 @@
           <a:noFill/>
         </p:spPr>
         <p:txBody>
-          <a:bodyPr wrap="square" lIns="0" rIns="0" tIns="0" bIns="0" anchor="t">
+          <a:bodyPr wrap="square" lIns="0" tIns="0" rIns="0" bIns="0" anchor="t">
             <a:spAutoFit/>
           </a:bodyPr>
           <a:lstStyle/>
@@ -14103,7 +14394,7 @@
           <a:noFill/>
         </p:spPr>
         <p:txBody>
-          <a:bodyPr wrap="square" lIns="0" rIns="0" tIns="0" bIns="0" anchor="t">
+          <a:bodyPr wrap="square" lIns="0" tIns="0" rIns="0" bIns="0" anchor="t">
             <a:spAutoFit/>
           </a:bodyPr>
           <a:lstStyle/>
@@ -14142,7 +14433,7 @@
           <a:noFill/>
         </p:spPr>
         <p:txBody>
-          <a:bodyPr wrap="square" lIns="0" rIns="0" tIns="0" bIns="0" anchor="t">
+          <a:bodyPr wrap="square" lIns="0" tIns="0" rIns="0" bIns="0" anchor="t">
             <a:spAutoFit/>
           </a:bodyPr>
           <a:lstStyle/>
@@ -14200,7 +14491,7 @@
           <a:noFill/>
         </p:spPr>
         <p:txBody>
-          <a:bodyPr wrap="square" lIns="0" rIns="0" tIns="0" bIns="0" anchor="t">
+          <a:bodyPr wrap="square" lIns="0" tIns="0" rIns="0" bIns="0" anchor="t">
             <a:spAutoFit/>
           </a:bodyPr>
           <a:lstStyle/>
@@ -14239,7 +14530,7 @@
           <a:noFill/>
         </p:spPr>
         <p:txBody>
-          <a:bodyPr wrap="square" lIns="0" rIns="0" tIns="0" bIns="0" anchor="t">
+          <a:bodyPr wrap="square" lIns="0" tIns="0" rIns="0" bIns="0" anchor="t">
             <a:spAutoFit/>
           </a:bodyPr>
           <a:lstStyle/>
@@ -14321,6 +14612,7 @@
           <a:lstStyle/>
           <a:p>
             <a:pPr algn="ctr"/>
+            <a:endParaRPr/>
           </a:p>
         </p:txBody>
       </p:sp>
@@ -14341,7 +14633,7 @@
           <a:noFill/>
         </p:spPr>
         <p:txBody>
-          <a:bodyPr wrap="square" lIns="0" rIns="0" tIns="0" bIns="0" anchor="t">
+          <a:bodyPr wrap="square" lIns="0" tIns="0" rIns="0" bIns="0" anchor="t">
             <a:spAutoFit/>
           </a:bodyPr>
           <a:lstStyle/>
@@ -14380,7 +14672,7 @@
           <a:noFill/>
         </p:spPr>
         <p:txBody>
-          <a:bodyPr wrap="square" lIns="0" rIns="0" tIns="0" bIns="0" anchor="t">
+          <a:bodyPr wrap="square" lIns="0" tIns="0" rIns="0" bIns="0" anchor="t">
             <a:spAutoFit/>
           </a:bodyPr>
           <a:lstStyle/>
@@ -14411,7 +14703,7 @@
 </file>
 
 <file path=ppt/slides/slide2.xml><?xml version="1.0" encoding="utf-8"?>
-<p:sld xmlns:a="http://schemas.openxmlformats.org/drawingml/2006/main" xmlns:p="http://schemas.openxmlformats.org/presentationml/2006/main" xmlns:r="http://schemas.openxmlformats.org/officeDocument/2006/relationships">
+<p:sld xmlns:a="http://schemas.openxmlformats.org/drawingml/2006/main" xmlns:r="http://schemas.openxmlformats.org/officeDocument/2006/relationships" xmlns:p="http://schemas.openxmlformats.org/presentationml/2006/main">
   <p:cSld>
     <p:bg>
       <p:bgPr>
@@ -14427,7 +14719,14 @@
         <p:cNvGrpSpPr/>
         <p:nvPr/>
       </p:nvGrpSpPr>
-      <p:grpSpPr/>
+      <p:grpSpPr>
+        <a:xfrm>
+          <a:off x="0" y="0"/>
+          <a:ext cx="0" cy="0"/>
+          <a:chOff x="0" y="0"/>
+          <a:chExt cx="0" cy="0"/>
+        </a:xfrm>
+      </p:grpSpPr>
       <p:sp>
         <p:nvSpPr>
           <p:cNvPr id="2" name="Rectangle 1"/>
@@ -14469,6 +14768,7 @@
           <a:lstStyle/>
           <a:p>
             <a:pPr algn="ctr"/>
+            <a:endParaRPr/>
           </a:p>
         </p:txBody>
       </p:sp>
@@ -14489,7 +14789,7 @@
           <a:noFill/>
         </p:spPr>
         <p:txBody>
-          <a:bodyPr wrap="square" lIns="0" rIns="0" tIns="0" bIns="0" anchor="t">
+          <a:bodyPr wrap="square" lIns="0" tIns="0" rIns="0" bIns="0" anchor="t">
             <a:spAutoFit/>
           </a:bodyPr>
           <a:lstStyle/>
@@ -14528,7 +14828,7 @@
           <a:noFill/>
         </p:spPr>
         <p:txBody>
-          <a:bodyPr wrap="square" lIns="0" rIns="0" tIns="0" bIns="0" anchor="t">
+          <a:bodyPr wrap="square" lIns="0" tIns="0" rIns="0" bIns="0" anchor="t">
             <a:spAutoFit/>
           </a:bodyPr>
           <a:lstStyle/>
@@ -14567,7 +14867,7 @@
           <a:noFill/>
         </p:spPr>
         <p:txBody>
-          <a:bodyPr wrap="square" lIns="0" rIns="0" tIns="0" bIns="0" anchor="t">
+          <a:bodyPr wrap="square" lIns="0" tIns="0" rIns="0" bIns="0" anchor="t">
             <a:spAutoFit/>
           </a:bodyPr>
           <a:lstStyle/>
@@ -14606,7 +14906,7 @@
           <a:noFill/>
         </p:spPr>
         <p:txBody>
-          <a:bodyPr wrap="square" lIns="0" rIns="0" tIns="0" bIns="0" anchor="t">
+          <a:bodyPr wrap="square" lIns="0" tIns="0" rIns="0" bIns="0" anchor="t">
             <a:spAutoFit/>
           </a:bodyPr>
           <a:lstStyle/>
@@ -14645,7 +14945,7 @@
           <a:noFill/>
         </p:spPr>
         <p:txBody>
-          <a:bodyPr wrap="square" lIns="0" rIns="0" tIns="0" bIns="0" anchor="t">
+          <a:bodyPr wrap="square" lIns="0" tIns="0" rIns="0" bIns="0" anchor="t">
             <a:spAutoFit/>
           </a:bodyPr>
           <a:lstStyle/>
@@ -14684,7 +14984,7 @@
           <a:noFill/>
         </p:spPr>
         <p:txBody>
-          <a:bodyPr wrap="square" lIns="0" rIns="0" tIns="0" bIns="0" anchor="t">
+          <a:bodyPr wrap="square" lIns="0" tIns="0" rIns="0" bIns="0" anchor="t">
             <a:spAutoFit/>
           </a:bodyPr>
           <a:lstStyle/>
@@ -14723,7 +15023,7 @@
           <a:noFill/>
         </p:spPr>
         <p:txBody>
-          <a:bodyPr wrap="square" lIns="0" rIns="0" tIns="0" bIns="0" anchor="t">
+          <a:bodyPr wrap="square" lIns="0" tIns="0" rIns="0" bIns="0" anchor="t">
             <a:spAutoFit/>
           </a:bodyPr>
           <a:lstStyle/>
@@ -14762,7 +15062,7 @@
           <a:noFill/>
         </p:spPr>
         <p:txBody>
-          <a:bodyPr wrap="square" lIns="0" rIns="0" tIns="0" bIns="0" anchor="t">
+          <a:bodyPr wrap="square" lIns="0" tIns="0" rIns="0" bIns="0" anchor="t">
             <a:spAutoFit/>
           </a:bodyPr>
           <a:lstStyle/>
@@ -14801,7 +15101,7 @@
           <a:noFill/>
         </p:spPr>
         <p:txBody>
-          <a:bodyPr wrap="square" lIns="0" rIns="0" tIns="0" bIns="0" anchor="t">
+          <a:bodyPr wrap="square" lIns="0" tIns="0" rIns="0" bIns="0" anchor="t">
             <a:spAutoFit/>
           </a:bodyPr>
           <a:lstStyle/>
@@ -14840,7 +15140,7 @@
           <a:noFill/>
         </p:spPr>
         <p:txBody>
-          <a:bodyPr wrap="square" lIns="0" rIns="0" tIns="0" bIns="0" anchor="t">
+          <a:bodyPr wrap="square" lIns="0" tIns="0" rIns="0" bIns="0" anchor="t">
             <a:spAutoFit/>
           </a:bodyPr>
           <a:lstStyle/>
@@ -14879,7 +15179,7 @@
           <a:noFill/>
         </p:spPr>
         <p:txBody>
-          <a:bodyPr wrap="square" lIns="0" rIns="0" tIns="0" bIns="0" anchor="t">
+          <a:bodyPr wrap="square" lIns="0" tIns="0" rIns="0" bIns="0" anchor="t">
             <a:spAutoFit/>
           </a:bodyPr>
           <a:lstStyle/>
@@ -14918,7 +15218,7 @@
           <a:noFill/>
         </p:spPr>
         <p:txBody>
-          <a:bodyPr wrap="square" lIns="0" rIns="0" tIns="0" bIns="0" anchor="t">
+          <a:bodyPr wrap="square" lIns="0" tIns="0" rIns="0" bIns="0" anchor="t">
             <a:spAutoFit/>
           </a:bodyPr>
           <a:lstStyle/>
@@ -14981,6 +15281,7 @@
           <a:lstStyle/>
           <a:p>
             <a:pPr algn="ctr"/>
+            <a:endParaRPr/>
           </a:p>
         </p:txBody>
       </p:sp>
@@ -15025,6 +15326,7 @@
           <a:lstStyle/>
           <a:p>
             <a:pPr algn="ctr"/>
+            <a:endParaRPr/>
           </a:p>
         </p:txBody>
       </p:sp>
@@ -15045,7 +15347,7 @@
           <a:noFill/>
         </p:spPr>
         <p:txBody>
-          <a:bodyPr wrap="square" lIns="0" rIns="0" tIns="0" bIns="0" anchor="t">
+          <a:bodyPr wrap="square" lIns="0" tIns="0" rIns="0" bIns="0" anchor="t">
             <a:spAutoFit/>
           </a:bodyPr>
           <a:lstStyle/>
@@ -15084,7 +15386,7 @@
           <a:noFill/>
         </p:spPr>
         <p:txBody>
-          <a:bodyPr wrap="square" lIns="0" rIns="0" tIns="0" bIns="0" anchor="t">
+          <a:bodyPr wrap="square" lIns="0" tIns="0" rIns="0" bIns="0" anchor="t">
             <a:spAutoFit/>
           </a:bodyPr>
           <a:lstStyle/>
@@ -15123,7 +15425,7 @@
           <a:noFill/>
         </p:spPr>
         <p:txBody>
-          <a:bodyPr wrap="square" lIns="0" rIns="0" tIns="0" bIns="0" anchor="t">
+          <a:bodyPr wrap="square" lIns="0" tIns="0" rIns="0" bIns="0" anchor="t">
             <a:spAutoFit/>
           </a:bodyPr>
           <a:lstStyle/>
@@ -15162,7 +15464,7 @@
           <a:noFill/>
         </p:spPr>
         <p:txBody>
-          <a:bodyPr wrap="square" lIns="0" rIns="0" tIns="0" bIns="0" anchor="t">
+          <a:bodyPr wrap="square" lIns="0" tIns="0" rIns="0" bIns="0" anchor="t">
             <a:spAutoFit/>
           </a:bodyPr>
           <a:lstStyle/>
@@ -15225,6 +15527,7 @@
           <a:lstStyle/>
           <a:p>
             <a:pPr algn="ctr"/>
+            <a:endParaRPr/>
           </a:p>
         </p:txBody>
       </p:sp>
@@ -15269,6 +15572,7 @@
           <a:lstStyle/>
           <a:p>
             <a:pPr algn="ctr"/>
+            <a:endParaRPr/>
           </a:p>
         </p:txBody>
       </p:sp>
@@ -15289,7 +15593,7 @@
           <a:noFill/>
         </p:spPr>
         <p:txBody>
-          <a:bodyPr wrap="square" lIns="0" rIns="0" tIns="0" bIns="0" anchor="t">
+          <a:bodyPr wrap="square" lIns="0" tIns="0" rIns="0" bIns="0" anchor="t">
             <a:spAutoFit/>
           </a:bodyPr>
           <a:lstStyle/>
@@ -15328,7 +15632,7 @@
           <a:noFill/>
         </p:spPr>
         <p:txBody>
-          <a:bodyPr wrap="square" lIns="0" rIns="0" tIns="0" bIns="0" anchor="t">
+          <a:bodyPr wrap="square" lIns="0" tIns="0" rIns="0" bIns="0" anchor="t">
             <a:spAutoFit/>
           </a:bodyPr>
           <a:lstStyle/>
@@ -15391,6 +15695,7 @@
           <a:lstStyle/>
           <a:p>
             <a:pPr algn="ctr"/>
+            <a:endParaRPr/>
           </a:p>
         </p:txBody>
       </p:sp>
@@ -15435,6 +15740,7 @@
           <a:lstStyle/>
           <a:p>
             <a:pPr algn="ctr"/>
+            <a:endParaRPr/>
           </a:p>
         </p:txBody>
       </p:sp>
@@ -15455,7 +15761,7 @@
           <a:noFill/>
         </p:spPr>
         <p:txBody>
-          <a:bodyPr wrap="square" lIns="0" rIns="0" tIns="0" bIns="0" anchor="t">
+          <a:bodyPr wrap="square" lIns="0" tIns="0" rIns="0" bIns="0" anchor="t">
             <a:spAutoFit/>
           </a:bodyPr>
           <a:lstStyle/>
@@ -15494,7 +15800,7 @@
           <a:noFill/>
         </p:spPr>
         <p:txBody>
-          <a:bodyPr wrap="square" lIns="0" rIns="0" tIns="0" bIns="0" anchor="t">
+          <a:bodyPr wrap="square" lIns="0" tIns="0" rIns="0" bIns="0" anchor="t">
             <a:spAutoFit/>
           </a:bodyPr>
           <a:lstStyle/>
@@ -15557,6 +15863,7 @@
           <a:lstStyle/>
           <a:p>
             <a:pPr algn="ctr"/>
+            <a:endParaRPr/>
           </a:p>
         </p:txBody>
       </p:sp>
@@ -15601,6 +15908,7 @@
           <a:lstStyle/>
           <a:p>
             <a:pPr algn="ctr"/>
+            <a:endParaRPr/>
           </a:p>
         </p:txBody>
       </p:sp>
@@ -15621,7 +15929,7 @@
           <a:noFill/>
         </p:spPr>
         <p:txBody>
-          <a:bodyPr wrap="square" lIns="0" rIns="0" tIns="0" bIns="0" anchor="t">
+          <a:bodyPr wrap="square" lIns="0" tIns="0" rIns="0" bIns="0" anchor="t">
             <a:spAutoFit/>
           </a:bodyPr>
           <a:lstStyle/>
@@ -15660,7 +15968,7 @@
           <a:noFill/>
         </p:spPr>
         <p:txBody>
-          <a:bodyPr wrap="square" lIns="0" rIns="0" tIns="0" bIns="0" anchor="t">
+          <a:bodyPr wrap="square" lIns="0" tIns="0" rIns="0" bIns="0" anchor="t">
             <a:spAutoFit/>
           </a:bodyPr>
           <a:lstStyle/>
@@ -15723,6 +16031,7 @@
           <a:lstStyle/>
           <a:p>
             <a:pPr algn="ctr"/>
+            <a:endParaRPr/>
           </a:p>
         </p:txBody>
       </p:sp>
@@ -15767,6 +16076,7 @@
           <a:lstStyle/>
           <a:p>
             <a:pPr algn="ctr"/>
+            <a:endParaRPr/>
           </a:p>
         </p:txBody>
       </p:sp>
@@ -15787,7 +16097,7 @@
           <a:noFill/>
         </p:spPr>
         <p:txBody>
-          <a:bodyPr wrap="square" lIns="0" rIns="0" tIns="0" bIns="0" anchor="t">
+          <a:bodyPr wrap="square" lIns="0" tIns="0" rIns="0" bIns="0" anchor="t">
             <a:spAutoFit/>
           </a:bodyPr>
           <a:lstStyle/>
@@ -15826,7 +16136,7 @@
           <a:noFill/>
         </p:spPr>
         <p:txBody>
-          <a:bodyPr wrap="square" lIns="0" rIns="0" tIns="0" bIns="0" anchor="t">
+          <a:bodyPr wrap="square" lIns="0" tIns="0" rIns="0" bIns="0" anchor="t">
             <a:spAutoFit/>
           </a:bodyPr>
           <a:lstStyle/>
@@ -15889,6 +16199,7 @@
           <a:lstStyle/>
           <a:p>
             <a:pPr algn="ctr"/>
+            <a:endParaRPr/>
           </a:p>
         </p:txBody>
       </p:sp>
@@ -15933,6 +16244,7 @@
           <a:lstStyle/>
           <a:p>
             <a:pPr algn="ctr"/>
+            <a:endParaRPr/>
           </a:p>
         </p:txBody>
       </p:sp>
@@ -15953,7 +16265,7 @@
           <a:noFill/>
         </p:spPr>
         <p:txBody>
-          <a:bodyPr wrap="square" lIns="0" rIns="0" tIns="0" bIns="0" anchor="t">
+          <a:bodyPr wrap="square" lIns="0" tIns="0" rIns="0" bIns="0" anchor="t">
             <a:spAutoFit/>
           </a:bodyPr>
           <a:lstStyle/>
@@ -15992,7 +16304,7 @@
           <a:noFill/>
         </p:spPr>
         <p:txBody>
-          <a:bodyPr wrap="square" lIns="0" rIns="0" tIns="0" bIns="0" anchor="t">
+          <a:bodyPr wrap="square" lIns="0" tIns="0" rIns="0" bIns="0" anchor="t">
             <a:spAutoFit/>
           </a:bodyPr>
           <a:lstStyle/>
@@ -16055,6 +16367,7 @@
           <a:lstStyle/>
           <a:p>
             <a:pPr algn="ctr"/>
+            <a:endParaRPr/>
           </a:p>
         </p:txBody>
       </p:sp>
@@ -16099,6 +16412,7 @@
           <a:lstStyle/>
           <a:p>
             <a:pPr algn="ctr"/>
+            <a:endParaRPr/>
           </a:p>
         </p:txBody>
       </p:sp>
@@ -16143,6 +16457,7 @@
           <a:lstStyle/>
           <a:p>
             <a:pPr algn="ctr"/>
+            <a:endParaRPr/>
           </a:p>
         </p:txBody>
       </p:sp>
@@ -16163,7 +16478,7 @@
           <a:noFill/>
         </p:spPr>
         <p:txBody>
-          <a:bodyPr wrap="square" lIns="0" rIns="0" tIns="0" bIns="0" anchor="t">
+          <a:bodyPr wrap="square" lIns="0" tIns="0" rIns="0" bIns="0" anchor="t">
             <a:spAutoFit/>
           </a:bodyPr>
           <a:lstStyle/>
@@ -16202,7 +16517,7 @@
           <a:noFill/>
         </p:spPr>
         <p:txBody>
-          <a:bodyPr wrap="square" lIns="0" rIns="0" tIns="0" bIns="0" anchor="t">
+          <a:bodyPr wrap="square" lIns="0" tIns="0" rIns="0" bIns="0" anchor="t">
             <a:spAutoFit/>
           </a:bodyPr>
           <a:lstStyle/>
@@ -16241,7 +16556,7 @@
           <a:noFill/>
         </p:spPr>
         <p:txBody>
-          <a:bodyPr wrap="square" lIns="0" rIns="0" tIns="0" bIns="0" anchor="t">
+          <a:bodyPr wrap="square" lIns="0" tIns="0" rIns="0" bIns="0" anchor="t">
             <a:spAutoFit/>
           </a:bodyPr>
           <a:lstStyle/>
@@ -16280,7 +16595,7 @@
           <a:noFill/>
         </p:spPr>
         <p:txBody>
-          <a:bodyPr wrap="square" lIns="0" rIns="0" tIns="0" bIns="0" anchor="t">
+          <a:bodyPr wrap="square" lIns="0" tIns="0" rIns="0" bIns="0" anchor="t">
             <a:spAutoFit/>
           </a:bodyPr>
           <a:lstStyle/>
@@ -16343,6 +16658,7 @@
           <a:lstStyle/>
           <a:p>
             <a:pPr algn="ctr"/>
+            <a:endParaRPr/>
           </a:p>
         </p:txBody>
       </p:sp>
@@ -16387,6 +16703,7 @@
           <a:lstStyle/>
           <a:p>
             <a:pPr algn="ctr"/>
+            <a:endParaRPr/>
           </a:p>
         </p:txBody>
       </p:sp>
@@ -16407,7 +16724,7 @@
           <a:noFill/>
         </p:spPr>
         <p:txBody>
-          <a:bodyPr wrap="square" lIns="0" rIns="0" tIns="0" bIns="0" anchor="t">
+          <a:bodyPr wrap="square" lIns="0" tIns="0" rIns="0" bIns="0" anchor="t">
             <a:spAutoFit/>
           </a:bodyPr>
           <a:lstStyle/>
@@ -16446,7 +16763,7 @@
           <a:noFill/>
         </p:spPr>
         <p:txBody>
-          <a:bodyPr wrap="square" lIns="0" rIns="0" tIns="0" bIns="0" anchor="t">
+          <a:bodyPr wrap="square" lIns="0" tIns="0" rIns="0" bIns="0" anchor="t">
             <a:spAutoFit/>
           </a:bodyPr>
           <a:lstStyle/>
@@ -16509,6 +16826,7 @@
           <a:lstStyle/>
           <a:p>
             <a:pPr algn="ctr"/>
+            <a:endParaRPr/>
           </a:p>
         </p:txBody>
       </p:sp>
@@ -16553,6 +16871,7 @@
           <a:lstStyle/>
           <a:p>
             <a:pPr algn="ctr"/>
+            <a:endParaRPr/>
           </a:p>
         </p:txBody>
       </p:sp>
@@ -16573,7 +16892,7 @@
           <a:noFill/>
         </p:spPr>
         <p:txBody>
-          <a:bodyPr wrap="square" lIns="0" rIns="0" tIns="0" bIns="0" anchor="t">
+          <a:bodyPr wrap="square" lIns="0" tIns="0" rIns="0" bIns="0" anchor="t">
             <a:spAutoFit/>
           </a:bodyPr>
           <a:lstStyle/>
@@ -16612,7 +16931,7 @@
           <a:noFill/>
         </p:spPr>
         <p:txBody>
-          <a:bodyPr wrap="square" lIns="0" rIns="0" tIns="0" bIns="0" anchor="t">
+          <a:bodyPr wrap="square" lIns="0" tIns="0" rIns="0" bIns="0" anchor="t">
             <a:spAutoFit/>
           </a:bodyPr>
           <a:lstStyle/>
@@ -16675,6 +16994,7 @@
           <a:lstStyle/>
           <a:p>
             <a:pPr algn="ctr"/>
+            <a:endParaRPr/>
           </a:p>
         </p:txBody>
       </p:sp>
@@ -16719,6 +17039,7 @@
           <a:lstStyle/>
           <a:p>
             <a:pPr algn="ctr"/>
+            <a:endParaRPr/>
           </a:p>
         </p:txBody>
       </p:sp>
@@ -16763,6 +17084,7 @@
           <a:lstStyle/>
           <a:p>
             <a:pPr algn="ctr"/>
+            <a:endParaRPr/>
           </a:p>
         </p:txBody>
       </p:sp>
@@ -16783,7 +17105,7 @@
           <a:noFill/>
         </p:spPr>
         <p:txBody>
-          <a:bodyPr wrap="square" lIns="0" rIns="0" tIns="0" bIns="0" anchor="t">
+          <a:bodyPr wrap="square" lIns="0" tIns="0" rIns="0" bIns="0" anchor="t">
             <a:spAutoFit/>
           </a:bodyPr>
           <a:lstStyle/>
@@ -16822,7 +17144,7 @@
           <a:noFill/>
         </p:spPr>
         <p:txBody>
-          <a:bodyPr wrap="square" lIns="0" rIns="0" tIns="0" bIns="0" anchor="t">
+          <a:bodyPr wrap="square" lIns="0" tIns="0" rIns="0" bIns="0" anchor="t">
             <a:spAutoFit/>
           </a:bodyPr>
           <a:lstStyle/>
@@ -16861,7 +17183,7 @@
           <a:noFill/>
         </p:spPr>
         <p:txBody>
-          <a:bodyPr wrap="square" lIns="0" rIns="0" tIns="0" bIns="0" anchor="t">
+          <a:bodyPr wrap="square" lIns="0" tIns="0" rIns="0" bIns="0" anchor="t">
             <a:spAutoFit/>
           </a:bodyPr>
           <a:lstStyle/>
@@ -16900,7 +17222,7 @@
           <a:noFill/>
         </p:spPr>
         <p:txBody>
-          <a:bodyPr wrap="square" lIns="0" rIns="0" tIns="0" bIns="0" anchor="t">
+          <a:bodyPr wrap="square" lIns="0" tIns="0" rIns="0" bIns="0" anchor="t">
             <a:spAutoFit/>
           </a:bodyPr>
           <a:lstStyle/>
@@ -16963,6 +17285,7 @@
           <a:lstStyle/>
           <a:p>
             <a:pPr algn="ctr"/>
+            <a:endParaRPr/>
           </a:p>
         </p:txBody>
       </p:sp>
@@ -17007,6 +17330,7 @@
           <a:lstStyle/>
           <a:p>
             <a:pPr algn="ctr"/>
+            <a:endParaRPr/>
           </a:p>
         </p:txBody>
       </p:sp>
@@ -17027,7 +17351,7 @@
           <a:noFill/>
         </p:spPr>
         <p:txBody>
-          <a:bodyPr wrap="square" lIns="0" rIns="0" tIns="0" bIns="0" anchor="t">
+          <a:bodyPr wrap="square" lIns="0" tIns="0" rIns="0" bIns="0" anchor="t">
             <a:spAutoFit/>
           </a:bodyPr>
           <a:lstStyle/>
@@ -17066,7 +17390,7 @@
           <a:noFill/>
         </p:spPr>
         <p:txBody>
-          <a:bodyPr wrap="square" lIns="0" rIns="0" tIns="0" bIns="0" anchor="t">
+          <a:bodyPr wrap="square" lIns="0" tIns="0" rIns="0" bIns="0" anchor="t">
             <a:spAutoFit/>
           </a:bodyPr>
           <a:lstStyle/>
@@ -17129,6 +17453,7 @@
           <a:lstStyle/>
           <a:p>
             <a:pPr algn="ctr"/>
+            <a:endParaRPr/>
           </a:p>
         </p:txBody>
       </p:sp>
@@ -17173,6 +17498,7 @@
           <a:lstStyle/>
           <a:p>
             <a:pPr algn="ctr"/>
+            <a:endParaRPr/>
           </a:p>
         </p:txBody>
       </p:sp>
@@ -17193,7 +17519,7 @@
           <a:noFill/>
         </p:spPr>
         <p:txBody>
-          <a:bodyPr wrap="square" lIns="0" rIns="0" tIns="0" bIns="0" anchor="t">
+          <a:bodyPr wrap="square" lIns="0" tIns="0" rIns="0" bIns="0" anchor="t">
             <a:spAutoFit/>
           </a:bodyPr>
           <a:lstStyle/>
@@ -17232,7 +17558,7 @@
           <a:noFill/>
         </p:spPr>
         <p:txBody>
-          <a:bodyPr wrap="square" lIns="0" rIns="0" tIns="0" bIns="0" anchor="t">
+          <a:bodyPr wrap="square" lIns="0" tIns="0" rIns="0" bIns="0" anchor="t">
             <a:spAutoFit/>
           </a:bodyPr>
           <a:lstStyle/>
@@ -17295,6 +17621,7 @@
           <a:lstStyle/>
           <a:p>
             <a:pPr algn="ctr"/>
+            <a:endParaRPr/>
           </a:p>
         </p:txBody>
       </p:sp>
@@ -17339,6 +17666,7 @@
           <a:lstStyle/>
           <a:p>
             <a:pPr algn="ctr"/>
+            <a:endParaRPr/>
           </a:p>
         </p:txBody>
       </p:sp>
@@ -17383,6 +17711,7 @@
           <a:lstStyle/>
           <a:p>
             <a:pPr algn="ctr"/>
+            <a:endParaRPr/>
           </a:p>
         </p:txBody>
       </p:sp>
@@ -17403,7 +17732,7 @@
           <a:noFill/>
         </p:spPr>
         <p:txBody>
-          <a:bodyPr wrap="square" lIns="0" rIns="0" tIns="0" bIns="0" anchor="t">
+          <a:bodyPr wrap="square" lIns="0" tIns="0" rIns="0" bIns="0" anchor="t">
             <a:spAutoFit/>
           </a:bodyPr>
           <a:lstStyle/>
@@ -17442,7 +17771,7 @@
           <a:noFill/>
         </p:spPr>
         <p:txBody>
-          <a:bodyPr wrap="square" lIns="0" rIns="0" tIns="0" bIns="0" anchor="t">
+          <a:bodyPr wrap="square" lIns="0" tIns="0" rIns="0" bIns="0" anchor="t">
             <a:spAutoFit/>
           </a:bodyPr>
           <a:lstStyle/>
@@ -17473,7 +17802,7 @@
 </file>
 
 <file path=ppt/slides/slide3.xml><?xml version="1.0" encoding="utf-8"?>
-<p:sld xmlns:a="http://schemas.openxmlformats.org/drawingml/2006/main" xmlns:p="http://schemas.openxmlformats.org/presentationml/2006/main" xmlns:r="http://schemas.openxmlformats.org/officeDocument/2006/relationships">
+<p:sld xmlns:a="http://schemas.openxmlformats.org/drawingml/2006/main" xmlns:r="http://schemas.openxmlformats.org/officeDocument/2006/relationships" xmlns:p="http://schemas.openxmlformats.org/presentationml/2006/main">
   <p:cSld>
     <p:bg>
       <p:bgPr>
@@ -17489,7 +17818,14 @@
         <p:cNvGrpSpPr/>
         <p:nvPr/>
       </p:nvGrpSpPr>
-      <p:grpSpPr/>
+      <p:grpSpPr>
+        <a:xfrm>
+          <a:off x="0" y="0"/>
+          <a:ext cx="0" cy="0"/>
+          <a:chOff x="0" y="0"/>
+          <a:chExt cx="0" cy="0"/>
+        </a:xfrm>
+      </p:grpSpPr>
       <p:sp>
         <p:nvSpPr>
           <p:cNvPr id="2" name="Rectangle 1"/>
@@ -17531,6 +17867,7 @@
           <a:lstStyle/>
           <a:p>
             <a:pPr algn="ctr"/>
+            <a:endParaRPr/>
           </a:p>
         </p:txBody>
       </p:sp>
@@ -17551,7 +17888,7 @@
           <a:noFill/>
         </p:spPr>
         <p:txBody>
-          <a:bodyPr wrap="square" lIns="0" rIns="0" tIns="0" bIns="0" anchor="t">
+          <a:bodyPr wrap="square" lIns="0" tIns="0" rIns="0" bIns="0" anchor="t">
             <a:spAutoFit/>
           </a:bodyPr>
           <a:lstStyle/>
@@ -17590,7 +17927,7 @@
           <a:noFill/>
         </p:spPr>
         <p:txBody>
-          <a:bodyPr wrap="square" lIns="0" rIns="0" tIns="0" bIns="0" anchor="t">
+          <a:bodyPr wrap="square" lIns="0" tIns="0" rIns="0" bIns="0" anchor="t">
             <a:spAutoFit/>
           </a:bodyPr>
           <a:lstStyle/>
@@ -17651,7 +17988,7 @@
           </a:fontRef>
         </p:style>
         <p:txBody>
-          <a:bodyPr rtlCol="0" anchor="ctr" lIns="0" rIns="0" tIns="0" bIns="0"/>
+          <a:bodyPr lIns="0" tIns="0" rIns="0" bIns="0" rtlCol="0" anchor="ctr"/>
           <a:lstStyle/>
           <a:p>
             <a:pPr algn="ctr"/>
@@ -17684,7 +18021,7 @@
           <a:noFill/>
         </p:spPr>
         <p:txBody>
-          <a:bodyPr wrap="square" lIns="0" rIns="0" tIns="0" bIns="0" anchor="t">
+          <a:bodyPr wrap="square" lIns="0" tIns="0" rIns="0" bIns="0" anchor="t">
             <a:spAutoFit/>
           </a:bodyPr>
           <a:lstStyle/>
@@ -17723,7 +18060,7 @@
           <a:noFill/>
         </p:spPr>
         <p:txBody>
-          <a:bodyPr wrap="square" lIns="0" rIns="0" tIns="0" bIns="0" anchor="t">
+          <a:bodyPr wrap="square" lIns="0" tIns="0" rIns="0" bIns="0" anchor="t">
             <a:spAutoFit/>
           </a:bodyPr>
           <a:lstStyle/>
@@ -17762,7 +18099,7 @@
           <a:noFill/>
         </p:spPr>
         <p:txBody>
-          <a:bodyPr wrap="square" lIns="0" rIns="0" tIns="0" bIns="0" anchor="t">
+          <a:bodyPr wrap="square" lIns="0" tIns="0" rIns="0" bIns="0" anchor="t">
             <a:spAutoFit/>
           </a:bodyPr>
           <a:lstStyle/>
@@ -17825,6 +18162,7 @@
           <a:lstStyle/>
           <a:p>
             <a:pPr algn="ctr"/>
+            <a:endParaRPr/>
           </a:p>
         </p:txBody>
       </p:sp>
@@ -17845,7 +18183,7 @@
           <a:noFill/>
         </p:spPr>
         <p:txBody>
-          <a:bodyPr wrap="square" lIns="0" rIns="0" tIns="0" bIns="0" anchor="t">
+          <a:bodyPr wrap="square" lIns="0" tIns="0" rIns="0" bIns="0" anchor="t">
             <a:spAutoFit/>
           </a:bodyPr>
           <a:lstStyle/>
@@ -17908,6 +18246,7 @@
           <a:lstStyle/>
           <a:p>
             <a:pPr algn="ctr"/>
+            <a:endParaRPr/>
           </a:p>
         </p:txBody>
       </p:sp>
@@ -17948,7 +18287,7 @@
           </a:fontRef>
         </p:style>
         <p:txBody>
-          <a:bodyPr rtlCol="0" anchor="ctr" lIns="0" rIns="0" tIns="0" bIns="0"/>
+          <a:bodyPr lIns="0" tIns="0" rIns="0" bIns="0" rtlCol="0" anchor="ctr"/>
           <a:lstStyle/>
           <a:p>
             <a:pPr algn="ctr"/>
@@ -18001,7 +18340,7 @@
           </a:fontRef>
         </p:style>
         <p:txBody>
-          <a:bodyPr rtlCol="0" anchor="ctr" lIns="0" rIns="0" tIns="0" bIns="0"/>
+          <a:bodyPr lIns="0" tIns="0" rIns="0" bIns="0" rtlCol="0" anchor="ctr"/>
           <a:lstStyle/>
           <a:p>
             <a:pPr algn="ctr"/>
@@ -18054,7 +18393,7 @@
           </a:fontRef>
         </p:style>
         <p:txBody>
-          <a:bodyPr rtlCol="0" anchor="ctr" lIns="0" rIns="0" tIns="0" bIns="0"/>
+          <a:bodyPr lIns="0" tIns="0" rIns="0" bIns="0" rtlCol="0" anchor="ctr"/>
           <a:lstStyle/>
           <a:p>
             <a:pPr algn="ctr"/>
@@ -18107,7 +18446,7 @@
           </a:fontRef>
         </p:style>
         <p:txBody>
-          <a:bodyPr rtlCol="0" anchor="ctr" lIns="0" rIns="0" tIns="0" bIns="0"/>
+          <a:bodyPr lIns="0" tIns="0" rIns="0" bIns="0" rtlCol="0" anchor="ctr"/>
           <a:lstStyle/>
           <a:p>
             <a:pPr algn="ctr"/>
@@ -18160,7 +18499,7 @@
           </a:fontRef>
         </p:style>
         <p:txBody>
-          <a:bodyPr rtlCol="0" anchor="ctr" lIns="0" rIns="0" tIns="0" bIns="0"/>
+          <a:bodyPr lIns="0" tIns="0" rIns="0" bIns="0" rtlCol="0" anchor="ctr"/>
           <a:lstStyle/>
           <a:p>
             <a:pPr algn="ctr"/>
@@ -18213,7 +18552,7 @@
           </a:fontRef>
         </p:style>
         <p:txBody>
-          <a:bodyPr rtlCol="0" anchor="ctr" lIns="0" rIns="0" tIns="0" bIns="0"/>
+          <a:bodyPr lIns="0" tIns="0" rIns="0" bIns="0" rtlCol="0" anchor="ctr"/>
           <a:lstStyle/>
           <a:p>
             <a:pPr algn="ctr"/>
@@ -18266,7 +18605,7 @@
           </a:fontRef>
         </p:style>
         <p:txBody>
-          <a:bodyPr rtlCol="0" anchor="ctr" lIns="0" rIns="0" tIns="0" bIns="0"/>
+          <a:bodyPr lIns="0" tIns="0" rIns="0" bIns="0" rtlCol="0" anchor="ctr"/>
           <a:lstStyle/>
           <a:p>
             <a:pPr algn="ctr"/>
@@ -18321,7 +18660,7 @@
           </a:fontRef>
         </p:style>
         <p:txBody>
-          <a:bodyPr rtlCol="0" anchor="ctr" rIns="0" tIns="0" bIns="0"/>
+          <a:bodyPr tIns="0" rIns="0" bIns="0" rtlCol="0" anchor="ctr"/>
           <a:lstStyle/>
           <a:p>
             <a:pPr algn="ctr"/>
@@ -18378,6 +18717,7 @@
           <a:lstStyle/>
           <a:p>
             <a:pPr algn="ctr"/>
+            <a:endParaRPr/>
           </a:p>
         </p:txBody>
       </p:sp>
@@ -18422,6 +18762,7 @@
           <a:lstStyle/>
           <a:p>
             <a:pPr algn="ctr"/>
+            <a:endParaRPr/>
           </a:p>
         </p:txBody>
       </p:sp>
@@ -18466,6 +18807,7 @@
           <a:lstStyle/>
           <a:p>
             <a:pPr algn="ctr"/>
+            <a:endParaRPr/>
           </a:p>
         </p:txBody>
       </p:sp>
@@ -18534,6 +18876,7 @@
           <a:lstStyle/>
           <a:p>
             <a:pPr algn="ctr"/>
+            <a:endParaRPr/>
           </a:p>
         </p:txBody>
       </p:sp>
@@ -18554,7 +18897,7 @@
           <a:noFill/>
         </p:spPr>
         <p:txBody>
-          <a:bodyPr wrap="square" lIns="0" rIns="0" tIns="0" bIns="0" anchor="t">
+          <a:bodyPr wrap="square" lIns="0" tIns="0" rIns="0" bIns="0" anchor="t">
             <a:spAutoFit/>
           </a:bodyPr>
           <a:lstStyle/>
@@ -18593,7 +18936,7 @@
           <a:noFill/>
         </p:spPr>
         <p:txBody>
-          <a:bodyPr wrap="square" lIns="0" rIns="0" tIns="0" bIns="0" anchor="t">
+          <a:bodyPr wrap="square" lIns="0" tIns="0" rIns="0" bIns="0" anchor="t">
             <a:spAutoFit/>
           </a:bodyPr>
           <a:lstStyle/>
@@ -18656,6 +18999,7 @@
           <a:lstStyle/>
           <a:p>
             <a:pPr algn="ctr"/>
+            <a:endParaRPr/>
           </a:p>
         </p:txBody>
       </p:sp>
@@ -18676,7 +19020,7 @@
           <a:noFill/>
         </p:spPr>
         <p:txBody>
-          <a:bodyPr wrap="square" lIns="0" rIns="0" tIns="0" bIns="0" anchor="t">
+          <a:bodyPr wrap="square" lIns="0" tIns="0" rIns="0" bIns="0" anchor="t">
             <a:spAutoFit/>
           </a:bodyPr>
           <a:lstStyle/>
@@ -18739,6 +19083,7 @@
           <a:lstStyle/>
           <a:p>
             <a:pPr algn="ctr"/>
+            <a:endParaRPr/>
           </a:p>
         </p:txBody>
       </p:sp>
@@ -18759,7 +19104,7 @@
           <a:noFill/>
         </p:spPr>
         <p:txBody>
-          <a:bodyPr wrap="square" lIns="0" rIns="0" tIns="0" bIns="0" anchor="t">
+          <a:bodyPr wrap="square" lIns="0" tIns="0" rIns="0" bIns="0" anchor="t">
             <a:spAutoFit/>
           </a:bodyPr>
           <a:lstStyle/>
@@ -18822,6 +19167,7 @@
           <a:lstStyle/>
           <a:p>
             <a:pPr algn="ctr"/>
+            <a:endParaRPr/>
           </a:p>
         </p:txBody>
       </p:sp>
@@ -18842,7 +19188,7 @@
           <a:noFill/>
         </p:spPr>
         <p:txBody>
-          <a:bodyPr wrap="square" lIns="0" rIns="0" tIns="0" bIns="0" anchor="t">
+          <a:bodyPr wrap="square" lIns="0" tIns="0" rIns="0" bIns="0" anchor="t">
             <a:spAutoFit/>
           </a:bodyPr>
           <a:lstStyle/>
@@ -18905,6 +19251,7 @@
           <a:lstStyle/>
           <a:p>
             <a:pPr algn="ctr"/>
+            <a:endParaRPr/>
           </a:p>
         </p:txBody>
       </p:sp>
@@ -18925,7 +19272,7 @@
           <a:noFill/>
         </p:spPr>
         <p:txBody>
-          <a:bodyPr wrap="square" lIns="0" rIns="0" tIns="0" bIns="0" anchor="t">
+          <a:bodyPr wrap="square" lIns="0" tIns="0" rIns="0" bIns="0" anchor="t">
             <a:spAutoFit/>
           </a:bodyPr>
           <a:lstStyle/>
@@ -18988,6 +19335,7 @@
           <a:lstStyle/>
           <a:p>
             <a:pPr algn="ctr"/>
+            <a:endParaRPr/>
           </a:p>
         </p:txBody>
       </p:sp>
@@ -19008,7 +19356,7 @@
           <a:noFill/>
         </p:spPr>
         <p:txBody>
-          <a:bodyPr wrap="square" lIns="0" rIns="0" tIns="0" bIns="0" anchor="t">
+          <a:bodyPr wrap="square" lIns="0" tIns="0" rIns="0" bIns="0" anchor="t">
             <a:spAutoFit/>
           </a:bodyPr>
           <a:lstStyle/>
@@ -19071,6 +19419,7 @@
           <a:lstStyle/>
           <a:p>
             <a:pPr algn="ctr"/>
+            <a:endParaRPr/>
           </a:p>
         </p:txBody>
       </p:sp>
@@ -19091,7 +19440,7 @@
           <a:noFill/>
         </p:spPr>
         <p:txBody>
-          <a:bodyPr wrap="square" lIns="0" rIns="0" tIns="0" bIns="0" anchor="t">
+          <a:bodyPr wrap="square" lIns="0" tIns="0" rIns="0" bIns="0" anchor="t">
             <a:spAutoFit/>
           </a:bodyPr>
           <a:lstStyle/>
@@ -19130,7 +19479,7 @@
           <a:noFill/>
         </p:spPr>
         <p:txBody>
-          <a:bodyPr wrap="square" lIns="0" rIns="0" tIns="0" bIns="0" anchor="t">
+          <a:bodyPr wrap="square" lIns="0" tIns="0" rIns="0" bIns="0" anchor="t">
             <a:spAutoFit/>
           </a:bodyPr>
           <a:lstStyle/>
@@ -19161,7 +19510,7 @@
 </file>
 
 <file path=ppt/slides/slide4.xml><?xml version="1.0" encoding="utf-8"?>
-<p:sld xmlns:a="http://schemas.openxmlformats.org/drawingml/2006/main" xmlns:p="http://schemas.openxmlformats.org/presentationml/2006/main" xmlns:r="http://schemas.openxmlformats.org/officeDocument/2006/relationships">
+<p:sld xmlns:a="http://schemas.openxmlformats.org/drawingml/2006/main" xmlns:r="http://schemas.openxmlformats.org/officeDocument/2006/relationships" xmlns:p="http://schemas.openxmlformats.org/presentationml/2006/main">
   <p:cSld>
     <p:bg>
       <p:bgPr>
@@ -19177,7 +19526,14 @@
         <p:cNvGrpSpPr/>
         <p:nvPr/>
       </p:nvGrpSpPr>
-      <p:grpSpPr/>
+      <p:grpSpPr>
+        <a:xfrm>
+          <a:off x="0" y="0"/>
+          <a:ext cx="0" cy="0"/>
+          <a:chOff x="0" y="0"/>
+          <a:chExt cx="0" cy="0"/>
+        </a:xfrm>
+      </p:grpSpPr>
       <p:sp>
         <p:nvSpPr>
           <p:cNvPr id="2" name="Rectangle 1"/>
@@ -19219,6 +19575,7 @@
           <a:lstStyle/>
           <a:p>
             <a:pPr algn="ctr"/>
+            <a:endParaRPr/>
           </a:p>
         </p:txBody>
       </p:sp>
@@ -19239,7 +19596,7 @@
           <a:noFill/>
         </p:spPr>
         <p:txBody>
-          <a:bodyPr wrap="square" lIns="0" rIns="0" tIns="0" bIns="0" anchor="t">
+          <a:bodyPr wrap="square" lIns="0" tIns="0" rIns="0" bIns="0" anchor="t">
             <a:spAutoFit/>
           </a:bodyPr>
           <a:lstStyle/>
@@ -19278,7 +19635,7 @@
           <a:noFill/>
         </p:spPr>
         <p:txBody>
-          <a:bodyPr wrap="square" lIns="0" rIns="0" tIns="0" bIns="0" anchor="t">
+          <a:bodyPr wrap="square" lIns="0" tIns="0" rIns="0" bIns="0" anchor="t">
             <a:spAutoFit/>
           </a:bodyPr>
           <a:lstStyle/>
@@ -19365,6 +19722,7 @@
           <a:lstStyle/>
           <a:p>
             <a:pPr algn="ctr"/>
+            <a:endParaRPr/>
           </a:p>
         </p:txBody>
       </p:sp>
@@ -19385,7 +19743,7 @@
           <a:noFill/>
         </p:spPr>
         <p:txBody>
-          <a:bodyPr wrap="square" lIns="0" rIns="0" tIns="0" bIns="0" anchor="t">
+          <a:bodyPr wrap="square" lIns="0" tIns="0" rIns="0" bIns="0" anchor="t">
             <a:spAutoFit/>
           </a:bodyPr>
           <a:lstStyle/>
@@ -19424,7 +19782,7 @@
           <a:noFill/>
         </p:spPr>
         <p:txBody>
-          <a:bodyPr wrap="square" lIns="0" rIns="0" tIns="0" bIns="0" anchor="t">
+          <a:bodyPr wrap="square" lIns="0" tIns="0" rIns="0" bIns="0" anchor="t">
             <a:spAutoFit/>
           </a:bodyPr>
           <a:lstStyle/>
@@ -19489,6 +19847,7 @@
           <a:lstStyle/>
           <a:p>
             <a:pPr algn="ctr"/>
+            <a:endParaRPr/>
           </a:p>
         </p:txBody>
       </p:sp>
@@ -19533,6 +19892,7 @@
           <a:lstStyle/>
           <a:p>
             <a:pPr algn="ctr"/>
+            <a:endParaRPr/>
           </a:p>
         </p:txBody>
       </p:sp>
@@ -19553,7 +19913,7 @@
           <a:noFill/>
         </p:spPr>
         <p:txBody>
-          <a:bodyPr wrap="square" lIns="0" rIns="0" tIns="0" bIns="0" anchor="t">
+          <a:bodyPr wrap="square" lIns="0" tIns="0" rIns="0" bIns="0" anchor="t">
             <a:spAutoFit/>
           </a:bodyPr>
           <a:lstStyle/>
@@ -19592,7 +19952,7 @@
           <a:noFill/>
         </p:spPr>
         <p:txBody>
-          <a:bodyPr wrap="square" lIns="0" rIns="0" tIns="0" bIns="0" anchor="t">
+          <a:bodyPr wrap="square" lIns="0" tIns="0" rIns="0" bIns="0" anchor="t">
             <a:spAutoFit/>
           </a:bodyPr>
           <a:lstStyle/>
@@ -19631,7 +19991,7 @@
           <a:noFill/>
         </p:spPr>
         <p:txBody>
-          <a:bodyPr wrap="square" lIns="0" rIns="0" tIns="0" bIns="0" anchor="t">
+          <a:bodyPr wrap="square" lIns="0" tIns="0" rIns="0" bIns="0" anchor="t">
             <a:spAutoFit/>
           </a:bodyPr>
           <a:lstStyle/>
@@ -19696,6 +20056,7 @@
           <a:lstStyle/>
           <a:p>
             <a:pPr algn="ctr"/>
+            <a:endParaRPr/>
           </a:p>
         </p:txBody>
       </p:sp>
@@ -19740,6 +20101,7 @@
           <a:lstStyle/>
           <a:p>
             <a:pPr algn="ctr"/>
+            <a:endParaRPr/>
           </a:p>
         </p:txBody>
       </p:sp>
@@ -19760,7 +20122,7 @@
           <a:noFill/>
         </p:spPr>
         <p:txBody>
-          <a:bodyPr wrap="square" lIns="0" rIns="0" tIns="0" bIns="0" anchor="t">
+          <a:bodyPr wrap="square" lIns="0" tIns="0" rIns="0" bIns="0" anchor="t">
             <a:spAutoFit/>
           </a:bodyPr>
           <a:lstStyle/>
@@ -19799,7 +20161,7 @@
           <a:noFill/>
         </p:spPr>
         <p:txBody>
-          <a:bodyPr wrap="square" lIns="0" rIns="0" tIns="0" bIns="0" anchor="t">
+          <a:bodyPr wrap="square" lIns="0" tIns="0" rIns="0" bIns="0" anchor="t">
             <a:spAutoFit/>
           </a:bodyPr>
           <a:lstStyle/>
@@ -19838,7 +20200,7 @@
           <a:noFill/>
         </p:spPr>
         <p:txBody>
-          <a:bodyPr wrap="square" lIns="0" rIns="0" tIns="0" bIns="0" anchor="t">
+          <a:bodyPr wrap="square" lIns="0" tIns="0" rIns="0" bIns="0" anchor="t">
             <a:spAutoFit/>
           </a:bodyPr>
           <a:lstStyle/>
@@ -19903,6 +20265,7 @@
           <a:lstStyle/>
           <a:p>
             <a:pPr algn="ctr"/>
+            <a:endParaRPr/>
           </a:p>
         </p:txBody>
       </p:sp>
@@ -19947,6 +20310,7 @@
           <a:lstStyle/>
           <a:p>
             <a:pPr algn="ctr"/>
+            <a:endParaRPr/>
           </a:p>
         </p:txBody>
       </p:sp>
@@ -19967,7 +20331,7 @@
           <a:noFill/>
         </p:spPr>
         <p:txBody>
-          <a:bodyPr wrap="square" lIns="0" rIns="0" tIns="0" bIns="0" anchor="t">
+          <a:bodyPr wrap="square" lIns="0" tIns="0" rIns="0" bIns="0" anchor="t">
             <a:spAutoFit/>
           </a:bodyPr>
           <a:lstStyle/>
@@ -20006,7 +20370,7 @@
           <a:noFill/>
         </p:spPr>
         <p:txBody>
-          <a:bodyPr wrap="square" lIns="0" rIns="0" tIns="0" bIns="0" anchor="t">
+          <a:bodyPr wrap="square" lIns="0" tIns="0" rIns="0" bIns="0" anchor="t">
             <a:spAutoFit/>
           </a:bodyPr>
           <a:lstStyle/>
@@ -20045,7 +20409,7 @@
           <a:noFill/>
         </p:spPr>
         <p:txBody>
-          <a:bodyPr wrap="square" lIns="0" rIns="0" tIns="0" bIns="0" anchor="t">
+          <a:bodyPr wrap="square" lIns="0" tIns="0" rIns="0" bIns="0" anchor="t">
             <a:spAutoFit/>
           </a:bodyPr>
           <a:lstStyle/>
@@ -20110,6 +20474,7 @@
           <a:lstStyle/>
           <a:p>
             <a:pPr algn="ctr"/>
+            <a:endParaRPr/>
           </a:p>
         </p:txBody>
       </p:sp>
@@ -20154,6 +20519,7 @@
           <a:lstStyle/>
           <a:p>
             <a:pPr algn="ctr"/>
+            <a:endParaRPr/>
           </a:p>
         </p:txBody>
       </p:sp>
@@ -20174,7 +20540,7 @@
           <a:noFill/>
         </p:spPr>
         <p:txBody>
-          <a:bodyPr wrap="square" lIns="0" rIns="0" tIns="0" bIns="0" anchor="t">
+          <a:bodyPr wrap="square" lIns="0" tIns="0" rIns="0" bIns="0" anchor="t">
             <a:spAutoFit/>
           </a:bodyPr>
           <a:lstStyle/>
@@ -20213,7 +20579,7 @@
           <a:noFill/>
         </p:spPr>
         <p:txBody>
-          <a:bodyPr wrap="square" lIns="0" rIns="0" tIns="0" bIns="0" anchor="t">
+          <a:bodyPr wrap="square" lIns="0" tIns="0" rIns="0" bIns="0" anchor="t">
             <a:spAutoFit/>
           </a:bodyPr>
           <a:lstStyle/>
@@ -20252,7 +20618,7 @@
           <a:noFill/>
         </p:spPr>
         <p:txBody>
-          <a:bodyPr wrap="square" lIns="0" rIns="0" tIns="0" bIns="0" anchor="t">
+          <a:bodyPr wrap="square" lIns="0" tIns="0" rIns="0" bIns="0" anchor="t">
             <a:spAutoFit/>
           </a:bodyPr>
           <a:lstStyle/>
@@ -20317,6 +20683,7 @@
           <a:lstStyle/>
           <a:p>
             <a:pPr algn="ctr"/>
+            <a:endParaRPr/>
           </a:p>
         </p:txBody>
       </p:sp>
@@ -20361,6 +20728,7 @@
           <a:lstStyle/>
           <a:p>
             <a:pPr algn="ctr"/>
+            <a:endParaRPr/>
           </a:p>
         </p:txBody>
       </p:sp>
@@ -20381,7 +20749,7 @@
           <a:noFill/>
         </p:spPr>
         <p:txBody>
-          <a:bodyPr wrap="square" lIns="0" rIns="0" tIns="0" bIns="0" anchor="t">
+          <a:bodyPr wrap="square" lIns="0" tIns="0" rIns="0" bIns="0" anchor="t">
             <a:spAutoFit/>
           </a:bodyPr>
           <a:lstStyle/>
@@ -20420,7 +20788,7 @@
           <a:noFill/>
         </p:spPr>
         <p:txBody>
-          <a:bodyPr wrap="square" lIns="0" rIns="0" tIns="0" bIns="0" anchor="t">
+          <a:bodyPr wrap="square" lIns="0" tIns="0" rIns="0" bIns="0" anchor="t">
             <a:spAutoFit/>
           </a:bodyPr>
           <a:lstStyle/>
@@ -20459,7 +20827,7 @@
           <a:noFill/>
         </p:spPr>
         <p:txBody>
-          <a:bodyPr wrap="square" lIns="0" rIns="0" tIns="0" bIns="0" anchor="t">
+          <a:bodyPr wrap="square" lIns="0" tIns="0" rIns="0" bIns="0" anchor="t">
             <a:spAutoFit/>
           </a:bodyPr>
           <a:lstStyle/>
@@ -20524,6 +20892,7 @@
           <a:lstStyle/>
           <a:p>
             <a:pPr algn="ctr"/>
+            <a:endParaRPr/>
           </a:p>
         </p:txBody>
       </p:sp>
@@ -20568,6 +20937,7 @@
           <a:lstStyle/>
           <a:p>
             <a:pPr algn="ctr"/>
+            <a:endParaRPr/>
           </a:p>
         </p:txBody>
       </p:sp>
@@ -20588,7 +20958,7 @@
           <a:noFill/>
         </p:spPr>
         <p:txBody>
-          <a:bodyPr wrap="square" lIns="0" rIns="0" tIns="0" bIns="0" anchor="t">
+          <a:bodyPr wrap="square" lIns="0" tIns="0" rIns="0" bIns="0" anchor="t">
             <a:spAutoFit/>
           </a:bodyPr>
           <a:lstStyle/>
@@ -20627,7 +20997,7 @@
           <a:noFill/>
         </p:spPr>
         <p:txBody>
-          <a:bodyPr wrap="square" lIns="0" rIns="0" tIns="0" bIns="0" anchor="t">
+          <a:bodyPr wrap="square" lIns="0" tIns="0" rIns="0" bIns="0" anchor="t">
             <a:spAutoFit/>
           </a:bodyPr>
           <a:lstStyle/>
@@ -20666,7 +21036,7 @@
           <a:noFill/>
         </p:spPr>
         <p:txBody>
-          <a:bodyPr wrap="square" lIns="0" rIns="0" tIns="0" bIns="0" anchor="t">
+          <a:bodyPr wrap="square" lIns="0" tIns="0" rIns="0" bIns="0" anchor="t">
             <a:spAutoFit/>
           </a:bodyPr>
           <a:lstStyle/>
@@ -20731,6 +21101,7 @@
           <a:lstStyle/>
           <a:p>
             <a:pPr algn="ctr"/>
+            <a:endParaRPr/>
           </a:p>
         </p:txBody>
       </p:sp>
@@ -20775,6 +21146,7 @@
           <a:lstStyle/>
           <a:p>
             <a:pPr algn="ctr"/>
+            <a:endParaRPr/>
           </a:p>
         </p:txBody>
       </p:sp>
@@ -20795,7 +21167,7 @@
           <a:noFill/>
         </p:spPr>
         <p:txBody>
-          <a:bodyPr wrap="square" lIns="0" rIns="0" tIns="0" bIns="0" anchor="t">
+          <a:bodyPr wrap="square" lIns="0" tIns="0" rIns="0" bIns="0" anchor="t">
             <a:spAutoFit/>
           </a:bodyPr>
           <a:lstStyle/>
@@ -20834,7 +21206,7 @@
           <a:noFill/>
         </p:spPr>
         <p:txBody>
-          <a:bodyPr wrap="square" lIns="0" rIns="0" tIns="0" bIns="0" anchor="t">
+          <a:bodyPr wrap="square" lIns="0" tIns="0" rIns="0" bIns="0" anchor="t">
             <a:spAutoFit/>
           </a:bodyPr>
           <a:lstStyle/>
@@ -20873,7 +21245,7 @@
           <a:noFill/>
         </p:spPr>
         <p:txBody>
-          <a:bodyPr wrap="square" lIns="0" rIns="0" tIns="0" bIns="0" anchor="t">
+          <a:bodyPr wrap="square" lIns="0" tIns="0" rIns="0" bIns="0" anchor="t">
             <a:spAutoFit/>
           </a:bodyPr>
           <a:lstStyle/>
@@ -20938,6 +21310,7 @@
           <a:lstStyle/>
           <a:p>
             <a:pPr algn="ctr"/>
+            <a:endParaRPr/>
           </a:p>
         </p:txBody>
       </p:sp>
@@ -20982,6 +21355,7 @@
           <a:lstStyle/>
           <a:p>
             <a:pPr algn="ctr"/>
+            <a:endParaRPr/>
           </a:p>
         </p:txBody>
       </p:sp>
@@ -21002,7 +21376,7 @@
           <a:noFill/>
         </p:spPr>
         <p:txBody>
-          <a:bodyPr wrap="square" lIns="0" rIns="0" tIns="0" bIns="0" anchor="t">
+          <a:bodyPr wrap="square" lIns="0" tIns="0" rIns="0" bIns="0" anchor="t">
             <a:spAutoFit/>
           </a:bodyPr>
           <a:lstStyle/>
@@ -21041,7 +21415,7 @@
           <a:noFill/>
         </p:spPr>
         <p:txBody>
-          <a:bodyPr wrap="square" lIns="0" rIns="0" tIns="0" bIns="0" anchor="t">
+          <a:bodyPr wrap="square" lIns="0" tIns="0" rIns="0" bIns="0" anchor="t">
             <a:spAutoFit/>
           </a:bodyPr>
           <a:lstStyle/>
@@ -21080,7 +21454,7 @@
           <a:noFill/>
         </p:spPr>
         <p:txBody>
-          <a:bodyPr wrap="square" lIns="0" rIns="0" tIns="0" bIns="0" anchor="t">
+          <a:bodyPr wrap="square" lIns="0" tIns="0" rIns="0" bIns="0" anchor="t">
             <a:spAutoFit/>
           </a:bodyPr>
           <a:lstStyle/>
@@ -21145,6 +21519,7 @@
           <a:lstStyle/>
           <a:p>
             <a:pPr algn="ctr"/>
+            <a:endParaRPr/>
           </a:p>
         </p:txBody>
       </p:sp>
@@ -21189,6 +21564,7 @@
           <a:lstStyle/>
           <a:p>
             <a:pPr algn="ctr"/>
+            <a:endParaRPr/>
           </a:p>
         </p:txBody>
       </p:sp>
@@ -21209,7 +21585,7 @@
           <a:noFill/>
         </p:spPr>
         <p:txBody>
-          <a:bodyPr wrap="square" lIns="0" rIns="0" tIns="0" bIns="0" anchor="t">
+          <a:bodyPr wrap="square" lIns="0" tIns="0" rIns="0" bIns="0" anchor="t">
             <a:spAutoFit/>
           </a:bodyPr>
           <a:lstStyle/>
@@ -21248,7 +21624,7 @@
           <a:noFill/>
         </p:spPr>
         <p:txBody>
-          <a:bodyPr wrap="square" lIns="0" rIns="0" tIns="0" bIns="0" anchor="t">
+          <a:bodyPr wrap="square" lIns="0" tIns="0" rIns="0" bIns="0" anchor="t">
             <a:spAutoFit/>
           </a:bodyPr>
           <a:lstStyle/>
@@ -21287,7 +21663,7 @@
           <a:noFill/>
         </p:spPr>
         <p:txBody>
-          <a:bodyPr wrap="square" lIns="0" rIns="0" tIns="0" bIns="0" anchor="t">
+          <a:bodyPr wrap="square" lIns="0" tIns="0" rIns="0" bIns="0" anchor="t">
             <a:spAutoFit/>
           </a:bodyPr>
           <a:lstStyle/>
@@ -21352,6 +21728,7 @@
           <a:lstStyle/>
           <a:p>
             <a:pPr algn="ctr"/>
+            <a:endParaRPr/>
           </a:p>
         </p:txBody>
       </p:sp>
@@ -21396,6 +21773,7 @@
           <a:lstStyle/>
           <a:p>
             <a:pPr algn="ctr"/>
+            <a:endParaRPr/>
           </a:p>
         </p:txBody>
       </p:sp>
@@ -21416,7 +21794,7 @@
           <a:noFill/>
         </p:spPr>
         <p:txBody>
-          <a:bodyPr wrap="square" lIns="0" rIns="0" tIns="0" bIns="0" anchor="t">
+          <a:bodyPr wrap="square" lIns="0" tIns="0" rIns="0" bIns="0" anchor="t">
             <a:spAutoFit/>
           </a:bodyPr>
           <a:lstStyle/>
@@ -21455,7 +21833,7 @@
           <a:noFill/>
         </p:spPr>
         <p:txBody>
-          <a:bodyPr wrap="square" lIns="0" rIns="0" tIns="0" bIns="0" anchor="t">
+          <a:bodyPr wrap="square" lIns="0" tIns="0" rIns="0" bIns="0" anchor="t">
             <a:spAutoFit/>
           </a:bodyPr>
           <a:lstStyle/>
@@ -21494,7 +21872,7 @@
           <a:noFill/>
         </p:spPr>
         <p:txBody>
-          <a:bodyPr wrap="square" lIns="0" rIns="0" tIns="0" bIns="0" anchor="t">
+          <a:bodyPr wrap="square" lIns="0" tIns="0" rIns="0" bIns="0" anchor="t">
             <a:spAutoFit/>
           </a:bodyPr>
           <a:lstStyle/>
@@ -21559,6 +21937,7 @@
           <a:lstStyle/>
           <a:p>
             <a:pPr algn="ctr"/>
+            <a:endParaRPr/>
           </a:p>
         </p:txBody>
       </p:sp>
@@ -21603,6 +21982,7 @@
           <a:lstStyle/>
           <a:p>
             <a:pPr algn="ctr"/>
+            <a:endParaRPr/>
           </a:p>
         </p:txBody>
       </p:sp>
@@ -21623,7 +22003,7 @@
           <a:noFill/>
         </p:spPr>
         <p:txBody>
-          <a:bodyPr wrap="square" lIns="0" rIns="0" tIns="0" bIns="0" anchor="t">
+          <a:bodyPr wrap="square" lIns="0" tIns="0" rIns="0" bIns="0" anchor="t">
             <a:spAutoFit/>
           </a:bodyPr>
           <a:lstStyle/>
@@ -21662,7 +22042,7 @@
           <a:noFill/>
         </p:spPr>
         <p:txBody>
-          <a:bodyPr wrap="square" lIns="0" rIns="0" tIns="0" bIns="0" anchor="t">
+          <a:bodyPr wrap="square" lIns="0" tIns="0" rIns="0" bIns="0" anchor="t">
             <a:spAutoFit/>
           </a:bodyPr>
           <a:lstStyle/>
@@ -21701,7 +22081,7 @@
           <a:noFill/>
         </p:spPr>
         <p:txBody>
-          <a:bodyPr wrap="square" lIns="0" rIns="0" tIns="0" bIns="0" anchor="t">
+          <a:bodyPr wrap="square" lIns="0" tIns="0" rIns="0" bIns="0" anchor="t">
             <a:spAutoFit/>
           </a:bodyPr>
           <a:lstStyle/>
@@ -21764,6 +22144,7 @@
           <a:lstStyle/>
           <a:p>
             <a:pPr algn="ctr"/>
+            <a:endParaRPr/>
           </a:p>
         </p:txBody>
       </p:sp>
@@ -21784,7 +22165,7 @@
           <a:noFill/>
         </p:spPr>
         <p:txBody>
-          <a:bodyPr wrap="square" lIns="0" rIns="0" tIns="0" bIns="0" anchor="t">
+          <a:bodyPr wrap="square" lIns="0" tIns="0" rIns="0" bIns="0" anchor="t">
             <a:spAutoFit/>
           </a:bodyPr>
           <a:lstStyle/>
@@ -21823,7 +22204,7 @@
           <a:noFill/>
         </p:spPr>
         <p:txBody>
-          <a:bodyPr wrap="square" lIns="0" rIns="0" tIns="0" bIns="0" anchor="t">
+          <a:bodyPr wrap="square" lIns="0" tIns="0" rIns="0" bIns="0" anchor="t">
             <a:spAutoFit/>
           </a:bodyPr>
           <a:lstStyle/>
@@ -21854,7 +22235,7 @@
 </file>
 
 <file path=ppt/slides/slide5.xml><?xml version="1.0" encoding="utf-8"?>
-<p:sld xmlns:a="http://schemas.openxmlformats.org/drawingml/2006/main" xmlns:p="http://schemas.openxmlformats.org/presentationml/2006/main" xmlns:r="http://schemas.openxmlformats.org/officeDocument/2006/relationships">
+<p:sld xmlns:a="http://schemas.openxmlformats.org/drawingml/2006/main" xmlns:r="http://schemas.openxmlformats.org/officeDocument/2006/relationships" xmlns:p="http://schemas.openxmlformats.org/presentationml/2006/main">
   <p:cSld>
     <p:bg>
       <p:bgPr>
@@ -21870,7 +22251,14 @@
         <p:cNvGrpSpPr/>
         <p:nvPr/>
       </p:nvGrpSpPr>
-      <p:grpSpPr/>
+      <p:grpSpPr>
+        <a:xfrm>
+          <a:off x="0" y="0"/>
+          <a:ext cx="0" cy="0"/>
+          <a:chOff x="0" y="0"/>
+          <a:chExt cx="0" cy="0"/>
+        </a:xfrm>
+      </p:grpSpPr>
       <p:sp>
         <p:nvSpPr>
           <p:cNvPr id="2" name="Rectangle 1"/>
@@ -21912,6 +22300,7 @@
           <a:lstStyle/>
           <a:p>
             <a:pPr algn="ctr"/>
+            <a:endParaRPr/>
           </a:p>
         </p:txBody>
       </p:sp>
@@ -21932,7 +22321,7 @@
           <a:noFill/>
         </p:spPr>
         <p:txBody>
-          <a:bodyPr wrap="square" lIns="0" rIns="0" tIns="0" bIns="0" anchor="t">
+          <a:bodyPr wrap="square" lIns="0" tIns="0" rIns="0" bIns="0" anchor="t">
             <a:spAutoFit/>
           </a:bodyPr>
           <a:lstStyle/>
@@ -21971,7 +22360,7 @@
           <a:noFill/>
         </p:spPr>
         <p:txBody>
-          <a:bodyPr wrap="square" lIns="0" rIns="0" tIns="0" bIns="0" anchor="t">
+          <a:bodyPr wrap="square" lIns="0" tIns="0" rIns="0" bIns="0" anchor="t">
             <a:spAutoFit/>
           </a:bodyPr>
           <a:lstStyle/>
@@ -22032,7 +22421,7 @@
           </a:fontRef>
         </p:style>
         <p:txBody>
-          <a:bodyPr rtlCol="0" anchor="ctr" lIns="0" rIns="0" tIns="0" bIns="0"/>
+          <a:bodyPr lIns="0" tIns="0" rIns="0" bIns="0" rtlCol="0" anchor="ctr"/>
           <a:lstStyle/>
           <a:p>
             <a:pPr algn="ctr"/>
@@ -22065,7 +22454,7 @@
           <a:noFill/>
         </p:spPr>
         <p:txBody>
-          <a:bodyPr wrap="square" lIns="0" rIns="0" tIns="0" bIns="0" anchor="t">
+          <a:bodyPr wrap="square" lIns="0" tIns="0" rIns="0" bIns="0" anchor="t">
             <a:spAutoFit/>
           </a:bodyPr>
           <a:lstStyle/>
@@ -22104,7 +22493,7 @@
           <a:noFill/>
         </p:spPr>
         <p:txBody>
-          <a:bodyPr wrap="square" lIns="0" rIns="0" tIns="0" bIns="0" anchor="t">
+          <a:bodyPr wrap="square" lIns="0" tIns="0" rIns="0" bIns="0" anchor="t">
             <a:spAutoFit/>
           </a:bodyPr>
           <a:lstStyle/>
@@ -22143,7 +22532,7 @@
           <a:noFill/>
         </p:spPr>
         <p:txBody>
-          <a:bodyPr wrap="square" lIns="0" rIns="0" tIns="0" bIns="0" anchor="t">
+          <a:bodyPr wrap="square" lIns="0" tIns="0" rIns="0" bIns="0" anchor="t">
             <a:spAutoFit/>
           </a:bodyPr>
           <a:lstStyle/>
@@ -22206,6 +22595,7 @@
           <a:lstStyle/>
           <a:p>
             <a:pPr algn="ctr"/>
+            <a:endParaRPr/>
           </a:p>
         </p:txBody>
       </p:sp>
@@ -22226,7 +22616,7 @@
           <a:noFill/>
         </p:spPr>
         <p:txBody>
-          <a:bodyPr wrap="square" lIns="0" rIns="0" tIns="0" bIns="0" anchor="t">
+          <a:bodyPr wrap="square" lIns="0" tIns="0" rIns="0" bIns="0" anchor="t">
             <a:spAutoFit/>
           </a:bodyPr>
           <a:lstStyle/>
@@ -22289,6 +22679,7 @@
           <a:lstStyle/>
           <a:p>
             <a:pPr algn="ctr"/>
+            <a:endParaRPr/>
           </a:p>
         </p:txBody>
       </p:sp>
@@ -22329,7 +22720,7 @@
           </a:fontRef>
         </p:style>
         <p:txBody>
-          <a:bodyPr rtlCol="0" anchor="ctr" lIns="0" rIns="0" tIns="0" bIns="0"/>
+          <a:bodyPr lIns="0" tIns="0" rIns="0" bIns="0" rtlCol="0" anchor="ctr"/>
           <a:lstStyle/>
           <a:p>
             <a:pPr algn="ctr"/>
@@ -22382,7 +22773,7 @@
           </a:fontRef>
         </p:style>
         <p:txBody>
-          <a:bodyPr rtlCol="0" anchor="ctr" lIns="0" rIns="0" tIns="0" bIns="0"/>
+          <a:bodyPr lIns="0" tIns="0" rIns="0" bIns="0" rtlCol="0" anchor="ctr"/>
           <a:lstStyle/>
           <a:p>
             <a:pPr algn="ctr"/>
@@ -22435,7 +22826,7 @@
           </a:fontRef>
         </p:style>
         <p:txBody>
-          <a:bodyPr rtlCol="0" anchor="ctr" lIns="0" rIns="0" tIns="0" bIns="0"/>
+          <a:bodyPr lIns="0" tIns="0" rIns="0" bIns="0" rtlCol="0" anchor="ctr"/>
           <a:lstStyle/>
           <a:p>
             <a:pPr algn="ctr"/>
@@ -22488,7 +22879,7 @@
           </a:fontRef>
         </p:style>
         <p:txBody>
-          <a:bodyPr rtlCol="0" anchor="ctr" lIns="0" rIns="0" tIns="0" bIns="0"/>
+          <a:bodyPr lIns="0" tIns="0" rIns="0" bIns="0" rtlCol="0" anchor="ctr"/>
           <a:lstStyle/>
           <a:p>
             <a:pPr algn="ctr"/>
@@ -22543,7 +22934,7 @@
           </a:fontRef>
         </p:style>
         <p:txBody>
-          <a:bodyPr rtlCol="0" anchor="ctr" rIns="0" tIns="0" bIns="0"/>
+          <a:bodyPr tIns="0" rIns="0" bIns="0" rtlCol="0" anchor="ctr"/>
           <a:lstStyle/>
           <a:p>
             <a:pPr algn="ctr"/>
@@ -22600,6 +22991,7 @@
           <a:lstStyle/>
           <a:p>
             <a:pPr algn="ctr"/>
+            <a:endParaRPr/>
           </a:p>
         </p:txBody>
       </p:sp>
@@ -22644,6 +23036,7 @@
           <a:lstStyle/>
           <a:p>
             <a:pPr algn="ctr"/>
+            <a:endParaRPr/>
           </a:p>
         </p:txBody>
       </p:sp>
@@ -22688,6 +23081,7 @@
           <a:lstStyle/>
           <a:p>
             <a:pPr algn="ctr"/>
+            <a:endParaRPr/>
           </a:p>
         </p:txBody>
       </p:sp>
@@ -22756,6 +23150,7 @@
           <a:lstStyle/>
           <a:p>
             <a:pPr algn="ctr"/>
+            <a:endParaRPr/>
           </a:p>
         </p:txBody>
       </p:sp>
@@ -22776,7 +23171,7 @@
           <a:noFill/>
         </p:spPr>
         <p:txBody>
-          <a:bodyPr wrap="square" lIns="0" rIns="0" tIns="0" bIns="0" anchor="t">
+          <a:bodyPr wrap="square" lIns="0" tIns="0" rIns="0" bIns="0" anchor="t">
             <a:spAutoFit/>
           </a:bodyPr>
           <a:lstStyle/>
@@ -22815,7 +23210,7 @@
           <a:noFill/>
         </p:spPr>
         <p:txBody>
-          <a:bodyPr wrap="square" lIns="0" rIns="0" tIns="0" bIns="0" anchor="t">
+          <a:bodyPr wrap="square" lIns="0" tIns="0" rIns="0" bIns="0" anchor="t">
             <a:spAutoFit/>
           </a:bodyPr>
           <a:lstStyle/>
@@ -22878,6 +23273,7 @@
           <a:lstStyle/>
           <a:p>
             <a:pPr algn="ctr"/>
+            <a:endParaRPr/>
           </a:p>
         </p:txBody>
       </p:sp>
@@ -22898,7 +23294,7 @@
           <a:noFill/>
         </p:spPr>
         <p:txBody>
-          <a:bodyPr wrap="square" lIns="0" rIns="0" tIns="0" bIns="0" anchor="t">
+          <a:bodyPr wrap="square" lIns="0" tIns="0" rIns="0" bIns="0" anchor="t">
             <a:spAutoFit/>
           </a:bodyPr>
           <a:lstStyle/>
@@ -22961,6 +23357,7 @@
           <a:lstStyle/>
           <a:p>
             <a:pPr algn="ctr"/>
+            <a:endParaRPr/>
           </a:p>
         </p:txBody>
       </p:sp>
@@ -22981,7 +23378,7 @@
           <a:noFill/>
         </p:spPr>
         <p:txBody>
-          <a:bodyPr wrap="square" lIns="0" rIns="0" tIns="0" bIns="0" anchor="t">
+          <a:bodyPr wrap="square" lIns="0" tIns="0" rIns="0" bIns="0" anchor="t">
             <a:spAutoFit/>
           </a:bodyPr>
           <a:lstStyle/>
@@ -23044,6 +23441,7 @@
           <a:lstStyle/>
           <a:p>
             <a:pPr algn="ctr"/>
+            <a:endParaRPr/>
           </a:p>
         </p:txBody>
       </p:sp>
@@ -23064,7 +23462,7 @@
           <a:noFill/>
         </p:spPr>
         <p:txBody>
-          <a:bodyPr wrap="square" lIns="0" rIns="0" tIns="0" bIns="0" anchor="t">
+          <a:bodyPr wrap="square" lIns="0" tIns="0" rIns="0" bIns="0" anchor="t">
             <a:spAutoFit/>
           </a:bodyPr>
           <a:lstStyle/>
@@ -23127,6 +23525,7 @@
           <a:lstStyle/>
           <a:p>
             <a:pPr algn="ctr"/>
+            <a:endParaRPr/>
           </a:p>
         </p:txBody>
       </p:sp>
@@ -23147,7 +23546,7 @@
           <a:noFill/>
         </p:spPr>
         <p:txBody>
-          <a:bodyPr wrap="square" lIns="0" rIns="0" tIns="0" bIns="0" anchor="t">
+          <a:bodyPr wrap="square" lIns="0" tIns="0" rIns="0" bIns="0" anchor="t">
             <a:spAutoFit/>
           </a:bodyPr>
           <a:lstStyle/>
@@ -23210,6 +23609,7 @@
           <a:lstStyle/>
           <a:p>
             <a:pPr algn="ctr"/>
+            <a:endParaRPr/>
           </a:p>
         </p:txBody>
       </p:sp>
@@ -23230,7 +23630,7 @@
           <a:noFill/>
         </p:spPr>
         <p:txBody>
-          <a:bodyPr wrap="square" lIns="0" rIns="0" tIns="0" bIns="0" anchor="t">
+          <a:bodyPr wrap="square" lIns="0" tIns="0" rIns="0" bIns="0" anchor="t">
             <a:spAutoFit/>
           </a:bodyPr>
           <a:lstStyle/>
@@ -23293,6 +23693,7 @@
           <a:lstStyle/>
           <a:p>
             <a:pPr algn="ctr"/>
+            <a:endParaRPr/>
           </a:p>
         </p:txBody>
       </p:sp>
@@ -23313,7 +23714,7 @@
           <a:noFill/>
         </p:spPr>
         <p:txBody>
-          <a:bodyPr wrap="square" lIns="0" rIns="0" tIns="0" bIns="0" anchor="t">
+          <a:bodyPr wrap="square" lIns="0" tIns="0" rIns="0" bIns="0" anchor="t">
             <a:spAutoFit/>
           </a:bodyPr>
           <a:lstStyle/>
@@ -23352,7 +23753,7 @@
           <a:noFill/>
         </p:spPr>
         <p:txBody>
-          <a:bodyPr wrap="square" lIns="0" rIns="0" tIns="0" bIns="0" anchor="t">
+          <a:bodyPr wrap="square" lIns="0" tIns="0" rIns="0" bIns="0" anchor="t">
             <a:spAutoFit/>
           </a:bodyPr>
           <a:lstStyle/>
@@ -23383,7 +23784,7 @@
 </file>
 
 <file path=ppt/slides/slide6.xml><?xml version="1.0" encoding="utf-8"?>
-<p:sld xmlns:a="http://schemas.openxmlformats.org/drawingml/2006/main" xmlns:p="http://schemas.openxmlformats.org/presentationml/2006/main" xmlns:r="http://schemas.openxmlformats.org/officeDocument/2006/relationships">
+<p:sld xmlns:a="http://schemas.openxmlformats.org/drawingml/2006/main" xmlns:r="http://schemas.openxmlformats.org/officeDocument/2006/relationships" xmlns:p="http://schemas.openxmlformats.org/presentationml/2006/main">
   <p:cSld>
     <p:bg>
       <p:bgPr>
@@ -23399,7 +23800,14 @@
         <p:cNvGrpSpPr/>
         <p:nvPr/>
       </p:nvGrpSpPr>
-      <p:grpSpPr/>
+      <p:grpSpPr>
+        <a:xfrm>
+          <a:off x="0" y="0"/>
+          <a:ext cx="0" cy="0"/>
+          <a:chOff x="0" y="0"/>
+          <a:chExt cx="0" cy="0"/>
+        </a:xfrm>
+      </p:grpSpPr>
       <p:sp>
         <p:nvSpPr>
           <p:cNvPr id="2" name="Rectangle 1"/>
@@ -23441,6 +23849,7 @@
           <a:lstStyle/>
           <a:p>
             <a:pPr algn="ctr"/>
+            <a:endParaRPr/>
           </a:p>
         </p:txBody>
       </p:sp>
@@ -23461,7 +23870,7 @@
           <a:noFill/>
         </p:spPr>
         <p:txBody>
-          <a:bodyPr wrap="square" lIns="0" rIns="0" tIns="0" bIns="0" anchor="t">
+          <a:bodyPr wrap="square" lIns="0" tIns="0" rIns="0" bIns="0" anchor="t">
             <a:spAutoFit/>
           </a:bodyPr>
           <a:lstStyle/>
@@ -23500,7 +23909,7 @@
           <a:noFill/>
         </p:spPr>
         <p:txBody>
-          <a:bodyPr wrap="square" lIns="0" rIns="0" tIns="0" bIns="0" anchor="t">
+          <a:bodyPr wrap="square" lIns="0" tIns="0" rIns="0" bIns="0" anchor="t">
             <a:spAutoFit/>
           </a:bodyPr>
           <a:lstStyle/>
@@ -23561,7 +23970,7 @@
           </a:fontRef>
         </p:style>
         <p:txBody>
-          <a:bodyPr rtlCol="0" anchor="ctr" lIns="0" rIns="0" tIns="0" bIns="0"/>
+          <a:bodyPr lIns="0" tIns="0" rIns="0" bIns="0" rtlCol="0" anchor="ctr"/>
           <a:lstStyle/>
           <a:p>
             <a:pPr algn="ctr"/>
@@ -23594,7 +24003,7 @@
           <a:noFill/>
         </p:spPr>
         <p:txBody>
-          <a:bodyPr wrap="square" lIns="0" rIns="0" tIns="0" bIns="0" anchor="t">
+          <a:bodyPr wrap="square" lIns="0" tIns="0" rIns="0" bIns="0" anchor="t">
             <a:spAutoFit/>
           </a:bodyPr>
           <a:lstStyle/>
@@ -23633,7 +24042,7 @@
           <a:noFill/>
         </p:spPr>
         <p:txBody>
-          <a:bodyPr wrap="square" lIns="0" rIns="0" tIns="0" bIns="0" anchor="t">
+          <a:bodyPr wrap="square" lIns="0" tIns="0" rIns="0" bIns="0" anchor="t">
             <a:spAutoFit/>
           </a:bodyPr>
           <a:lstStyle/>
@@ -23672,7 +24081,7 @@
           <a:noFill/>
         </p:spPr>
         <p:txBody>
-          <a:bodyPr wrap="square" lIns="0" rIns="0" tIns="0" bIns="0" anchor="t">
+          <a:bodyPr wrap="square" lIns="0" tIns="0" rIns="0" bIns="0" anchor="t">
             <a:spAutoFit/>
           </a:bodyPr>
           <a:lstStyle/>
@@ -23735,6 +24144,7 @@
           <a:lstStyle/>
           <a:p>
             <a:pPr algn="ctr"/>
+            <a:endParaRPr/>
           </a:p>
         </p:txBody>
       </p:sp>
@@ -23755,7 +24165,7 @@
           <a:noFill/>
         </p:spPr>
         <p:txBody>
-          <a:bodyPr wrap="square" lIns="0" rIns="0" tIns="0" bIns="0" anchor="t">
+          <a:bodyPr wrap="square" lIns="0" tIns="0" rIns="0" bIns="0" anchor="t">
             <a:spAutoFit/>
           </a:bodyPr>
           <a:lstStyle/>
@@ -23818,6 +24228,7 @@
           <a:lstStyle/>
           <a:p>
             <a:pPr algn="ctr"/>
+            <a:endParaRPr/>
           </a:p>
         </p:txBody>
       </p:sp>
@@ -23858,7 +24269,7 @@
           </a:fontRef>
         </p:style>
         <p:txBody>
-          <a:bodyPr rtlCol="0" anchor="ctr" lIns="0" rIns="0" tIns="0" bIns="0"/>
+          <a:bodyPr lIns="0" tIns="0" rIns="0" bIns="0" rtlCol="0" anchor="ctr"/>
           <a:lstStyle/>
           <a:p>
             <a:pPr algn="ctr"/>
@@ -23911,7 +24322,7 @@
           </a:fontRef>
         </p:style>
         <p:txBody>
-          <a:bodyPr rtlCol="0" anchor="ctr" lIns="0" rIns="0" tIns="0" bIns="0"/>
+          <a:bodyPr lIns="0" tIns="0" rIns="0" bIns="0" rtlCol="0" anchor="ctr"/>
           <a:lstStyle/>
           <a:p>
             <a:pPr algn="ctr"/>
@@ -23964,7 +24375,7 @@
           </a:fontRef>
         </p:style>
         <p:txBody>
-          <a:bodyPr rtlCol="0" anchor="ctr" lIns="0" rIns="0" tIns="0" bIns="0"/>
+          <a:bodyPr lIns="0" tIns="0" rIns="0" bIns="0" rtlCol="0" anchor="ctr"/>
           <a:lstStyle/>
           <a:p>
             <a:pPr algn="ctr"/>
@@ -24017,7 +24428,7 @@
           </a:fontRef>
         </p:style>
         <p:txBody>
-          <a:bodyPr rtlCol="0" anchor="ctr" lIns="0" rIns="0" tIns="0" bIns="0"/>
+          <a:bodyPr lIns="0" tIns="0" rIns="0" bIns="0" rtlCol="0" anchor="ctr"/>
           <a:lstStyle/>
           <a:p>
             <a:pPr algn="ctr"/>
@@ -24072,7 +24483,7 @@
           </a:fontRef>
         </p:style>
         <p:txBody>
-          <a:bodyPr rtlCol="0" anchor="ctr" rIns="0" tIns="0" bIns="0"/>
+          <a:bodyPr tIns="0" rIns="0" bIns="0" rtlCol="0" anchor="ctr"/>
           <a:lstStyle/>
           <a:p>
             <a:pPr algn="ctr"/>
@@ -24129,6 +24540,7 @@
           <a:lstStyle/>
           <a:p>
             <a:pPr algn="ctr"/>
+            <a:endParaRPr/>
           </a:p>
         </p:txBody>
       </p:sp>
@@ -24173,6 +24585,7 @@
           <a:lstStyle/>
           <a:p>
             <a:pPr algn="ctr"/>
+            <a:endParaRPr/>
           </a:p>
         </p:txBody>
       </p:sp>
@@ -24217,6 +24630,7 @@
           <a:lstStyle/>
           <a:p>
             <a:pPr algn="ctr"/>
+            <a:endParaRPr/>
           </a:p>
         </p:txBody>
       </p:sp>
@@ -24285,6 +24699,7 @@
           <a:lstStyle/>
           <a:p>
             <a:pPr algn="ctr"/>
+            <a:endParaRPr/>
           </a:p>
         </p:txBody>
       </p:sp>
@@ -24305,7 +24720,7 @@
           <a:noFill/>
         </p:spPr>
         <p:txBody>
-          <a:bodyPr wrap="square" lIns="0" rIns="0" tIns="0" bIns="0" anchor="t">
+          <a:bodyPr wrap="square" lIns="0" tIns="0" rIns="0" bIns="0" anchor="t">
             <a:spAutoFit/>
           </a:bodyPr>
           <a:lstStyle/>
@@ -24344,7 +24759,7 @@
           <a:noFill/>
         </p:spPr>
         <p:txBody>
-          <a:bodyPr wrap="square" lIns="0" rIns="0" tIns="0" bIns="0" anchor="t">
+          <a:bodyPr wrap="square" lIns="0" tIns="0" rIns="0" bIns="0" anchor="t">
             <a:spAutoFit/>
           </a:bodyPr>
           <a:lstStyle/>
@@ -24407,6 +24822,7 @@
           <a:lstStyle/>
           <a:p>
             <a:pPr algn="ctr"/>
+            <a:endParaRPr/>
           </a:p>
         </p:txBody>
       </p:sp>
@@ -24427,7 +24843,7 @@
           <a:noFill/>
         </p:spPr>
         <p:txBody>
-          <a:bodyPr wrap="square" lIns="0" rIns="0" tIns="0" bIns="0" anchor="t">
+          <a:bodyPr wrap="square" lIns="0" tIns="0" rIns="0" bIns="0" anchor="t">
             <a:spAutoFit/>
           </a:bodyPr>
           <a:lstStyle/>
@@ -24490,6 +24906,7 @@
           <a:lstStyle/>
           <a:p>
             <a:pPr algn="ctr"/>
+            <a:endParaRPr/>
           </a:p>
         </p:txBody>
       </p:sp>
@@ -24510,7 +24927,7 @@
           <a:noFill/>
         </p:spPr>
         <p:txBody>
-          <a:bodyPr wrap="square" lIns="0" rIns="0" tIns="0" bIns="0" anchor="t">
+          <a:bodyPr wrap="square" lIns="0" tIns="0" rIns="0" bIns="0" anchor="t">
             <a:spAutoFit/>
           </a:bodyPr>
           <a:lstStyle/>
@@ -24573,6 +24990,7 @@
           <a:lstStyle/>
           <a:p>
             <a:pPr algn="ctr"/>
+            <a:endParaRPr/>
           </a:p>
         </p:txBody>
       </p:sp>
@@ -24593,7 +25011,7 @@
           <a:noFill/>
         </p:spPr>
         <p:txBody>
-          <a:bodyPr wrap="square" lIns="0" rIns="0" tIns="0" bIns="0" anchor="t">
+          <a:bodyPr wrap="square" lIns="0" tIns="0" rIns="0" bIns="0" anchor="t">
             <a:spAutoFit/>
           </a:bodyPr>
           <a:lstStyle/>
@@ -24656,6 +25074,7 @@
           <a:lstStyle/>
           <a:p>
             <a:pPr algn="ctr"/>
+            <a:endParaRPr/>
           </a:p>
         </p:txBody>
       </p:sp>
@@ -24676,7 +25095,7 @@
           <a:noFill/>
         </p:spPr>
         <p:txBody>
-          <a:bodyPr wrap="square" lIns="0" rIns="0" tIns="0" bIns="0" anchor="t">
+          <a:bodyPr wrap="square" lIns="0" tIns="0" rIns="0" bIns="0" anchor="t">
             <a:spAutoFit/>
           </a:bodyPr>
           <a:lstStyle/>
@@ -24739,6 +25158,7 @@
           <a:lstStyle/>
           <a:p>
             <a:pPr algn="ctr"/>
+            <a:endParaRPr/>
           </a:p>
         </p:txBody>
       </p:sp>
@@ -24759,7 +25179,7 @@
           <a:noFill/>
         </p:spPr>
         <p:txBody>
-          <a:bodyPr wrap="square" lIns="0" rIns="0" tIns="0" bIns="0" anchor="t">
+          <a:bodyPr wrap="square" lIns="0" tIns="0" rIns="0" bIns="0" anchor="t">
             <a:spAutoFit/>
           </a:bodyPr>
           <a:lstStyle/>
@@ -24822,6 +25242,7 @@
           <a:lstStyle/>
           <a:p>
             <a:pPr algn="ctr"/>
+            <a:endParaRPr/>
           </a:p>
         </p:txBody>
       </p:sp>
@@ -24842,7 +25263,7 @@
           <a:noFill/>
         </p:spPr>
         <p:txBody>
-          <a:bodyPr wrap="square" lIns="0" rIns="0" tIns="0" bIns="0" anchor="t">
+          <a:bodyPr wrap="square" lIns="0" tIns="0" rIns="0" bIns="0" anchor="t">
             <a:spAutoFit/>
           </a:bodyPr>
           <a:lstStyle/>
@@ -24881,7 +25302,7 @@
           <a:noFill/>
         </p:spPr>
         <p:txBody>
-          <a:bodyPr wrap="square" lIns="0" rIns="0" tIns="0" bIns="0" anchor="t">
+          <a:bodyPr wrap="square" lIns="0" tIns="0" rIns="0" bIns="0" anchor="t">
             <a:spAutoFit/>
           </a:bodyPr>
           <a:lstStyle/>
@@ -24912,7 +25333,7 @@
 </file>
 
 <file path=ppt/slides/slide7.xml><?xml version="1.0" encoding="utf-8"?>
-<p:sld xmlns:a="http://schemas.openxmlformats.org/drawingml/2006/main" xmlns:p="http://schemas.openxmlformats.org/presentationml/2006/main" xmlns:r="http://schemas.openxmlformats.org/officeDocument/2006/relationships">
+<p:sld xmlns:a="http://schemas.openxmlformats.org/drawingml/2006/main" xmlns:r="http://schemas.openxmlformats.org/officeDocument/2006/relationships" xmlns:p="http://schemas.openxmlformats.org/presentationml/2006/main">
   <p:cSld>
     <p:bg>
       <p:bgPr>
@@ -24928,7 +25349,14 @@
         <p:cNvGrpSpPr/>
         <p:nvPr/>
       </p:nvGrpSpPr>
-      <p:grpSpPr/>
+      <p:grpSpPr>
+        <a:xfrm>
+          <a:off x="0" y="0"/>
+          <a:ext cx="0" cy="0"/>
+          <a:chOff x="0" y="0"/>
+          <a:chExt cx="0" cy="0"/>
+        </a:xfrm>
+      </p:grpSpPr>
       <p:sp>
         <p:nvSpPr>
           <p:cNvPr id="2" name="Rectangle 1"/>
@@ -24970,6 +25398,7 @@
           <a:lstStyle/>
           <a:p>
             <a:pPr algn="ctr"/>
+            <a:endParaRPr/>
           </a:p>
         </p:txBody>
       </p:sp>
@@ -24990,7 +25419,7 @@
           <a:noFill/>
         </p:spPr>
         <p:txBody>
-          <a:bodyPr wrap="square" lIns="0" rIns="0" tIns="0" bIns="0" anchor="t">
+          <a:bodyPr wrap="square" lIns="0" tIns="0" rIns="0" bIns="0" anchor="t">
             <a:spAutoFit/>
           </a:bodyPr>
           <a:lstStyle/>
@@ -25029,7 +25458,7 @@
           <a:noFill/>
         </p:spPr>
         <p:txBody>
-          <a:bodyPr wrap="square" lIns="0" rIns="0" tIns="0" bIns="0" anchor="t">
+          <a:bodyPr wrap="square" lIns="0" tIns="0" rIns="0" bIns="0" anchor="t">
             <a:spAutoFit/>
           </a:bodyPr>
           <a:lstStyle/>
@@ -25090,7 +25519,7 @@
           </a:fontRef>
         </p:style>
         <p:txBody>
-          <a:bodyPr rtlCol="0" anchor="ctr" lIns="0" rIns="0" tIns="0" bIns="0"/>
+          <a:bodyPr lIns="0" tIns="0" rIns="0" bIns="0" rtlCol="0" anchor="ctr"/>
           <a:lstStyle/>
           <a:p>
             <a:pPr algn="ctr"/>
@@ -25123,7 +25552,7 @@
           <a:noFill/>
         </p:spPr>
         <p:txBody>
-          <a:bodyPr wrap="square" lIns="0" rIns="0" tIns="0" bIns="0" anchor="t">
+          <a:bodyPr wrap="square" lIns="0" tIns="0" rIns="0" bIns="0" anchor="t">
             <a:spAutoFit/>
           </a:bodyPr>
           <a:lstStyle/>
@@ -25162,7 +25591,7 @@
           <a:noFill/>
         </p:spPr>
         <p:txBody>
-          <a:bodyPr wrap="square" lIns="0" rIns="0" tIns="0" bIns="0" anchor="t">
+          <a:bodyPr wrap="square" lIns="0" tIns="0" rIns="0" bIns="0" anchor="t">
             <a:spAutoFit/>
           </a:bodyPr>
           <a:lstStyle/>
@@ -25201,7 +25630,7 @@
           <a:noFill/>
         </p:spPr>
         <p:txBody>
-          <a:bodyPr wrap="square" lIns="0" rIns="0" tIns="0" bIns="0" anchor="t">
+          <a:bodyPr wrap="square" lIns="0" tIns="0" rIns="0" bIns="0" anchor="t">
             <a:spAutoFit/>
           </a:bodyPr>
           <a:lstStyle/>
@@ -25264,6 +25693,7 @@
           <a:lstStyle/>
           <a:p>
             <a:pPr algn="ctr"/>
+            <a:endParaRPr/>
           </a:p>
         </p:txBody>
       </p:sp>
@@ -25284,7 +25714,7 @@
           <a:noFill/>
         </p:spPr>
         <p:txBody>
-          <a:bodyPr wrap="square" lIns="0" rIns="0" tIns="0" bIns="0" anchor="t">
+          <a:bodyPr wrap="square" lIns="0" tIns="0" rIns="0" bIns="0" anchor="t">
             <a:spAutoFit/>
           </a:bodyPr>
           <a:lstStyle/>
@@ -25347,6 +25777,7 @@
           <a:lstStyle/>
           <a:p>
             <a:pPr algn="ctr"/>
+            <a:endParaRPr/>
           </a:p>
         </p:txBody>
       </p:sp>
@@ -25387,7 +25818,7 @@
           </a:fontRef>
         </p:style>
         <p:txBody>
-          <a:bodyPr rtlCol="0" anchor="ctr" lIns="0" rIns="0" tIns="0" bIns="0"/>
+          <a:bodyPr lIns="0" tIns="0" rIns="0" bIns="0" rtlCol="0" anchor="ctr"/>
           <a:lstStyle/>
           <a:p>
             <a:pPr algn="ctr"/>
@@ -25440,7 +25871,7 @@
           </a:fontRef>
         </p:style>
         <p:txBody>
-          <a:bodyPr rtlCol="0" anchor="ctr" lIns="0" rIns="0" tIns="0" bIns="0"/>
+          <a:bodyPr lIns="0" tIns="0" rIns="0" bIns="0" rtlCol="0" anchor="ctr"/>
           <a:lstStyle/>
           <a:p>
             <a:pPr algn="ctr"/>
@@ -25493,7 +25924,7 @@
           </a:fontRef>
         </p:style>
         <p:txBody>
-          <a:bodyPr rtlCol="0" anchor="ctr" lIns="0" rIns="0" tIns="0" bIns="0"/>
+          <a:bodyPr lIns="0" tIns="0" rIns="0" bIns="0" rtlCol="0" anchor="ctr"/>
           <a:lstStyle/>
           <a:p>
             <a:pPr algn="ctr"/>
@@ -25546,7 +25977,7 @@
           </a:fontRef>
         </p:style>
         <p:txBody>
-          <a:bodyPr rtlCol="0" anchor="ctr" lIns="0" rIns="0" tIns="0" bIns="0"/>
+          <a:bodyPr lIns="0" tIns="0" rIns="0" bIns="0" rtlCol="0" anchor="ctr"/>
           <a:lstStyle/>
           <a:p>
             <a:pPr algn="ctr"/>
@@ -25601,7 +26032,7 @@
           </a:fontRef>
         </p:style>
         <p:txBody>
-          <a:bodyPr rtlCol="0" anchor="ctr" rIns="0" tIns="0" bIns="0"/>
+          <a:bodyPr tIns="0" rIns="0" bIns="0" rtlCol="0" anchor="ctr"/>
           <a:lstStyle/>
           <a:p>
             <a:pPr algn="ctr"/>
@@ -25658,6 +26089,7 @@
           <a:lstStyle/>
           <a:p>
             <a:pPr algn="ctr"/>
+            <a:endParaRPr/>
           </a:p>
         </p:txBody>
       </p:sp>
@@ -25702,6 +26134,7 @@
           <a:lstStyle/>
           <a:p>
             <a:pPr algn="ctr"/>
+            <a:endParaRPr/>
           </a:p>
         </p:txBody>
       </p:sp>
@@ -25746,6 +26179,7 @@
           <a:lstStyle/>
           <a:p>
             <a:pPr algn="ctr"/>
+            <a:endParaRPr/>
           </a:p>
         </p:txBody>
       </p:sp>
@@ -25814,6 +26248,7 @@
           <a:lstStyle/>
           <a:p>
             <a:pPr algn="ctr"/>
+            <a:endParaRPr/>
           </a:p>
         </p:txBody>
       </p:sp>
@@ -25834,7 +26269,7 @@
           <a:noFill/>
         </p:spPr>
         <p:txBody>
-          <a:bodyPr wrap="square" lIns="0" rIns="0" tIns="0" bIns="0" anchor="t">
+          <a:bodyPr wrap="square" lIns="0" tIns="0" rIns="0" bIns="0" anchor="t">
             <a:spAutoFit/>
           </a:bodyPr>
           <a:lstStyle/>
@@ -25873,7 +26308,7 @@
           <a:noFill/>
         </p:spPr>
         <p:txBody>
-          <a:bodyPr wrap="square" lIns="0" rIns="0" tIns="0" bIns="0" anchor="t">
+          <a:bodyPr wrap="square" lIns="0" tIns="0" rIns="0" bIns="0" anchor="t">
             <a:spAutoFit/>
           </a:bodyPr>
           <a:lstStyle/>
@@ -25936,6 +26371,7 @@
           <a:lstStyle/>
           <a:p>
             <a:pPr algn="ctr"/>
+            <a:endParaRPr/>
           </a:p>
         </p:txBody>
       </p:sp>
@@ -25956,7 +26392,7 @@
           <a:noFill/>
         </p:spPr>
         <p:txBody>
-          <a:bodyPr wrap="square" lIns="0" rIns="0" tIns="0" bIns="0" anchor="t">
+          <a:bodyPr wrap="square" lIns="0" tIns="0" rIns="0" bIns="0" anchor="t">
             <a:spAutoFit/>
           </a:bodyPr>
           <a:lstStyle/>
@@ -26019,6 +26455,7 @@
           <a:lstStyle/>
           <a:p>
             <a:pPr algn="ctr"/>
+            <a:endParaRPr/>
           </a:p>
         </p:txBody>
       </p:sp>
@@ -26039,7 +26476,7 @@
           <a:noFill/>
         </p:spPr>
         <p:txBody>
-          <a:bodyPr wrap="square" lIns="0" rIns="0" tIns="0" bIns="0" anchor="t">
+          <a:bodyPr wrap="square" lIns="0" tIns="0" rIns="0" bIns="0" anchor="t">
             <a:spAutoFit/>
           </a:bodyPr>
           <a:lstStyle/>
@@ -26102,6 +26539,7 @@
           <a:lstStyle/>
           <a:p>
             <a:pPr algn="ctr"/>
+            <a:endParaRPr/>
           </a:p>
         </p:txBody>
       </p:sp>
@@ -26122,7 +26560,7 @@
           <a:noFill/>
         </p:spPr>
         <p:txBody>
-          <a:bodyPr wrap="square" lIns="0" rIns="0" tIns="0" bIns="0" anchor="t">
+          <a:bodyPr wrap="square" lIns="0" tIns="0" rIns="0" bIns="0" anchor="t">
             <a:spAutoFit/>
           </a:bodyPr>
           <a:lstStyle/>
@@ -26185,6 +26623,7 @@
           <a:lstStyle/>
           <a:p>
             <a:pPr algn="ctr"/>
+            <a:endParaRPr/>
           </a:p>
         </p:txBody>
       </p:sp>
@@ -26205,7 +26644,7 @@
           <a:noFill/>
         </p:spPr>
         <p:txBody>
-          <a:bodyPr wrap="square" lIns="0" rIns="0" tIns="0" bIns="0" anchor="t">
+          <a:bodyPr wrap="square" lIns="0" tIns="0" rIns="0" bIns="0" anchor="t">
             <a:spAutoFit/>
           </a:bodyPr>
           <a:lstStyle/>
@@ -26268,6 +26707,7 @@
           <a:lstStyle/>
           <a:p>
             <a:pPr algn="ctr"/>
+            <a:endParaRPr/>
           </a:p>
         </p:txBody>
       </p:sp>
@@ -26288,7 +26728,7 @@
           <a:noFill/>
         </p:spPr>
         <p:txBody>
-          <a:bodyPr wrap="square" lIns="0" rIns="0" tIns="0" bIns="0" anchor="t">
+          <a:bodyPr wrap="square" lIns="0" tIns="0" rIns="0" bIns="0" anchor="t">
             <a:spAutoFit/>
           </a:bodyPr>
           <a:lstStyle/>
@@ -26351,6 +26791,7 @@
           <a:lstStyle/>
           <a:p>
             <a:pPr algn="ctr"/>
+            <a:endParaRPr/>
           </a:p>
         </p:txBody>
       </p:sp>
@@ -26371,7 +26812,7 @@
           <a:noFill/>
         </p:spPr>
         <p:txBody>
-          <a:bodyPr wrap="square" lIns="0" rIns="0" tIns="0" bIns="0" anchor="t">
+          <a:bodyPr wrap="square" lIns="0" tIns="0" rIns="0" bIns="0" anchor="t">
             <a:spAutoFit/>
           </a:bodyPr>
           <a:lstStyle/>
@@ -26410,7 +26851,7 @@
           <a:noFill/>
         </p:spPr>
         <p:txBody>
-          <a:bodyPr wrap="square" lIns="0" rIns="0" tIns="0" bIns="0" anchor="t">
+          <a:bodyPr wrap="square" lIns="0" tIns="0" rIns="0" bIns="0" anchor="t">
             <a:spAutoFit/>
           </a:bodyPr>
           <a:lstStyle/>
@@ -26441,7 +26882,7 @@
 </file>
 
 <file path=ppt/slides/slide8.xml><?xml version="1.0" encoding="utf-8"?>
-<p:sld xmlns:a="http://schemas.openxmlformats.org/drawingml/2006/main" xmlns:p="http://schemas.openxmlformats.org/presentationml/2006/main" xmlns:r="http://schemas.openxmlformats.org/officeDocument/2006/relationships">
+<p:sld xmlns:a="http://schemas.openxmlformats.org/drawingml/2006/main" xmlns:r="http://schemas.openxmlformats.org/officeDocument/2006/relationships" xmlns:p="http://schemas.openxmlformats.org/presentationml/2006/main">
   <p:cSld>
     <p:bg>
       <p:bgPr>
@@ -26457,7 +26898,14 @@
         <p:cNvGrpSpPr/>
         <p:nvPr/>
       </p:nvGrpSpPr>
-      <p:grpSpPr/>
+      <p:grpSpPr>
+        <a:xfrm>
+          <a:off x="0" y="0"/>
+          <a:ext cx="0" cy="0"/>
+          <a:chOff x="0" y="0"/>
+          <a:chExt cx="0" cy="0"/>
+        </a:xfrm>
+      </p:grpSpPr>
       <p:sp>
         <p:nvSpPr>
           <p:cNvPr id="2" name="Rectangle 1"/>
@@ -26499,6 +26947,7 @@
           <a:lstStyle/>
           <a:p>
             <a:pPr algn="ctr"/>
+            <a:endParaRPr/>
           </a:p>
         </p:txBody>
       </p:sp>
@@ -26519,7 +26968,7 @@
           <a:noFill/>
         </p:spPr>
         <p:txBody>
-          <a:bodyPr wrap="square" lIns="0" rIns="0" tIns="0" bIns="0" anchor="t">
+          <a:bodyPr wrap="square" lIns="0" tIns="0" rIns="0" bIns="0" anchor="t">
             <a:spAutoFit/>
           </a:bodyPr>
           <a:lstStyle/>
@@ -26558,7 +27007,7 @@
           <a:noFill/>
         </p:spPr>
         <p:txBody>
-          <a:bodyPr wrap="square" lIns="0" rIns="0" tIns="0" bIns="0" anchor="t">
+          <a:bodyPr wrap="square" lIns="0" tIns="0" rIns="0" bIns="0" anchor="t">
             <a:spAutoFit/>
           </a:bodyPr>
           <a:lstStyle/>
@@ -26619,7 +27068,7 @@
           </a:fontRef>
         </p:style>
         <p:txBody>
-          <a:bodyPr rtlCol="0" anchor="ctr" lIns="0" rIns="0" tIns="0" bIns="0"/>
+          <a:bodyPr lIns="0" tIns="0" rIns="0" bIns="0" rtlCol="0" anchor="ctr"/>
           <a:lstStyle/>
           <a:p>
             <a:pPr algn="ctr"/>
@@ -26652,7 +27101,7 @@
           <a:noFill/>
         </p:spPr>
         <p:txBody>
-          <a:bodyPr wrap="square" lIns="0" rIns="0" tIns="0" bIns="0" anchor="t">
+          <a:bodyPr wrap="square" lIns="0" tIns="0" rIns="0" bIns="0" anchor="t">
             <a:spAutoFit/>
           </a:bodyPr>
           <a:lstStyle/>
@@ -26691,7 +27140,7 @@
           <a:noFill/>
         </p:spPr>
         <p:txBody>
-          <a:bodyPr wrap="square" lIns="0" rIns="0" tIns="0" bIns="0" anchor="t">
+          <a:bodyPr wrap="square" lIns="0" tIns="0" rIns="0" bIns="0" anchor="t">
             <a:spAutoFit/>
           </a:bodyPr>
           <a:lstStyle/>
@@ -26730,7 +27179,7 @@
           <a:noFill/>
         </p:spPr>
         <p:txBody>
-          <a:bodyPr wrap="square" lIns="0" rIns="0" tIns="0" bIns="0" anchor="t">
+          <a:bodyPr wrap="square" lIns="0" tIns="0" rIns="0" bIns="0" anchor="t">
             <a:spAutoFit/>
           </a:bodyPr>
           <a:lstStyle/>
@@ -26793,6 +27242,7 @@
           <a:lstStyle/>
           <a:p>
             <a:pPr algn="ctr"/>
+            <a:endParaRPr/>
           </a:p>
         </p:txBody>
       </p:sp>
@@ -26813,7 +27263,7 @@
           <a:noFill/>
         </p:spPr>
         <p:txBody>
-          <a:bodyPr wrap="square" lIns="0" rIns="0" tIns="0" bIns="0" anchor="t">
+          <a:bodyPr wrap="square" lIns="0" tIns="0" rIns="0" bIns="0" anchor="t">
             <a:spAutoFit/>
           </a:bodyPr>
           <a:lstStyle/>
@@ -26876,6 +27326,7 @@
           <a:lstStyle/>
           <a:p>
             <a:pPr algn="ctr"/>
+            <a:endParaRPr/>
           </a:p>
         </p:txBody>
       </p:sp>
@@ -26916,7 +27367,7 @@
           </a:fontRef>
         </p:style>
         <p:txBody>
-          <a:bodyPr rtlCol="0" anchor="ctr" lIns="0" rIns="0" tIns="0" bIns="0"/>
+          <a:bodyPr lIns="0" tIns="0" rIns="0" bIns="0" rtlCol="0" anchor="ctr"/>
           <a:lstStyle/>
           <a:p>
             <a:pPr algn="ctr"/>
@@ -26969,7 +27420,7 @@
           </a:fontRef>
         </p:style>
         <p:txBody>
-          <a:bodyPr rtlCol="0" anchor="ctr" lIns="0" rIns="0" tIns="0" bIns="0"/>
+          <a:bodyPr lIns="0" tIns="0" rIns="0" bIns="0" rtlCol="0" anchor="ctr"/>
           <a:lstStyle/>
           <a:p>
             <a:pPr algn="ctr"/>
@@ -27022,7 +27473,7 @@
           </a:fontRef>
         </p:style>
         <p:txBody>
-          <a:bodyPr rtlCol="0" anchor="ctr" lIns="0" rIns="0" tIns="0" bIns="0"/>
+          <a:bodyPr lIns="0" tIns="0" rIns="0" bIns="0" rtlCol="0" anchor="ctr"/>
           <a:lstStyle/>
           <a:p>
             <a:pPr algn="ctr"/>
@@ -27075,7 +27526,7 @@
           </a:fontRef>
         </p:style>
         <p:txBody>
-          <a:bodyPr rtlCol="0" anchor="ctr" lIns="0" rIns="0" tIns="0" bIns="0"/>
+          <a:bodyPr lIns="0" tIns="0" rIns="0" bIns="0" rtlCol="0" anchor="ctr"/>
           <a:lstStyle/>
           <a:p>
             <a:pPr algn="ctr"/>
@@ -27130,7 +27581,7 @@
           </a:fontRef>
         </p:style>
         <p:txBody>
-          <a:bodyPr rtlCol="0" anchor="ctr" rIns="0" tIns="0" bIns="0"/>
+          <a:bodyPr tIns="0" rIns="0" bIns="0" rtlCol="0" anchor="ctr"/>
           <a:lstStyle/>
           <a:p>
             <a:pPr algn="ctr"/>
@@ -27187,6 +27638,7 @@
           <a:lstStyle/>
           <a:p>
             <a:pPr algn="ctr"/>
+            <a:endParaRPr/>
           </a:p>
         </p:txBody>
       </p:sp>
@@ -27231,6 +27683,7 @@
           <a:lstStyle/>
           <a:p>
             <a:pPr algn="ctr"/>
+            <a:endParaRPr/>
           </a:p>
         </p:txBody>
       </p:sp>
@@ -27275,6 +27728,7 @@
           <a:lstStyle/>
           <a:p>
             <a:pPr algn="ctr"/>
+            <a:endParaRPr/>
           </a:p>
         </p:txBody>
       </p:sp>
@@ -27343,6 +27797,7 @@
           <a:lstStyle/>
           <a:p>
             <a:pPr algn="ctr"/>
+            <a:endParaRPr/>
           </a:p>
         </p:txBody>
       </p:sp>
@@ -27363,7 +27818,7 @@
           <a:noFill/>
         </p:spPr>
         <p:txBody>
-          <a:bodyPr wrap="square" lIns="0" rIns="0" tIns="0" bIns="0" anchor="t">
+          <a:bodyPr wrap="square" lIns="0" tIns="0" rIns="0" bIns="0" anchor="t">
             <a:spAutoFit/>
           </a:bodyPr>
           <a:lstStyle/>
@@ -27402,7 +27857,7 @@
           <a:noFill/>
         </p:spPr>
         <p:txBody>
-          <a:bodyPr wrap="square" lIns="0" rIns="0" tIns="0" bIns="0" anchor="t">
+          <a:bodyPr wrap="square" lIns="0" tIns="0" rIns="0" bIns="0" anchor="t">
             <a:spAutoFit/>
           </a:bodyPr>
           <a:lstStyle/>
@@ -27465,6 +27920,7 @@
           <a:lstStyle/>
           <a:p>
             <a:pPr algn="ctr"/>
+            <a:endParaRPr/>
           </a:p>
         </p:txBody>
       </p:sp>
@@ -27485,7 +27941,7 @@
           <a:noFill/>
         </p:spPr>
         <p:txBody>
-          <a:bodyPr wrap="square" lIns="0" rIns="0" tIns="0" bIns="0" anchor="t">
+          <a:bodyPr wrap="square" lIns="0" tIns="0" rIns="0" bIns="0" anchor="t">
             <a:spAutoFit/>
           </a:bodyPr>
           <a:lstStyle/>
@@ -27548,6 +28004,7 @@
           <a:lstStyle/>
           <a:p>
             <a:pPr algn="ctr"/>
+            <a:endParaRPr/>
           </a:p>
         </p:txBody>
       </p:sp>
@@ -27568,7 +28025,7 @@
           <a:noFill/>
         </p:spPr>
         <p:txBody>
-          <a:bodyPr wrap="square" lIns="0" rIns="0" tIns="0" bIns="0" anchor="t">
+          <a:bodyPr wrap="square" lIns="0" tIns="0" rIns="0" bIns="0" anchor="t">
             <a:spAutoFit/>
           </a:bodyPr>
           <a:lstStyle/>
@@ -27579,13 +28036,31 @@
               </a:lnSpc>
             </a:pPr>
             <a:r>
-              <a:rPr sz="1050" b="0">
+              <a:rPr sz="1050" b="0" dirty="0">
                 <a:solidFill>
                   <a:srgbClr val="D3E3EC"/>
                 </a:solidFill>
                 <a:latin typeface="Segoe UI"/>
               </a:rPr>
-              <a:t>Modelo de Risco Dinâmico RD = RA × ICC</a:t>
+              <a:t>Modelo de Risco </a:t>
+            </a:r>
+            <a:r>
+              <a:rPr sz="1050" b="0" dirty="0" err="1">
+                <a:solidFill>
+                  <a:srgbClr val="D3E3EC"/>
+                </a:solidFill>
+                <a:latin typeface="Segoe UI"/>
+              </a:rPr>
+              <a:t>Dinâmico</a:t>
+            </a:r>
+            <a:r>
+              <a:rPr sz="1050" b="0" dirty="0">
+                <a:solidFill>
+                  <a:srgbClr val="D3E3EC"/>
+                </a:solidFill>
+                <a:latin typeface="Segoe UI"/>
+              </a:rPr>
+              <a:t> RD = RA × ICC</a:t>
             </a:r>
           </a:p>
         </p:txBody>
@@ -27631,6 +28106,7 @@
           <a:lstStyle/>
           <a:p>
             <a:pPr algn="ctr"/>
+            <a:endParaRPr/>
           </a:p>
         </p:txBody>
       </p:sp>
@@ -27651,7 +28127,7 @@
           <a:noFill/>
         </p:spPr>
         <p:txBody>
-          <a:bodyPr wrap="square" lIns="0" rIns="0" tIns="0" bIns="0" anchor="t">
+          <a:bodyPr wrap="square" lIns="0" tIns="0" rIns="0" bIns="0" anchor="t">
             <a:spAutoFit/>
           </a:bodyPr>
           <a:lstStyle/>
@@ -27662,14 +28138,119 @@
               </a:lnSpc>
             </a:pPr>
             <a:r>
-              <a:rPr sz="1050" b="0">
+              <a:rPr sz="1050" b="0" dirty="0">
                 <a:solidFill>
                   <a:srgbClr val="D3E3EC"/>
                 </a:solidFill>
                 <a:latin typeface="Segoe UI"/>
               </a:rPr>
-              <a:t>Quatro regiões climático-geológico-geomorfológicas do litoral norte e da baixada santista</a:t>
-            </a:r>
+              <a:t>Quatro </a:t>
+            </a:r>
+            <a:r>
+              <a:rPr sz="1050" b="0" dirty="0" err="1">
+                <a:solidFill>
+                  <a:srgbClr val="D3E3EC"/>
+                </a:solidFill>
+                <a:latin typeface="Segoe UI"/>
+              </a:rPr>
+              <a:t>regiões</a:t>
+            </a:r>
+            <a:r>
+              <a:rPr sz="1050" b="0" dirty="0">
+                <a:solidFill>
+                  <a:srgbClr val="D3E3EC"/>
+                </a:solidFill>
+                <a:latin typeface="Segoe UI"/>
+              </a:rPr>
+              <a:t> </a:t>
+            </a:r>
+            <a:r>
+              <a:rPr sz="1050" b="0" dirty="0" err="1">
+                <a:solidFill>
+                  <a:srgbClr val="D3E3EC"/>
+                </a:solidFill>
+                <a:latin typeface="Segoe UI"/>
+              </a:rPr>
+              <a:t>climático-geológico-geomorfológicas</a:t>
+            </a:r>
+            <a:r>
+              <a:rPr sz="1050" b="0" dirty="0">
+                <a:solidFill>
+                  <a:srgbClr val="D3E3EC"/>
+                </a:solidFill>
+                <a:latin typeface="Segoe UI"/>
+              </a:rPr>
+              <a:t> do </a:t>
+            </a:r>
+            <a:r>
+              <a:rPr sz="1050" b="0" dirty="0" err="1">
+                <a:solidFill>
+                  <a:srgbClr val="D3E3EC"/>
+                </a:solidFill>
+                <a:latin typeface="Segoe UI"/>
+              </a:rPr>
+              <a:t>litoral</a:t>
+            </a:r>
+            <a:r>
+              <a:rPr sz="1050" b="0" dirty="0">
+                <a:solidFill>
+                  <a:srgbClr val="D3E3EC"/>
+                </a:solidFill>
+                <a:latin typeface="Segoe UI"/>
+              </a:rPr>
+              <a:t> </a:t>
+            </a:r>
+            <a:r>
+              <a:rPr sz="1050" b="0" dirty="0" err="1">
+                <a:solidFill>
+                  <a:srgbClr val="D3E3EC"/>
+                </a:solidFill>
+                <a:latin typeface="Segoe UI"/>
+              </a:rPr>
+              <a:t>norte</a:t>
+            </a:r>
+            <a:r>
+              <a:rPr sz="1050" b="0" dirty="0">
+                <a:solidFill>
+                  <a:srgbClr val="D3E3EC"/>
+                </a:solidFill>
+                <a:latin typeface="Segoe UI"/>
+              </a:rPr>
+              <a:t> e da </a:t>
+            </a:r>
+            <a:r>
+              <a:rPr sz="1050" b="0" dirty="0" err="1">
+                <a:solidFill>
+                  <a:srgbClr val="D3E3EC"/>
+                </a:solidFill>
+                <a:latin typeface="Segoe UI"/>
+              </a:rPr>
+              <a:t>baixada</a:t>
+            </a:r>
+            <a:r>
+              <a:rPr sz="1050" b="0" dirty="0">
+                <a:solidFill>
+                  <a:srgbClr val="D3E3EC"/>
+                </a:solidFill>
+                <a:latin typeface="Segoe UI"/>
+              </a:rPr>
+              <a:t> </a:t>
+            </a:r>
+            <a:r>
+              <a:rPr sz="1050" b="0" dirty="0" err="1">
+                <a:solidFill>
+                  <a:srgbClr val="D3E3EC"/>
+                </a:solidFill>
+                <a:latin typeface="Segoe UI"/>
+              </a:rPr>
+              <a:t>santista</a:t>
+            </a:r>
+            <a:endParaRPr sz="1050" b="0" dirty="0">
+              <a:solidFill>
+                <a:srgbClr val="D3E3EC"/>
+              </a:solidFill>
+              <a:latin typeface="Segoe UI"/>
+            </a:endParaRPr>
           </a:p>
         </p:txBody>
       </p:sp>
@@ -27714,6 +28295,7 @@
           <a:lstStyle/>
           <a:p>
             <a:pPr algn="ctr"/>
+            <a:endParaRPr/>
           </a:p>
         </p:txBody>
       </p:sp>
@@ -27734,7 +28316,7 @@
           <a:noFill/>
         </p:spPr>
         <p:txBody>
-          <a:bodyPr wrap="square" lIns="0" rIns="0" tIns="0" bIns="0" anchor="t">
+          <a:bodyPr wrap="square" lIns="0" tIns="0" rIns="0" bIns="0" anchor="t">
             <a:spAutoFit/>
           </a:bodyPr>
           <a:lstStyle/>
@@ -27797,6 +28379,7 @@
           <a:lstStyle/>
           <a:p>
             <a:pPr algn="ctr"/>
+            <a:endParaRPr/>
           </a:p>
         </p:txBody>
       </p:sp>
@@ -27817,7 +28400,7 @@
           <a:noFill/>
         </p:spPr>
         <p:txBody>
-          <a:bodyPr wrap="square" lIns="0" rIns="0" tIns="0" bIns="0" anchor="t">
+          <a:bodyPr wrap="square" lIns="0" tIns="0" rIns="0" bIns="0" anchor="t">
             <a:spAutoFit/>
           </a:bodyPr>
           <a:lstStyle/>
@@ -27880,6 +28463,7 @@
           <a:lstStyle/>
           <a:p>
             <a:pPr algn="ctr"/>
+            <a:endParaRPr/>
           </a:p>
         </p:txBody>
       </p:sp>
@@ -27900,7 +28484,7 @@
           <a:noFill/>
         </p:spPr>
         <p:txBody>
-          <a:bodyPr wrap="square" lIns="0" rIns="0" tIns="0" bIns="0" anchor="t">
+          <a:bodyPr wrap="square" lIns="0" tIns="0" rIns="0" bIns="0" anchor="t">
             <a:spAutoFit/>
           </a:bodyPr>
           <a:lstStyle/>
@@ -27939,7 +28523,7 @@
           <a:noFill/>
         </p:spPr>
         <p:txBody>
-          <a:bodyPr wrap="square" lIns="0" rIns="0" tIns="0" bIns="0" anchor="t">
+          <a:bodyPr wrap="square" lIns="0" tIns="0" rIns="0" bIns="0" anchor="t">
             <a:spAutoFit/>
           </a:bodyPr>
           <a:lstStyle/>
@@ -27970,7 +28554,7 @@
 </file>
 
 <file path=ppt/slides/slide9.xml><?xml version="1.0" encoding="utf-8"?>
-<p:sld xmlns:a="http://schemas.openxmlformats.org/drawingml/2006/main" xmlns:p="http://schemas.openxmlformats.org/presentationml/2006/main" xmlns:r="http://schemas.openxmlformats.org/officeDocument/2006/relationships">
+<p:sld xmlns:a="http://schemas.openxmlformats.org/drawingml/2006/main" xmlns:r="http://schemas.openxmlformats.org/officeDocument/2006/relationships" xmlns:p="http://schemas.openxmlformats.org/presentationml/2006/main">
   <p:cSld>
     <p:bg>
       <p:bgPr>
@@ -27986,7 +28570,14 @@
         <p:cNvGrpSpPr/>
         <p:nvPr/>
       </p:nvGrpSpPr>
-      <p:grpSpPr/>
+      <p:grpSpPr>
+        <a:xfrm>
+          <a:off x="0" y="0"/>
+          <a:ext cx="0" cy="0"/>
+          <a:chOff x="0" y="0"/>
+          <a:chExt cx="0" cy="0"/>
+        </a:xfrm>
+      </p:grpSpPr>
       <p:sp>
         <p:nvSpPr>
           <p:cNvPr id="2" name="Rectangle 1"/>
@@ -28028,6 +28619,7 @@
           <a:lstStyle/>
           <a:p>
             <a:pPr algn="ctr"/>
+            <a:endParaRPr/>
           </a:p>
         </p:txBody>
       </p:sp>
@@ -28048,7 +28640,7 @@
           <a:noFill/>
         </p:spPr>
         <p:txBody>
-          <a:bodyPr wrap="square" lIns="0" rIns="0" tIns="0" bIns="0" anchor="t">
+          <a:bodyPr wrap="square" lIns="0" tIns="0" rIns="0" bIns="0" anchor="t">
             <a:spAutoFit/>
           </a:bodyPr>
           <a:lstStyle/>
@@ -28087,7 +28679,7 @@
           <a:noFill/>
         </p:spPr>
         <p:txBody>
-          <a:bodyPr wrap="square" lIns="0" rIns="0" tIns="0" bIns="0" anchor="t">
+          <a:bodyPr wrap="square" lIns="0" tIns="0" rIns="0" bIns="0" anchor="t">
             <a:spAutoFit/>
           </a:bodyPr>
           <a:lstStyle/>
@@ -28148,7 +28740,7 @@
           </a:fontRef>
         </p:style>
         <p:txBody>
-          <a:bodyPr rtlCol="0" anchor="ctr" lIns="0" rIns="0" tIns="0" bIns="0"/>
+          <a:bodyPr lIns="0" tIns="0" rIns="0" bIns="0" rtlCol="0" anchor="ctr"/>
           <a:lstStyle/>
           <a:p>
             <a:pPr algn="ctr"/>
@@ -28181,7 +28773,7 @@
           <a:noFill/>
         </p:spPr>
         <p:txBody>
-          <a:bodyPr wrap="square" lIns="0" rIns="0" tIns="0" bIns="0" anchor="t">
+          <a:bodyPr wrap="square" lIns="0" tIns="0" rIns="0" bIns="0" anchor="t">
             <a:spAutoFit/>
           </a:bodyPr>
           <a:lstStyle/>
@@ -28220,7 +28812,7 @@
           <a:noFill/>
         </p:spPr>
         <p:txBody>
-          <a:bodyPr wrap="square" lIns="0" rIns="0" tIns="0" bIns="0" anchor="t">
+          <a:bodyPr wrap="square" lIns="0" tIns="0" rIns="0" bIns="0" anchor="t">
             <a:spAutoFit/>
           </a:bodyPr>
           <a:lstStyle/>
@@ -28259,7 +28851,7 @@
           <a:noFill/>
         </p:spPr>
         <p:txBody>
-          <a:bodyPr wrap="square" lIns="0" rIns="0" tIns="0" bIns="0" anchor="t">
+          <a:bodyPr wrap="square" lIns="0" tIns="0" rIns="0" bIns="0" anchor="t">
             <a:spAutoFit/>
           </a:bodyPr>
           <a:lstStyle/>
@@ -28322,6 +28914,7 @@
           <a:lstStyle/>
           <a:p>
             <a:pPr algn="ctr"/>
+            <a:endParaRPr/>
           </a:p>
         </p:txBody>
       </p:sp>
@@ -28342,7 +28935,7 @@
           <a:noFill/>
         </p:spPr>
         <p:txBody>
-          <a:bodyPr wrap="square" lIns="0" rIns="0" tIns="0" bIns="0" anchor="t">
+          <a:bodyPr wrap="square" lIns="0" tIns="0" rIns="0" bIns="0" anchor="t">
             <a:spAutoFit/>
           </a:bodyPr>
           <a:lstStyle/>
@@ -28405,6 +28998,7 @@
           <a:lstStyle/>
           <a:p>
             <a:pPr algn="ctr"/>
+            <a:endParaRPr/>
           </a:p>
         </p:txBody>
       </p:sp>
@@ -28445,7 +29039,7 @@
           </a:fontRef>
         </p:style>
         <p:txBody>
-          <a:bodyPr rtlCol="0" anchor="ctr" lIns="0" rIns="0" tIns="0" bIns="0"/>
+          <a:bodyPr lIns="0" tIns="0" rIns="0" bIns="0" rtlCol="0" anchor="ctr"/>
           <a:lstStyle/>
           <a:p>
             <a:pPr algn="ctr"/>
@@ -28498,7 +29092,7 @@
           </a:fontRef>
         </p:style>
         <p:txBody>
-          <a:bodyPr rtlCol="0" anchor="ctr" lIns="0" rIns="0" tIns="0" bIns="0"/>
+          <a:bodyPr lIns="0" tIns="0" rIns="0" bIns="0" rtlCol="0" anchor="ctr"/>
           <a:lstStyle/>
           <a:p>
             <a:pPr algn="ctr"/>
@@ -28551,7 +29145,7 @@
           </a:fontRef>
         </p:style>
         <p:txBody>
-          <a:bodyPr rtlCol="0" anchor="ctr" lIns="0" rIns="0" tIns="0" bIns="0"/>
+          <a:bodyPr lIns="0" tIns="0" rIns="0" bIns="0" rtlCol="0" anchor="ctr"/>
           <a:lstStyle/>
           <a:p>
             <a:pPr algn="ctr"/>
@@ -28604,7 +29198,7 @@
           </a:fontRef>
         </p:style>
         <p:txBody>
-          <a:bodyPr rtlCol="0" anchor="ctr" lIns="0" rIns="0" tIns="0" bIns="0"/>
+          <a:bodyPr lIns="0" tIns="0" rIns="0" bIns="0" rtlCol="0" anchor="ctr"/>
           <a:lstStyle/>
           <a:p>
             <a:pPr algn="ctr"/>
@@ -28659,7 +29253,7 @@
           </a:fontRef>
         </p:style>
         <p:txBody>
-          <a:bodyPr rtlCol="0" anchor="ctr" rIns="0" tIns="0" bIns="0"/>
+          <a:bodyPr tIns="0" rIns="0" bIns="0" rtlCol="0" anchor="ctr"/>
           <a:lstStyle/>
           <a:p>
             <a:pPr algn="ctr"/>
@@ -28716,6 +29310,7 @@
           <a:lstStyle/>
           <a:p>
             <a:pPr algn="ctr"/>
+            <a:endParaRPr/>
           </a:p>
         </p:txBody>
       </p:sp>
@@ -28760,6 +29355,7 @@
           <a:lstStyle/>
           <a:p>
             <a:pPr algn="ctr"/>
+            <a:endParaRPr/>
           </a:p>
         </p:txBody>
       </p:sp>
@@ -28804,6 +29400,7 @@
           <a:lstStyle/>
           <a:p>
             <a:pPr algn="ctr"/>
+            <a:endParaRPr/>
           </a:p>
         </p:txBody>
       </p:sp>
@@ -28872,6 +29469,7 @@
           <a:lstStyle/>
           <a:p>
             <a:pPr algn="ctr"/>
+            <a:endParaRPr/>
           </a:p>
         </p:txBody>
       </p:sp>
@@ -28892,7 +29490,7 @@
           <a:noFill/>
         </p:spPr>
         <p:txBody>
-          <a:bodyPr wrap="square" lIns="0" rIns="0" tIns="0" bIns="0" anchor="t">
+          <a:bodyPr wrap="square" lIns="0" tIns="0" rIns="0" bIns="0" anchor="t">
             <a:spAutoFit/>
           </a:bodyPr>
           <a:lstStyle/>
@@ -28931,7 +29529,7 @@
           <a:noFill/>
         </p:spPr>
         <p:txBody>
-          <a:bodyPr wrap="square" lIns="0" rIns="0" tIns="0" bIns="0" anchor="t">
+          <a:bodyPr wrap="square" lIns="0" tIns="0" rIns="0" bIns="0" anchor="t">
             <a:spAutoFit/>
           </a:bodyPr>
           <a:lstStyle/>
@@ -28994,6 +29592,7 @@
           <a:lstStyle/>
           <a:p>
             <a:pPr algn="ctr"/>
+            <a:endParaRPr/>
           </a:p>
         </p:txBody>
       </p:sp>
@@ -29014,7 +29613,7 @@
           <a:noFill/>
         </p:spPr>
         <p:txBody>
-          <a:bodyPr wrap="square" lIns="0" rIns="0" tIns="0" bIns="0" anchor="t">
+          <a:bodyPr wrap="square" lIns="0" tIns="0" rIns="0" bIns="0" anchor="t">
             <a:spAutoFit/>
           </a:bodyPr>
           <a:lstStyle/>
@@ -29077,6 +29676,7 @@
           <a:lstStyle/>
           <a:p>
             <a:pPr algn="ctr"/>
+            <a:endParaRPr/>
           </a:p>
         </p:txBody>
       </p:sp>
@@ -29097,7 +29697,7 @@
           <a:noFill/>
         </p:spPr>
         <p:txBody>
-          <a:bodyPr wrap="square" lIns="0" rIns="0" tIns="0" bIns="0" anchor="t">
+          <a:bodyPr wrap="square" lIns="0" tIns="0" rIns="0" bIns="0" anchor="t">
             <a:spAutoFit/>
           </a:bodyPr>
           <a:lstStyle/>
@@ -29160,6 +29760,7 @@
           <a:lstStyle/>
           <a:p>
             <a:pPr algn="ctr"/>
+            <a:endParaRPr/>
           </a:p>
         </p:txBody>
       </p:sp>
@@ -29180,7 +29781,7 @@
           <a:noFill/>
         </p:spPr>
         <p:txBody>
-          <a:bodyPr wrap="square" lIns="0" rIns="0" tIns="0" bIns="0" anchor="t">
+          <a:bodyPr wrap="square" lIns="0" tIns="0" rIns="0" bIns="0" anchor="t">
             <a:spAutoFit/>
           </a:bodyPr>
           <a:lstStyle/>
@@ -29243,6 +29844,7 @@
           <a:lstStyle/>
           <a:p>
             <a:pPr algn="ctr"/>
+            <a:endParaRPr/>
           </a:p>
         </p:txBody>
       </p:sp>
@@ -29263,7 +29865,7 @@
           <a:noFill/>
         </p:spPr>
         <p:txBody>
-          <a:bodyPr wrap="square" lIns="0" rIns="0" tIns="0" bIns="0" anchor="t">
+          <a:bodyPr wrap="square" lIns="0" tIns="0" rIns="0" bIns="0" anchor="t">
             <a:spAutoFit/>
           </a:bodyPr>
           <a:lstStyle/>
@@ -29326,6 +29928,7 @@
           <a:lstStyle/>
           <a:p>
             <a:pPr algn="ctr"/>
+            <a:endParaRPr/>
           </a:p>
         </p:txBody>
       </p:sp>
@@ -29346,7 +29949,7 @@
           <a:noFill/>
         </p:spPr>
         <p:txBody>
-          <a:bodyPr wrap="square" lIns="0" rIns="0" tIns="0" bIns="0" anchor="t">
+          <a:bodyPr wrap="square" lIns="0" tIns="0" rIns="0" bIns="0" anchor="t">
             <a:spAutoFit/>
           </a:bodyPr>
           <a:lstStyle/>
@@ -29385,7 +29988,7 @@
           <a:noFill/>
         </p:spPr>
         <p:txBody>
-          <a:bodyPr wrap="square" lIns="0" rIns="0" tIns="0" bIns="0" anchor="t">
+          <a:bodyPr wrap="square" lIns="0" tIns="0" rIns="0" bIns="0" anchor="t">
             <a:spAutoFit/>
           </a:bodyPr>
           <a:lstStyle/>
